--- a/GLU_IFC_Airfield_Preparation.pptx
+++ b/GLU_IFC_Airfield_Preparation.pptx
@@ -19,6 +19,11 @@
     <p:sldId id="267" r:id="rId18"/>
     <p:sldId id="268" r:id="rId19"/>
     <p:sldId id="269" r:id="rId20"/>
+    <p:sldId id="270" r:id="rId21"/>
+    <p:sldId id="271" r:id="rId22"/>
+    <p:sldId id="272" r:id="rId23"/>
+    <p:sldId id="273" r:id="rId24"/>
+    <p:sldId id="274" r:id="rId25"/>
   </p:sldIdLst>
   <p:sldSz cx="9144000" cy="6858000" type="screen4x3"/>
   <p:notesSz cx="6858000" cy="9144000"/>
@@ -15342,6 +15347,7131 @@
                 <a:latin typeface="Segoe UI"/>
               </a:rPr>
               <a:t>14</a:t>
+            </a:r>
+          </a:p>
+        </p:txBody>
+      </p:sp>
+    </p:spTree>
+  </p:cSld>
+  <p:clrMapOvr>
+    <a:masterClrMapping/>
+  </p:clrMapOvr>
+</p:sld>
+</file>
+
+<file path=ppt/slides/slide15.xml><?xml version="1.0" encoding="utf-8"?>
+<p:sld xmlns:a="http://schemas.openxmlformats.org/drawingml/2006/main" xmlns:p="http://schemas.openxmlformats.org/presentationml/2006/main" xmlns:r="http://schemas.openxmlformats.org/officeDocument/2006/relationships">
+  <p:cSld>
+    <p:spTree>
+      <p:nvGrpSpPr>
+        <p:cNvPr id="1" name=""/>
+        <p:cNvGrpSpPr/>
+        <p:nvPr/>
+      </p:nvGrpSpPr>
+      <p:grpSpPr/>
+      <p:sp>
+        <p:nvSpPr>
+          <p:cNvPr id="2" name="TextBox 1"/>
+          <p:cNvSpPr txBox="1"/>
+          <p:nvPr/>
+        </p:nvSpPr>
+        <p:spPr>
+          <a:xfrm>
+            <a:off x="457200" y="365760"/>
+            <a:ext cx="8412480" cy="457200"/>
+          </a:xfrm>
+          <a:prstGeom prst="rect">
+            <a:avLst/>
+          </a:prstGeom>
+          <a:noFill/>
+        </p:spPr>
+        <p:txBody>
+          <a:bodyPr wrap="square" lIns="0" rIns="0" tIns="0" bIns="0">
+            <a:spAutoFit/>
+          </a:bodyPr>
+          <a:lstStyle/>
+          <a:p>
+            <a:pPr algn="l"/>
+            <a:r>
+              <a:rPr sz="2200" b="1" i="0">
+                <a:solidFill>
+                  <a:srgbClr val="6D594C"/>
+                </a:solidFill>
+                <a:latin typeface="Segoe UI"/>
+              </a:rPr>
+              <a:t>Review — Designer's Tender Lists vs IFC Rules</a:t>
+            </a:r>
+          </a:p>
+        </p:txBody>
+      </p:sp>
+      <p:sp>
+        <p:nvSpPr>
+          <p:cNvPr id="3" name="TextBox 2"/>
+          <p:cNvSpPr txBox="1"/>
+          <p:nvPr/>
+        </p:nvSpPr>
+        <p:spPr>
+          <a:xfrm>
+            <a:off x="457200" y="822960"/>
+            <a:ext cx="8412480" cy="411480"/>
+          </a:xfrm>
+          <a:prstGeom prst="rect">
+            <a:avLst/>
+          </a:prstGeom>
+          <a:noFill/>
+        </p:spPr>
+        <p:txBody>
+          <a:bodyPr wrap="square" lIns="0" rIns="0" tIns="0" bIns="0">
+            <a:spAutoFit/>
+          </a:bodyPr>
+          <a:lstStyle/>
+          <a:p>
+            <a:pPr algn="l"/>
+            <a:r>
+              <a:rPr sz="1300" b="0" i="0">
+                <a:solidFill>
+                  <a:srgbClr val="8C7464"/>
+                </a:solidFill>
+                <a:latin typeface="Segoe UI"/>
+              </a:rPr>
+              <a:t>What CAP/AV issued on 20 Feb 2026 (TR 1005, Tender), assessed against the principles in this deck</a:t>
+            </a:r>
+          </a:p>
+        </p:txBody>
+      </p:sp>
+      <p:cxnSp>
+        <p:nvCxnSpPr>
+          <p:cNvPr id="4" name="Connector 3"/>
+          <p:cNvCxnSpPr/>
+          <p:nvPr/>
+        </p:nvCxnSpPr>
+        <p:spPr>
+          <a:xfrm>
+            <a:off x="457200" y="1298448"/>
+            <a:ext cx="8229600" cy="0"/>
+          </a:xfrm>
+          <a:prstGeom prst="bentConnector3">
+            <a:avLst/>
+          </a:prstGeom>
+          <a:ln w="9525">
+            <a:solidFill>
+              <a:srgbClr val="E5E5E5"/>
+            </a:solidFill>
+          </a:ln>
+        </p:spPr>
+        <p:style>
+          <a:lnRef idx="2">
+            <a:schemeClr val="accent1"/>
+          </a:lnRef>
+          <a:fillRef idx="0">
+            <a:schemeClr val="accent1"/>
+          </a:fillRef>
+          <a:effectRef idx="1">
+            <a:schemeClr val="accent1"/>
+          </a:effectRef>
+          <a:fontRef idx="minor">
+            <a:schemeClr val="tx1"/>
+          </a:fontRef>
+        </p:style>
+      </p:cxnSp>
+      <p:sp>
+        <p:nvSpPr>
+          <p:cNvPr id="5" name="Rectangle 4"/>
+          <p:cNvSpPr/>
+          <p:nvPr/>
+        </p:nvSpPr>
+        <p:spPr>
+          <a:xfrm>
+            <a:off x="411480" y="1508760"/>
+            <a:ext cx="4023360" cy="365760"/>
+          </a:xfrm>
+          <a:prstGeom prst="rect">
+            <a:avLst/>
+          </a:prstGeom>
+          <a:solidFill>
+            <a:srgbClr val="A33D2E"/>
+          </a:solidFill>
+          <a:ln>
+            <a:noFill/>
+          </a:ln>
+          <a:effectLst/>
+        </p:spPr>
+        <p:style>
+          <a:lnRef idx="1">
+            <a:schemeClr val="accent1"/>
+          </a:lnRef>
+          <a:fillRef idx="3">
+            <a:schemeClr val="accent1"/>
+          </a:fillRef>
+          <a:effectRef idx="2">
+            <a:schemeClr val="accent1"/>
+          </a:effectRef>
+          <a:fontRef idx="minor">
+            <a:schemeClr val="lt1"/>
+          </a:fontRef>
+        </p:style>
+        <p:txBody>
+          <a:bodyPr rtlCol="0" anchor="ctr"/>
+          <a:lstStyle/>
+          <a:p>
+            <a:pPr algn="ctr"/>
+          </a:p>
+        </p:txBody>
+      </p:sp>
+      <p:sp>
+        <p:nvSpPr>
+          <p:cNvPr id="6" name="TextBox 5"/>
+          <p:cNvSpPr txBox="1"/>
+          <p:nvPr/>
+        </p:nvSpPr>
+        <p:spPr>
+          <a:xfrm>
+            <a:off x="548640" y="1508760"/>
+            <a:ext cx="3886200" cy="365760"/>
+          </a:xfrm>
+          <a:prstGeom prst="rect">
+            <a:avLst/>
+          </a:prstGeom>
+          <a:noFill/>
+        </p:spPr>
+        <p:txBody>
+          <a:bodyPr wrap="square" lIns="0" rIns="0" tIns="0" bIns="0" anchor="ctr">
+            <a:spAutoFit/>
+          </a:bodyPr>
+          <a:lstStyle/>
+          <a:p>
+            <a:pPr algn="l"/>
+            <a:r>
+              <a:rPr sz="1200" b="1" i="0">
+                <a:solidFill>
+                  <a:srgbClr val="FFFFFF"/>
+                </a:solidFill>
+                <a:latin typeface="Segoe UI"/>
+              </a:rPr>
+              <a:t>Drawings — 765 across 6 transmittals</a:t>
+            </a:r>
+          </a:p>
+        </p:txBody>
+      </p:sp>
+      <p:sp>
+        <p:nvSpPr>
+          <p:cNvPr id="7" name="Rectangle 6"/>
+          <p:cNvSpPr/>
+          <p:nvPr/>
+        </p:nvSpPr>
+        <p:spPr>
+          <a:xfrm>
+            <a:off x="411480" y="1874519"/>
+            <a:ext cx="4023360" cy="2331720"/>
+          </a:xfrm>
+          <a:prstGeom prst="rect">
+            <a:avLst/>
+          </a:prstGeom>
+          <a:solidFill>
+            <a:srgbClr val="F4EFE9"/>
+          </a:solidFill>
+          <a:ln>
+            <a:noFill/>
+          </a:ln>
+          <a:effectLst/>
+        </p:spPr>
+        <p:style>
+          <a:lnRef idx="1">
+            <a:schemeClr val="accent1"/>
+          </a:lnRef>
+          <a:fillRef idx="3">
+            <a:schemeClr val="accent1"/>
+          </a:fillRef>
+          <a:effectRef idx="2">
+            <a:schemeClr val="accent1"/>
+          </a:effectRef>
+          <a:fontRef idx="minor">
+            <a:schemeClr val="lt1"/>
+          </a:fontRef>
+        </p:style>
+        <p:txBody>
+          <a:bodyPr rtlCol="0" anchor="ctr"/>
+          <a:lstStyle/>
+          <a:p>
+            <a:pPr algn="ctr"/>
+          </a:p>
+        </p:txBody>
+      </p:sp>
+      <p:sp>
+        <p:nvSpPr>
+          <p:cNvPr id="8" name="TextBox 7"/>
+          <p:cNvSpPr txBox="1"/>
+          <p:nvPr/>
+        </p:nvSpPr>
+        <p:spPr>
+          <a:xfrm>
+            <a:off x="566928" y="1993392"/>
+            <a:ext cx="3749039" cy="2194560"/>
+          </a:xfrm>
+          <a:prstGeom prst="rect">
+            <a:avLst/>
+          </a:prstGeom>
+          <a:noFill/>
+        </p:spPr>
+        <p:txBody>
+          <a:bodyPr wrap="square" lIns="0" rIns="0" tIns="0" bIns="0">
+            <a:spAutoFit/>
+          </a:bodyPr>
+          <a:lstStyle/>
+          <a:p>
+            <a:pPr algn="l">
+              <a:spcAft>
+                <a:spcPts val="600"/>
+              </a:spcAft>
+            </a:pPr>
+            <a:r>
+              <a:rPr sz="950" b="0" i="0">
+                <a:solidFill>
+                  <a:srgbClr val="5A493F"/>
+                </a:solidFill>
+                <a:latin typeface="Segoe UI"/>
+              </a:rPr>
+              <a:t>•  ANB Arch 115 · ANB C&amp;S 148 · ANB M&amp;E 188</a:t>
+            </a:r>
+          </a:p>
+          <a:p>
+            <a:pPr algn="l">
+              <a:spcAft>
+                <a:spcPts val="600"/>
+              </a:spcAft>
+            </a:pPr>
+            <a:r>
+              <a:rPr sz="950" b="0" i="0">
+                <a:solidFill>
+                  <a:srgbClr val="5A493F"/>
+                </a:solidFill>
+                <a:latin typeface="Segoe UI"/>
+              </a:rPr>
+              <a:t>•  Sitewide Utilities 147 · AFL 50 · Airfield 117</a:t>
+            </a:r>
+          </a:p>
+          <a:p>
+            <a:pPr algn="l">
+              <a:spcAft>
+                <a:spcPts val="600"/>
+              </a:spcAft>
+            </a:pPr>
+            <a:r>
+              <a:rPr sz="950" b="0" i="0">
+                <a:solidFill>
+                  <a:srgbClr val="5A493F"/>
+                </a:solidFill>
+                <a:latin typeface="Segoe UI"/>
+              </a:rPr>
+              <a:t>•  Issue: TR 1005 · Tender · 20 Feb 2026</a:t>
+            </a:r>
+          </a:p>
+          <a:p>
+            <a:pPr algn="l">
+              <a:spcAft>
+                <a:spcPts val="600"/>
+              </a:spcAft>
+            </a:pPr>
+            <a:r>
+              <a:rPr sz="950" b="0" i="0">
+                <a:solidFill>
+                  <a:srgbClr val="5A493F"/>
+                </a:solidFill>
+                <a:latin typeface="Segoe UI"/>
+              </a:rPr>
+              <a:t>•  Revision on every row is blank or "-"</a:t>
+            </a:r>
+          </a:p>
+          <a:p>
+            <a:pPr algn="l">
+              <a:spcAft>
+                <a:spcPts val="600"/>
+              </a:spcAft>
+            </a:pPr>
+            <a:r>
+              <a:rPr sz="950" b="0" i="0">
+                <a:solidFill>
+                  <a:srgbClr val="5A493F"/>
+                </a:solidFill>
+                <a:latin typeface="Segoe UI"/>
+              </a:rPr>
+              <a:t>•  Organised by building / discipline transmittal, not one register</a:t>
+            </a:r>
+          </a:p>
+        </p:txBody>
+      </p:sp>
+      <p:sp>
+        <p:nvSpPr>
+          <p:cNvPr id="9" name="Rectangle 8"/>
+          <p:cNvSpPr/>
+          <p:nvPr/>
+        </p:nvSpPr>
+        <p:spPr>
+          <a:xfrm>
+            <a:off x="4709160" y="1508760"/>
+            <a:ext cx="4023360" cy="365760"/>
+          </a:xfrm>
+          <a:prstGeom prst="rect">
+            <a:avLst/>
+          </a:prstGeom>
+          <a:solidFill>
+            <a:srgbClr val="3E5C76"/>
+          </a:solidFill>
+          <a:ln>
+            <a:noFill/>
+          </a:ln>
+          <a:effectLst/>
+        </p:spPr>
+        <p:style>
+          <a:lnRef idx="1">
+            <a:schemeClr val="accent1"/>
+          </a:lnRef>
+          <a:fillRef idx="3">
+            <a:schemeClr val="accent1"/>
+          </a:fillRef>
+          <a:effectRef idx="2">
+            <a:schemeClr val="accent1"/>
+          </a:effectRef>
+          <a:fontRef idx="minor">
+            <a:schemeClr val="lt1"/>
+          </a:fontRef>
+        </p:style>
+        <p:txBody>
+          <a:bodyPr rtlCol="0" anchor="ctr"/>
+          <a:lstStyle/>
+          <a:p>
+            <a:pPr algn="ctr"/>
+          </a:p>
+        </p:txBody>
+      </p:sp>
+      <p:sp>
+        <p:nvSpPr>
+          <p:cNvPr id="10" name="TextBox 9"/>
+          <p:cNvSpPr txBox="1"/>
+          <p:nvPr/>
+        </p:nvSpPr>
+        <p:spPr>
+          <a:xfrm>
+            <a:off x="4846320" y="1508760"/>
+            <a:ext cx="3886200" cy="365760"/>
+          </a:xfrm>
+          <a:prstGeom prst="rect">
+            <a:avLst/>
+          </a:prstGeom>
+          <a:noFill/>
+        </p:spPr>
+        <p:txBody>
+          <a:bodyPr wrap="square" lIns="0" rIns="0" tIns="0" bIns="0" anchor="ctr">
+            <a:spAutoFit/>
+          </a:bodyPr>
+          <a:lstStyle/>
+          <a:p>
+            <a:pPr algn="l"/>
+            <a:r>
+              <a:rPr sz="1200" b="1" i="0">
+                <a:solidFill>
+                  <a:srgbClr val="FFFFFF"/>
+                </a:solidFill>
+                <a:latin typeface="Segoe UI"/>
+              </a:rPr>
+              <a:t>Specifications — 119 chapters / 6 disciplines</a:t>
+            </a:r>
+          </a:p>
+        </p:txBody>
+      </p:sp>
+      <p:sp>
+        <p:nvSpPr>
+          <p:cNvPr id="11" name="Rectangle 10"/>
+          <p:cNvSpPr/>
+          <p:nvPr/>
+        </p:nvSpPr>
+        <p:spPr>
+          <a:xfrm>
+            <a:off x="4709160" y="1874519"/>
+            <a:ext cx="4023360" cy="2331720"/>
+          </a:xfrm>
+          <a:prstGeom prst="rect">
+            <a:avLst/>
+          </a:prstGeom>
+          <a:solidFill>
+            <a:srgbClr val="F4EFE9"/>
+          </a:solidFill>
+          <a:ln>
+            <a:noFill/>
+          </a:ln>
+          <a:effectLst/>
+        </p:spPr>
+        <p:style>
+          <a:lnRef idx="1">
+            <a:schemeClr val="accent1"/>
+          </a:lnRef>
+          <a:fillRef idx="3">
+            <a:schemeClr val="accent1"/>
+          </a:fillRef>
+          <a:effectRef idx="2">
+            <a:schemeClr val="accent1"/>
+          </a:effectRef>
+          <a:fontRef idx="minor">
+            <a:schemeClr val="lt1"/>
+          </a:fontRef>
+        </p:style>
+        <p:txBody>
+          <a:bodyPr rtlCol="0" anchor="ctr"/>
+          <a:lstStyle/>
+          <a:p>
+            <a:pPr algn="ctr"/>
+          </a:p>
+        </p:txBody>
+      </p:sp>
+      <p:sp>
+        <p:nvSpPr>
+          <p:cNvPr id="12" name="TextBox 11"/>
+          <p:cNvSpPr txBox="1"/>
+          <p:nvPr/>
+        </p:nvSpPr>
+        <p:spPr>
+          <a:xfrm>
+            <a:off x="4864608" y="1993392"/>
+            <a:ext cx="3749039" cy="2194560"/>
+          </a:xfrm>
+          <a:prstGeom prst="rect">
+            <a:avLst/>
+          </a:prstGeom>
+          <a:noFill/>
+        </p:spPr>
+        <p:txBody>
+          <a:bodyPr wrap="square" lIns="0" rIns="0" tIns="0" bIns="0">
+            <a:spAutoFit/>
+          </a:bodyPr>
+          <a:lstStyle/>
+          <a:p>
+            <a:pPr algn="l">
+              <a:spcAft>
+                <a:spcPts val="600"/>
+              </a:spcAft>
+            </a:pPr>
+            <a:r>
+              <a:rPr sz="950" b="0" i="0">
+                <a:solidFill>
+                  <a:srgbClr val="5A493F"/>
+                </a:solidFill>
+                <a:latin typeface="Segoe UI"/>
+              </a:rPr>
+              <a:t>•  Arch 13 · Civil &amp; Structural 23 · M&amp;E 14</a:t>
+            </a:r>
+          </a:p>
+          <a:p>
+            <a:pPr algn="l">
+              <a:spcAft>
+                <a:spcPts val="600"/>
+              </a:spcAft>
+            </a:pPr>
+            <a:r>
+              <a:rPr sz="950" b="0" i="0">
+                <a:solidFill>
+                  <a:srgbClr val="5A493F"/>
+                </a:solidFill>
+                <a:latin typeface="Segoe UI"/>
+              </a:rPr>
+              <a:t>•  Specialised System 3 (CNS &amp; MET, ALCMS, D&amp;B)</a:t>
+            </a:r>
+          </a:p>
+          <a:p>
+            <a:pPr algn="l">
+              <a:spcAft>
+                <a:spcPts val="600"/>
+              </a:spcAft>
+            </a:pPr>
+            <a:r>
+              <a:rPr sz="950" b="0" i="0">
+                <a:solidFill>
+                  <a:srgbClr val="5A493F"/>
+                </a:solidFill>
+                <a:latin typeface="Segoe UI"/>
+              </a:rPr>
+              <a:t>•  Airfield Electrical E01–E38 · Mechanical M01–M28</a:t>
+            </a:r>
+          </a:p>
+          <a:p>
+            <a:pPr algn="l">
+              <a:spcAft>
+                <a:spcPts val="600"/>
+              </a:spcAft>
+            </a:pPr>
+            <a:r>
+              <a:rPr sz="950" b="0" i="0">
+                <a:solidFill>
+                  <a:srgbClr val="5A493F"/>
+                </a:solidFill>
+                <a:latin typeface="Segoe UI"/>
+              </a:rPr>
+              <a:t>•  Numbered per-discipline "Chapter NN" (restarts each discipline)</a:t>
+            </a:r>
+          </a:p>
+          <a:p>
+            <a:pPr algn="l">
+              <a:spcAft>
+                <a:spcPts val="600"/>
+              </a:spcAft>
+            </a:pPr>
+            <a:r>
+              <a:rPr sz="950" b="0" i="0">
+                <a:solidFill>
+                  <a:srgbClr val="5A493F"/>
+                </a:solidFill>
+                <a:latin typeface="Segoe UI"/>
+              </a:rPr>
+              <a:t>•  Not mapped to CSI or airport-specific divisions</a:t>
+            </a:r>
+          </a:p>
+        </p:txBody>
+      </p:sp>
+      <p:sp>
+        <p:nvSpPr>
+          <p:cNvPr id="13" name="Rectangle 12"/>
+          <p:cNvSpPr/>
+          <p:nvPr/>
+        </p:nvSpPr>
+        <p:spPr>
+          <a:xfrm>
+            <a:off x="411480" y="4389120"/>
+            <a:ext cx="8321040" cy="365760"/>
+          </a:xfrm>
+          <a:prstGeom prst="rect">
+            <a:avLst/>
+          </a:prstGeom>
+          <a:solidFill>
+            <a:srgbClr val="6D594C"/>
+          </a:solidFill>
+          <a:ln>
+            <a:noFill/>
+          </a:ln>
+          <a:effectLst/>
+        </p:spPr>
+        <p:style>
+          <a:lnRef idx="1">
+            <a:schemeClr val="accent1"/>
+          </a:lnRef>
+          <a:fillRef idx="3">
+            <a:schemeClr val="accent1"/>
+          </a:fillRef>
+          <a:effectRef idx="2">
+            <a:schemeClr val="accent1"/>
+          </a:effectRef>
+          <a:fontRef idx="minor">
+            <a:schemeClr val="lt1"/>
+          </a:fontRef>
+        </p:style>
+        <p:txBody>
+          <a:bodyPr rtlCol="0" anchor="ctr"/>
+          <a:lstStyle/>
+          <a:p>
+            <a:pPr algn="ctr"/>
+          </a:p>
+        </p:txBody>
+      </p:sp>
+      <p:sp>
+        <p:nvSpPr>
+          <p:cNvPr id="14" name="TextBox 13"/>
+          <p:cNvSpPr txBox="1"/>
+          <p:nvPr/>
+        </p:nvSpPr>
+        <p:spPr>
+          <a:xfrm>
+            <a:off x="548640" y="4389120"/>
+            <a:ext cx="8183879" cy="365760"/>
+          </a:xfrm>
+          <a:prstGeom prst="rect">
+            <a:avLst/>
+          </a:prstGeom>
+          <a:noFill/>
+        </p:spPr>
+        <p:txBody>
+          <a:bodyPr wrap="square" lIns="0" rIns="0" tIns="0" bIns="0" anchor="ctr">
+            <a:spAutoFit/>
+          </a:bodyPr>
+          <a:lstStyle/>
+          <a:p>
+            <a:pPr algn="l"/>
+            <a:r>
+              <a:rPr sz="1200" b="1" i="0">
+                <a:solidFill>
+                  <a:srgbClr val="FFFFFF"/>
+                </a:solidFill>
+                <a:latin typeface="Segoe UI"/>
+              </a:rPr>
+              <a:t>Overall verdict</a:t>
+            </a:r>
+          </a:p>
+        </p:txBody>
+      </p:sp>
+      <p:sp>
+        <p:nvSpPr>
+          <p:cNvPr id="15" name="Rectangle 14"/>
+          <p:cNvSpPr/>
+          <p:nvPr/>
+        </p:nvSpPr>
+        <p:spPr>
+          <a:xfrm>
+            <a:off x="411480" y="4754880"/>
+            <a:ext cx="8321040" cy="1234440"/>
+          </a:xfrm>
+          <a:prstGeom prst="rect">
+            <a:avLst/>
+          </a:prstGeom>
+          <a:solidFill>
+            <a:srgbClr val="F4EFE9"/>
+          </a:solidFill>
+          <a:ln>
+            <a:noFill/>
+          </a:ln>
+          <a:effectLst/>
+        </p:spPr>
+        <p:style>
+          <a:lnRef idx="1">
+            <a:schemeClr val="accent1"/>
+          </a:lnRef>
+          <a:fillRef idx="3">
+            <a:schemeClr val="accent1"/>
+          </a:fillRef>
+          <a:effectRef idx="2">
+            <a:schemeClr val="accent1"/>
+          </a:effectRef>
+          <a:fontRef idx="minor">
+            <a:schemeClr val="lt1"/>
+          </a:fontRef>
+        </p:style>
+        <p:txBody>
+          <a:bodyPr rtlCol="0" anchor="ctr"/>
+          <a:lstStyle/>
+          <a:p>
+            <a:pPr algn="ctr"/>
+          </a:p>
+        </p:txBody>
+      </p:sp>
+      <p:sp>
+        <p:nvSpPr>
+          <p:cNvPr id="16" name="TextBox 15"/>
+          <p:cNvSpPr txBox="1"/>
+          <p:nvPr/>
+        </p:nvSpPr>
+        <p:spPr>
+          <a:xfrm>
+            <a:off x="594360" y="4892040"/>
+            <a:ext cx="7955279" cy="1005840"/>
+          </a:xfrm>
+          <a:prstGeom prst="rect">
+            <a:avLst/>
+          </a:prstGeom>
+          <a:noFill/>
+        </p:spPr>
+        <p:txBody>
+          <a:bodyPr wrap="square" lIns="0" rIns="0" tIns="0" bIns="0">
+            <a:spAutoFit/>
+          </a:bodyPr>
+          <a:lstStyle/>
+          <a:p>
+            <a:pPr algn="l"/>
+            <a:r>
+              <a:rPr sz="1100" b="1" i="0">
+                <a:solidFill>
+                  <a:srgbClr val="5A493F"/>
+                </a:solidFill>
+                <a:latin typeface="Segoe UI"/>
+              </a:rPr>
+              <a:t>Technically comprehensive design coverage — but issued as a Tender transmittal, not yet a controlled IFC baseline. Four moves convert it to IFC:</a:t>
+            </a:r>
+          </a:p>
+          <a:p>
+            <a:pPr algn="l">
+              <a:spcBef>
+                <a:spcPts val="400"/>
+              </a:spcBef>
+            </a:pPr>
+            <a:r>
+              <a:rPr sz="1100" b="1" i="0">
+                <a:solidFill>
+                  <a:srgbClr val="6D594C"/>
+                </a:solidFill>
+                <a:latin typeface="Segoe UI"/>
+              </a:rPr>
+              <a:t>1) one consolidated master register   2) frozen revision + status   3) harmonised numbering   4) drawing–spec–BoQ mapping.</a:t>
+            </a:r>
+          </a:p>
+        </p:txBody>
+      </p:sp>
+      <p:cxnSp>
+        <p:nvCxnSpPr>
+          <p:cNvPr id="17" name="Connector 16"/>
+          <p:cNvCxnSpPr/>
+          <p:nvPr/>
+        </p:nvCxnSpPr>
+        <p:spPr>
+          <a:xfrm>
+            <a:off x="365760" y="6537960"/>
+            <a:ext cx="6492240" cy="0"/>
+          </a:xfrm>
+          <a:prstGeom prst="bentConnector3">
+            <a:avLst/>
+          </a:prstGeom>
+          <a:ln w="9525">
+            <a:solidFill>
+              <a:srgbClr val="E5E5E5"/>
+            </a:solidFill>
+          </a:ln>
+        </p:spPr>
+        <p:style>
+          <a:lnRef idx="2">
+            <a:schemeClr val="accent1"/>
+          </a:lnRef>
+          <a:fillRef idx="0">
+            <a:schemeClr val="accent1"/>
+          </a:fillRef>
+          <a:effectRef idx="1">
+            <a:schemeClr val="accent1"/>
+          </a:effectRef>
+          <a:fontRef idx="minor">
+            <a:schemeClr val="tx1"/>
+          </a:fontRef>
+        </p:style>
+      </p:cxnSp>
+      <p:sp>
+        <p:nvSpPr>
+          <p:cNvPr id="18" name="TextBox 17"/>
+          <p:cNvSpPr txBox="1"/>
+          <p:nvPr/>
+        </p:nvSpPr>
+        <p:spPr>
+          <a:xfrm>
+            <a:off x="3657600" y="6565392"/>
+            <a:ext cx="2286000" cy="228600"/>
+          </a:xfrm>
+          <a:prstGeom prst="rect">
+            <a:avLst/>
+          </a:prstGeom>
+          <a:noFill/>
+        </p:spPr>
+        <p:txBody>
+          <a:bodyPr wrap="square" lIns="0" rIns="0" tIns="0" bIns="0">
+            <a:spAutoFit/>
+          </a:bodyPr>
+          <a:lstStyle/>
+          <a:p>
+            <a:pPr algn="ctr"/>
+            <a:r>
+              <a:rPr sz="800" b="0" i="0">
+                <a:solidFill>
+                  <a:srgbClr val="8C7464"/>
+                </a:solidFill>
+                <a:latin typeface="Segoe UI"/>
+              </a:rPr>
+              <a:t>STRICTLY CONFIDENTIAL</a:t>
+            </a:r>
+          </a:p>
+        </p:txBody>
+      </p:sp>
+      <p:cxnSp>
+        <p:nvCxnSpPr>
+          <p:cNvPr id="19" name="Connector 18"/>
+          <p:cNvCxnSpPr/>
+          <p:nvPr/>
+        </p:nvCxnSpPr>
+        <p:spPr>
+          <a:xfrm>
+            <a:off x="8503920" y="6565392"/>
+            <a:ext cx="0" cy="201167"/>
+          </a:xfrm>
+          <a:prstGeom prst="bentConnector3">
+            <a:avLst/>
+          </a:prstGeom>
+          <a:ln w="25400">
+            <a:solidFill>
+              <a:srgbClr val="6D594C"/>
+            </a:solidFill>
+          </a:ln>
+        </p:spPr>
+        <p:style>
+          <a:lnRef idx="2">
+            <a:schemeClr val="accent1"/>
+          </a:lnRef>
+          <a:fillRef idx="0">
+            <a:schemeClr val="accent1"/>
+          </a:fillRef>
+          <a:effectRef idx="1">
+            <a:schemeClr val="accent1"/>
+          </a:effectRef>
+          <a:fontRef idx="minor">
+            <a:schemeClr val="tx1"/>
+          </a:fontRef>
+        </p:style>
+      </p:cxnSp>
+      <p:sp>
+        <p:nvSpPr>
+          <p:cNvPr id="20" name="TextBox 19"/>
+          <p:cNvSpPr txBox="1"/>
+          <p:nvPr/>
+        </p:nvSpPr>
+        <p:spPr>
+          <a:xfrm>
+            <a:off x="8595360" y="6547104"/>
+            <a:ext cx="365760" cy="274320"/>
+          </a:xfrm>
+          <a:prstGeom prst="rect">
+            <a:avLst/>
+          </a:prstGeom>
+          <a:noFill/>
+        </p:spPr>
+        <p:txBody>
+          <a:bodyPr wrap="square" lIns="0" rIns="0" tIns="0" bIns="0">
+            <a:spAutoFit/>
+          </a:bodyPr>
+          <a:lstStyle/>
+          <a:p>
+            <a:pPr algn="l"/>
+            <a:r>
+              <a:rPr sz="1000" b="1" i="0">
+                <a:solidFill>
+                  <a:srgbClr val="6D594C"/>
+                </a:solidFill>
+                <a:latin typeface="Segoe UI"/>
+              </a:rPr>
+              <a:t>15</a:t>
+            </a:r>
+          </a:p>
+        </p:txBody>
+      </p:sp>
+    </p:spTree>
+  </p:cSld>
+  <p:clrMapOvr>
+    <a:masterClrMapping/>
+  </p:clrMapOvr>
+</p:sld>
+</file>
+
+<file path=ppt/slides/slide16.xml><?xml version="1.0" encoding="utf-8"?>
+<p:sld xmlns:a="http://schemas.openxmlformats.org/drawingml/2006/main" xmlns:p="http://schemas.openxmlformats.org/presentationml/2006/main" xmlns:r="http://schemas.openxmlformats.org/officeDocument/2006/relationships">
+  <p:cSld>
+    <p:spTree>
+      <p:nvGrpSpPr>
+        <p:cNvPr id="1" name=""/>
+        <p:cNvGrpSpPr/>
+        <p:nvPr/>
+      </p:nvGrpSpPr>
+      <p:grpSpPr/>
+      <p:sp>
+        <p:nvSpPr>
+          <p:cNvPr id="2" name="TextBox 1"/>
+          <p:cNvSpPr txBox="1"/>
+          <p:nvPr/>
+        </p:nvSpPr>
+        <p:spPr>
+          <a:xfrm>
+            <a:off x="457200" y="365760"/>
+            <a:ext cx="8412480" cy="457200"/>
+          </a:xfrm>
+          <a:prstGeom prst="rect">
+            <a:avLst/>
+          </a:prstGeom>
+          <a:noFill/>
+        </p:spPr>
+        <p:txBody>
+          <a:bodyPr wrap="square" lIns="0" rIns="0" tIns="0" bIns="0">
+            <a:spAutoFit/>
+          </a:bodyPr>
+          <a:lstStyle/>
+          <a:p>
+            <a:pPr algn="l"/>
+            <a:r>
+              <a:rPr sz="2200" b="1" i="0">
+                <a:solidFill>
+                  <a:srgbClr val="6D594C"/>
+                </a:solidFill>
+                <a:latin typeface="Segoe UI"/>
+              </a:rPr>
+              <a:t>Drawing List — Findings vs IFC Rules</a:t>
+            </a:r>
+          </a:p>
+        </p:txBody>
+      </p:sp>
+      <p:sp>
+        <p:nvSpPr>
+          <p:cNvPr id="3" name="TextBox 2"/>
+          <p:cNvSpPr txBox="1"/>
+          <p:nvPr/>
+        </p:nvSpPr>
+        <p:spPr>
+          <a:xfrm>
+            <a:off x="457200" y="822960"/>
+            <a:ext cx="8412480" cy="411480"/>
+          </a:xfrm>
+          <a:prstGeom prst="rect">
+            <a:avLst/>
+          </a:prstGeom>
+          <a:noFill/>
+        </p:spPr>
+        <p:txBody>
+          <a:bodyPr wrap="square" lIns="0" rIns="0" tIns="0" bIns="0">
+            <a:spAutoFit/>
+          </a:bodyPr>
+          <a:lstStyle/>
+          <a:p>
+            <a:pPr algn="l"/>
+            <a:r>
+              <a:rPr sz="1300" b="0" i="0">
+                <a:solidFill>
+                  <a:srgbClr val="8C7464"/>
+                </a:solidFill>
+                <a:latin typeface="Segoe UI"/>
+              </a:rPr>
+              <a:t>Strong design content; the gaps are about control and structure, not coverage</a:t>
+            </a:r>
+          </a:p>
+        </p:txBody>
+      </p:sp>
+      <p:cxnSp>
+        <p:nvCxnSpPr>
+          <p:cNvPr id="4" name="Connector 3"/>
+          <p:cNvCxnSpPr/>
+          <p:nvPr/>
+        </p:nvCxnSpPr>
+        <p:spPr>
+          <a:xfrm>
+            <a:off x="457200" y="1298448"/>
+            <a:ext cx="8229600" cy="0"/>
+          </a:xfrm>
+          <a:prstGeom prst="bentConnector3">
+            <a:avLst/>
+          </a:prstGeom>
+          <a:ln w="9525">
+            <a:solidFill>
+              <a:srgbClr val="E5E5E5"/>
+            </a:solidFill>
+          </a:ln>
+        </p:spPr>
+        <p:style>
+          <a:lnRef idx="2">
+            <a:schemeClr val="accent1"/>
+          </a:lnRef>
+          <a:fillRef idx="0">
+            <a:schemeClr val="accent1"/>
+          </a:fillRef>
+          <a:effectRef idx="1">
+            <a:schemeClr val="accent1"/>
+          </a:effectRef>
+          <a:fontRef idx="minor">
+            <a:schemeClr val="tx1"/>
+          </a:fontRef>
+        </p:style>
+      </p:cxnSp>
+      <p:sp>
+        <p:nvSpPr>
+          <p:cNvPr id="5" name="Rectangle 4"/>
+          <p:cNvSpPr/>
+          <p:nvPr/>
+        </p:nvSpPr>
+        <p:spPr>
+          <a:xfrm>
+            <a:off x="411480" y="1481328"/>
+            <a:ext cx="4114800" cy="365760"/>
+          </a:xfrm>
+          <a:prstGeom prst="rect">
+            <a:avLst/>
+          </a:prstGeom>
+          <a:solidFill>
+            <a:srgbClr val="2E7D32"/>
+          </a:solidFill>
+          <a:ln>
+            <a:noFill/>
+          </a:ln>
+          <a:effectLst/>
+        </p:spPr>
+        <p:style>
+          <a:lnRef idx="1">
+            <a:schemeClr val="accent1"/>
+          </a:lnRef>
+          <a:fillRef idx="3">
+            <a:schemeClr val="accent1"/>
+          </a:fillRef>
+          <a:effectRef idx="2">
+            <a:schemeClr val="accent1"/>
+          </a:effectRef>
+          <a:fontRef idx="minor">
+            <a:schemeClr val="lt1"/>
+          </a:fontRef>
+        </p:style>
+        <p:txBody>
+          <a:bodyPr rtlCol="0" anchor="ctr"/>
+          <a:lstStyle/>
+          <a:p>
+            <a:pPr algn="ctr"/>
+          </a:p>
+        </p:txBody>
+      </p:sp>
+      <p:sp>
+        <p:nvSpPr>
+          <p:cNvPr id="6" name="TextBox 5"/>
+          <p:cNvSpPr txBox="1"/>
+          <p:nvPr/>
+        </p:nvSpPr>
+        <p:spPr>
+          <a:xfrm>
+            <a:off x="548640" y="1481328"/>
+            <a:ext cx="3840480" cy="365760"/>
+          </a:xfrm>
+          <a:prstGeom prst="rect">
+            <a:avLst/>
+          </a:prstGeom>
+          <a:noFill/>
+        </p:spPr>
+        <p:txBody>
+          <a:bodyPr wrap="square" lIns="0" rIns="0" tIns="0" bIns="0" anchor="ctr">
+            <a:spAutoFit/>
+          </a:bodyPr>
+          <a:lstStyle/>
+          <a:p>
+            <a:pPr algn="l"/>
+            <a:r>
+              <a:rPr sz="1250" b="1" i="0">
+                <a:solidFill>
+                  <a:srgbClr val="FFFFFF"/>
+                </a:solidFill>
+                <a:latin typeface="Segoe UI"/>
+              </a:rPr>
+              <a:t>Strengths</a:t>
+            </a:r>
+          </a:p>
+        </p:txBody>
+      </p:sp>
+      <p:sp>
+        <p:nvSpPr>
+          <p:cNvPr id="7" name="Rectangle 6"/>
+          <p:cNvSpPr/>
+          <p:nvPr/>
+        </p:nvSpPr>
+        <p:spPr>
+          <a:xfrm>
+            <a:off x="411480" y="1847088"/>
+            <a:ext cx="4114800" cy="4160520"/>
+          </a:xfrm>
+          <a:prstGeom prst="rect">
+            <a:avLst/>
+          </a:prstGeom>
+          <a:solidFill>
+            <a:srgbClr val="F4EFE9"/>
+          </a:solidFill>
+          <a:ln>
+            <a:noFill/>
+          </a:ln>
+          <a:effectLst/>
+        </p:spPr>
+        <p:style>
+          <a:lnRef idx="1">
+            <a:schemeClr val="accent1"/>
+          </a:lnRef>
+          <a:fillRef idx="3">
+            <a:schemeClr val="accent1"/>
+          </a:fillRef>
+          <a:effectRef idx="2">
+            <a:schemeClr val="accent1"/>
+          </a:effectRef>
+          <a:fontRef idx="minor">
+            <a:schemeClr val="lt1"/>
+          </a:fontRef>
+        </p:style>
+        <p:txBody>
+          <a:bodyPr rtlCol="0" anchor="ctr"/>
+          <a:lstStyle/>
+          <a:p>
+            <a:pPr algn="ctr"/>
+          </a:p>
+        </p:txBody>
+      </p:sp>
+      <p:sp>
+        <p:nvSpPr>
+          <p:cNvPr id="8" name="TextBox 7"/>
+          <p:cNvSpPr txBox="1"/>
+          <p:nvPr/>
+        </p:nvSpPr>
+        <p:spPr>
+          <a:xfrm>
+            <a:off x="576072" y="1984248"/>
+            <a:ext cx="3785615" cy="3931920"/>
+          </a:xfrm>
+          <a:prstGeom prst="rect">
+            <a:avLst/>
+          </a:prstGeom>
+          <a:noFill/>
+        </p:spPr>
+        <p:txBody>
+          <a:bodyPr wrap="square" lIns="0" rIns="0" tIns="0" bIns="0">
+            <a:spAutoFit/>
+          </a:bodyPr>
+          <a:lstStyle/>
+          <a:p>
+            <a:pPr algn="l">
+              <a:spcAft>
+                <a:spcPts val="700"/>
+              </a:spcAft>
+            </a:pPr>
+            <a:r>
+              <a:rPr sz="1000" b="1" i="0">
+                <a:solidFill>
+                  <a:srgbClr val="2E7D32"/>
+                </a:solidFill>
+                <a:latin typeface="Segoe UI"/>
+              </a:rPr>
+              <a:t>•  </a:t>
+            </a:r>
+            <a:r>
+              <a:rPr sz="950" b="0" i="0">
+                <a:solidFill>
+                  <a:srgbClr val="5A493F"/>
+                </a:solidFill>
+                <a:latin typeface="Segoe UI"/>
+              </a:rPr>
+              <a:t>Broad airfield civil — geometry, spot levels, pavement type &amp; profile, grading, marking &amp; signage, drainage</a:t>
+            </a:r>
+          </a:p>
+          <a:p>
+            <a:pPr algn="l">
+              <a:spcAft>
+                <a:spcPts val="700"/>
+              </a:spcAft>
+            </a:pPr>
+            <a:r>
+              <a:rPr sz="1000" b="1" i="0">
+                <a:solidFill>
+                  <a:srgbClr val="2E7D32"/>
+                </a:solidFill>
+                <a:latin typeface="Segoe UI"/>
+              </a:rPr>
+              <a:t>•  </a:t>
+            </a:r>
+            <a:r>
+              <a:rPr sz="950" b="0" i="0">
+                <a:solidFill>
+                  <a:srgbClr val="5A493F"/>
+                </a:solidFill>
+                <a:latin typeface="Segoe UI"/>
+              </a:rPr>
+              <a:t>Complete AGL/AFL set — lighting &amp; guidance signs, primary/secondary cabling, ducts, earthing, LPS, CCR</a:t>
+            </a:r>
+          </a:p>
+          <a:p>
+            <a:pPr algn="l">
+              <a:spcAft>
+                <a:spcPts val="700"/>
+              </a:spcAft>
+            </a:pPr>
+            <a:r>
+              <a:rPr sz="1000" b="1" i="0">
+                <a:solidFill>
+                  <a:srgbClr val="2E7D32"/>
+                </a:solidFill>
+                <a:latin typeface="Segoe UI"/>
+              </a:rPr>
+              <a:t>•  </a:t>
+            </a:r>
+            <a:r>
+              <a:rPr sz="950" b="0" i="0">
+                <a:solidFill>
+                  <a:srgbClr val="5A493F"/>
+                </a:solidFill>
+                <a:latin typeface="Segoe UI"/>
+              </a:rPr>
+              <a:t>Integrated buildings covered — ATCT, MET, ARFF, AMF, GSE, AWM (Arch / C&amp;S / M&amp;E)</a:t>
+            </a:r>
+          </a:p>
+          <a:p>
+            <a:pPr algn="l">
+              <a:spcAft>
+                <a:spcPts val="700"/>
+              </a:spcAft>
+            </a:pPr>
+            <a:r>
+              <a:rPr sz="1000" b="1" i="0">
+                <a:solidFill>
+                  <a:srgbClr val="2E7D32"/>
+                </a:solidFill>
+                <a:latin typeface="Segoe UI"/>
+              </a:rPr>
+              <a:t>•  </a:t>
+            </a:r>
+            <a:r>
+              <a:rPr sz="950" b="0" i="0">
+                <a:solidFill>
+                  <a:srgbClr val="5A493F"/>
+                </a:solidFill>
+                <a:latin typeface="Segoe UI"/>
+              </a:rPr>
+              <a:t>Perimeter &amp; security fence + sitewide utilities (fire hydrant, pump rooms, perimeter road)</a:t>
+            </a:r>
+          </a:p>
+          <a:p>
+            <a:pPr algn="l">
+              <a:spcAft>
+                <a:spcPts val="700"/>
+              </a:spcAft>
+            </a:pPr>
+            <a:r>
+              <a:rPr sz="1000" b="1" i="0">
+                <a:solidFill>
+                  <a:srgbClr val="2E7D32"/>
+                </a:solidFill>
+                <a:latin typeface="Segoe UI"/>
+              </a:rPr>
+              <a:t>•  </a:t>
+            </a:r>
+            <a:r>
+              <a:rPr sz="950" b="0" i="0">
+                <a:solidFill>
+                  <a:srgbClr val="5A493F"/>
+                </a:solidFill>
+                <a:latin typeface="Segoe UI"/>
+              </a:rPr>
+              <a:t>"Design &amp; Build Items" already identified and grouped</a:t>
+            </a:r>
+          </a:p>
+        </p:txBody>
+      </p:sp>
+      <p:sp>
+        <p:nvSpPr>
+          <p:cNvPr id="9" name="Rectangle 8"/>
+          <p:cNvSpPr/>
+          <p:nvPr/>
+        </p:nvSpPr>
+        <p:spPr>
+          <a:xfrm>
+            <a:off x="4617720" y="1481328"/>
+            <a:ext cx="4114800" cy="365760"/>
+          </a:xfrm>
+          <a:prstGeom prst="rect">
+            <a:avLst/>
+          </a:prstGeom>
+          <a:solidFill>
+            <a:srgbClr val="A33D2E"/>
+          </a:solidFill>
+          <a:ln>
+            <a:noFill/>
+          </a:ln>
+          <a:effectLst/>
+        </p:spPr>
+        <p:style>
+          <a:lnRef idx="1">
+            <a:schemeClr val="accent1"/>
+          </a:lnRef>
+          <a:fillRef idx="3">
+            <a:schemeClr val="accent1"/>
+          </a:fillRef>
+          <a:effectRef idx="2">
+            <a:schemeClr val="accent1"/>
+          </a:effectRef>
+          <a:fontRef idx="minor">
+            <a:schemeClr val="lt1"/>
+          </a:fontRef>
+        </p:style>
+        <p:txBody>
+          <a:bodyPr rtlCol="0" anchor="ctr"/>
+          <a:lstStyle/>
+          <a:p>
+            <a:pPr algn="ctr"/>
+          </a:p>
+        </p:txBody>
+      </p:sp>
+      <p:sp>
+        <p:nvSpPr>
+          <p:cNvPr id="10" name="TextBox 9"/>
+          <p:cNvSpPr txBox="1"/>
+          <p:nvPr/>
+        </p:nvSpPr>
+        <p:spPr>
+          <a:xfrm>
+            <a:off x="4754880" y="1481328"/>
+            <a:ext cx="3840480" cy="365760"/>
+          </a:xfrm>
+          <a:prstGeom prst="rect">
+            <a:avLst/>
+          </a:prstGeom>
+          <a:noFill/>
+        </p:spPr>
+        <p:txBody>
+          <a:bodyPr wrap="square" lIns="0" rIns="0" tIns="0" bIns="0" anchor="ctr">
+            <a:spAutoFit/>
+          </a:bodyPr>
+          <a:lstStyle/>
+          <a:p>
+            <a:pPr algn="l"/>
+            <a:r>
+              <a:rPr sz="1250" b="1" i="0">
+                <a:solidFill>
+                  <a:srgbClr val="FFFFFF"/>
+                </a:solidFill>
+                <a:latin typeface="Segoe UI"/>
+              </a:rPr>
+              <a:t>Gaps vs IFC rules</a:t>
+            </a:r>
+          </a:p>
+        </p:txBody>
+      </p:sp>
+      <p:sp>
+        <p:nvSpPr>
+          <p:cNvPr id="11" name="Rectangle 10"/>
+          <p:cNvSpPr/>
+          <p:nvPr/>
+        </p:nvSpPr>
+        <p:spPr>
+          <a:xfrm>
+            <a:off x="4617720" y="1847088"/>
+            <a:ext cx="4114800" cy="4160520"/>
+          </a:xfrm>
+          <a:prstGeom prst="rect">
+            <a:avLst/>
+          </a:prstGeom>
+          <a:solidFill>
+            <a:srgbClr val="F4EFE9"/>
+          </a:solidFill>
+          <a:ln>
+            <a:noFill/>
+          </a:ln>
+          <a:effectLst/>
+        </p:spPr>
+        <p:style>
+          <a:lnRef idx="1">
+            <a:schemeClr val="accent1"/>
+          </a:lnRef>
+          <a:fillRef idx="3">
+            <a:schemeClr val="accent1"/>
+          </a:fillRef>
+          <a:effectRef idx="2">
+            <a:schemeClr val="accent1"/>
+          </a:effectRef>
+          <a:fontRef idx="minor">
+            <a:schemeClr val="lt1"/>
+          </a:fontRef>
+        </p:style>
+        <p:txBody>
+          <a:bodyPr rtlCol="0" anchor="ctr"/>
+          <a:lstStyle/>
+          <a:p>
+            <a:pPr algn="ctr"/>
+          </a:p>
+        </p:txBody>
+      </p:sp>
+      <p:sp>
+        <p:nvSpPr>
+          <p:cNvPr id="12" name="TextBox 11"/>
+          <p:cNvSpPr txBox="1"/>
+          <p:nvPr/>
+        </p:nvSpPr>
+        <p:spPr>
+          <a:xfrm>
+            <a:off x="4782312" y="1984248"/>
+            <a:ext cx="3785615" cy="3931920"/>
+          </a:xfrm>
+          <a:prstGeom prst="rect">
+            <a:avLst/>
+          </a:prstGeom>
+          <a:noFill/>
+        </p:spPr>
+        <p:txBody>
+          <a:bodyPr wrap="square" lIns="0" rIns="0" tIns="0" bIns="0">
+            <a:spAutoFit/>
+          </a:bodyPr>
+          <a:lstStyle/>
+          <a:p>
+            <a:pPr algn="l">
+              <a:spcAft>
+                <a:spcPts val="700"/>
+              </a:spcAft>
+            </a:pPr>
+            <a:r>
+              <a:rPr sz="1000" b="1" i="0">
+                <a:solidFill>
+                  <a:srgbClr val="A33D2E"/>
+                </a:solidFill>
+                <a:latin typeface="Segoe UI"/>
+              </a:rPr>
+              <a:t>•  </a:t>
+            </a:r>
+            <a:r>
+              <a:rPr sz="950" b="0" i="0">
+                <a:solidFill>
+                  <a:srgbClr val="5A493F"/>
+                </a:solidFill>
+                <a:latin typeface="Segoe UI"/>
+              </a:rPr>
+              <a:t>Six separate transmittals, no single register</a:t>
+            </a:r>
+            <a:r>
+              <a:rPr sz="850" b="0" i="1">
+                <a:solidFill>
+                  <a:srgbClr val="8C7464"/>
+                </a:solidFill>
+                <a:latin typeface="Segoe UI"/>
+              </a:rPr>
+              <a:t>  → Volume 0 / Slide 7</a:t>
+            </a:r>
+          </a:p>
+          <a:p>
+            <a:pPr algn="l">
+              <a:spcAft>
+                <a:spcPts val="700"/>
+              </a:spcAft>
+            </a:pPr>
+            <a:r>
+              <a:rPr sz="1000" b="1" i="0">
+                <a:solidFill>
+                  <a:srgbClr val="A33D2E"/>
+                </a:solidFill>
+                <a:latin typeface="Segoe UI"/>
+              </a:rPr>
+              <a:t>•  </a:t>
+            </a:r>
+            <a:r>
+              <a:rPr sz="950" b="0" i="0">
+                <a:solidFill>
+                  <a:srgbClr val="5A493F"/>
+                </a:solidFill>
+                <a:latin typeface="Segoe UI"/>
+              </a:rPr>
+              <a:t>No status; revision blank or "-" on all 765 rows</a:t>
+            </a:r>
+            <a:r>
+              <a:rPr sz="850" b="0" i="1">
+                <a:solidFill>
+                  <a:srgbClr val="8C7464"/>
+                </a:solidFill>
+                <a:latin typeface="Segoe UI"/>
+              </a:rPr>
+              <a:t>  → Register + Checklist / Slide 8·12</a:t>
+            </a:r>
+          </a:p>
+          <a:p>
+            <a:pPr algn="l">
+              <a:spcAft>
+                <a:spcPts val="700"/>
+              </a:spcAft>
+            </a:pPr>
+            <a:r>
+              <a:rPr sz="1000" b="1" i="0">
+                <a:solidFill>
+                  <a:srgbClr val="A33D2E"/>
+                </a:solidFill>
+                <a:latin typeface="Segoe UI"/>
+              </a:rPr>
+              <a:t>•  </a:t>
+            </a:r>
+            <a:r>
+              <a:rPr sz="950" b="0" i="0">
+                <a:solidFill>
+                  <a:srgbClr val="5A493F"/>
+                </a:solidFill>
+                <a:latin typeface="Segoe UI"/>
+              </a:rPr>
+              <a:t>Numbering not harmonised — AV vs UTL, mixed _ / - / space, 3- vs 4-digit, 8 "---/XX" placeholders</a:t>
+            </a:r>
+            <a:r>
+              <a:rPr sz="850" b="0" i="1">
+                <a:solidFill>
+                  <a:srgbClr val="8C7464"/>
+                </a:solidFill>
+                <a:latin typeface="Segoe UI"/>
+              </a:rPr>
+              <a:t>  → Drawing coding / Slide 10</a:t>
+            </a:r>
+          </a:p>
+          <a:p>
+            <a:pPr algn="l">
+              <a:spcAft>
+                <a:spcPts val="700"/>
+              </a:spcAft>
+            </a:pPr>
+            <a:r>
+              <a:rPr sz="1000" b="1" i="0">
+                <a:solidFill>
+                  <a:srgbClr val="A33D2E"/>
+                </a:solidFill>
+                <a:latin typeface="Segoe UI"/>
+              </a:rPr>
+              <a:t>•  </a:t>
+            </a:r>
+            <a:r>
+              <a:rPr sz="950" b="0" i="0">
+                <a:solidFill>
+                  <a:srgbClr val="5A493F"/>
+                </a:solidFill>
+                <a:latin typeface="Segoe UI"/>
+              </a:rPr>
+              <a:t>Missing control fields — asset/zone, discipline, type, related spec/BoQ/model, dependencies, contractual status</a:t>
+            </a:r>
+            <a:r>
+              <a:rPr sz="850" b="0" i="1">
+                <a:solidFill>
+                  <a:srgbClr val="8C7464"/>
+                </a:solidFill>
+                <a:latin typeface="Segoe UI"/>
+              </a:rPr>
+              <a:t>  → Master register / Slide 8</a:t>
+            </a:r>
+          </a:p>
+          <a:p>
+            <a:pPr algn="l">
+              <a:spcAft>
+                <a:spcPts val="700"/>
+              </a:spcAft>
+            </a:pPr>
+            <a:r>
+              <a:rPr sz="1000" b="1" i="0">
+                <a:solidFill>
+                  <a:srgbClr val="A33D2E"/>
+                </a:solidFill>
+                <a:latin typeface="Segoe UI"/>
+              </a:rPr>
+              <a:t>•  </a:t>
+            </a:r>
+            <a:r>
+              <a:rPr sz="950" b="0" i="0">
+                <a:solidFill>
+                  <a:srgbClr val="5A493F"/>
+                </a:solidFill>
+                <a:latin typeface="Segoe UI"/>
+              </a:rPr>
+              <a:t>No P01 package code or consistent asset token</a:t>
+            </a:r>
+            <a:r>
+              <a:rPr sz="850" b="0" i="1">
+                <a:solidFill>
+                  <a:srgbClr val="8C7464"/>
+                </a:solidFill>
+                <a:latin typeface="Segoe UI"/>
+              </a:rPr>
+              <a:t>  → Principle / Slide 5</a:t>
+            </a:r>
+          </a:p>
+        </p:txBody>
+      </p:sp>
+      <p:cxnSp>
+        <p:nvCxnSpPr>
+          <p:cNvPr id="13" name="Connector 12"/>
+          <p:cNvCxnSpPr/>
+          <p:nvPr/>
+        </p:nvCxnSpPr>
+        <p:spPr>
+          <a:xfrm>
+            <a:off x="365760" y="6537960"/>
+            <a:ext cx="6492240" cy="0"/>
+          </a:xfrm>
+          <a:prstGeom prst="bentConnector3">
+            <a:avLst/>
+          </a:prstGeom>
+          <a:ln w="9525">
+            <a:solidFill>
+              <a:srgbClr val="E5E5E5"/>
+            </a:solidFill>
+          </a:ln>
+        </p:spPr>
+        <p:style>
+          <a:lnRef idx="2">
+            <a:schemeClr val="accent1"/>
+          </a:lnRef>
+          <a:fillRef idx="0">
+            <a:schemeClr val="accent1"/>
+          </a:fillRef>
+          <a:effectRef idx="1">
+            <a:schemeClr val="accent1"/>
+          </a:effectRef>
+          <a:fontRef idx="minor">
+            <a:schemeClr val="tx1"/>
+          </a:fontRef>
+        </p:style>
+      </p:cxnSp>
+      <p:sp>
+        <p:nvSpPr>
+          <p:cNvPr id="14" name="TextBox 13"/>
+          <p:cNvSpPr txBox="1"/>
+          <p:nvPr/>
+        </p:nvSpPr>
+        <p:spPr>
+          <a:xfrm>
+            <a:off x="3657600" y="6565392"/>
+            <a:ext cx="2286000" cy="228600"/>
+          </a:xfrm>
+          <a:prstGeom prst="rect">
+            <a:avLst/>
+          </a:prstGeom>
+          <a:noFill/>
+        </p:spPr>
+        <p:txBody>
+          <a:bodyPr wrap="square" lIns="0" rIns="0" tIns="0" bIns="0">
+            <a:spAutoFit/>
+          </a:bodyPr>
+          <a:lstStyle/>
+          <a:p>
+            <a:pPr algn="ctr"/>
+            <a:r>
+              <a:rPr sz="800" b="0" i="0">
+                <a:solidFill>
+                  <a:srgbClr val="8C7464"/>
+                </a:solidFill>
+                <a:latin typeface="Segoe UI"/>
+              </a:rPr>
+              <a:t>STRICTLY CONFIDENTIAL</a:t>
+            </a:r>
+          </a:p>
+        </p:txBody>
+      </p:sp>
+      <p:cxnSp>
+        <p:nvCxnSpPr>
+          <p:cNvPr id="15" name="Connector 14"/>
+          <p:cNvCxnSpPr/>
+          <p:nvPr/>
+        </p:nvCxnSpPr>
+        <p:spPr>
+          <a:xfrm>
+            <a:off x="8503920" y="6565392"/>
+            <a:ext cx="0" cy="201167"/>
+          </a:xfrm>
+          <a:prstGeom prst="bentConnector3">
+            <a:avLst/>
+          </a:prstGeom>
+          <a:ln w="25400">
+            <a:solidFill>
+              <a:srgbClr val="6D594C"/>
+            </a:solidFill>
+          </a:ln>
+        </p:spPr>
+        <p:style>
+          <a:lnRef idx="2">
+            <a:schemeClr val="accent1"/>
+          </a:lnRef>
+          <a:fillRef idx="0">
+            <a:schemeClr val="accent1"/>
+          </a:fillRef>
+          <a:effectRef idx="1">
+            <a:schemeClr val="accent1"/>
+          </a:effectRef>
+          <a:fontRef idx="minor">
+            <a:schemeClr val="tx1"/>
+          </a:fontRef>
+        </p:style>
+      </p:cxnSp>
+      <p:sp>
+        <p:nvSpPr>
+          <p:cNvPr id="16" name="TextBox 15"/>
+          <p:cNvSpPr txBox="1"/>
+          <p:nvPr/>
+        </p:nvSpPr>
+        <p:spPr>
+          <a:xfrm>
+            <a:off x="8595360" y="6547104"/>
+            <a:ext cx="365760" cy="274320"/>
+          </a:xfrm>
+          <a:prstGeom prst="rect">
+            <a:avLst/>
+          </a:prstGeom>
+          <a:noFill/>
+        </p:spPr>
+        <p:txBody>
+          <a:bodyPr wrap="square" lIns="0" rIns="0" tIns="0" bIns="0">
+            <a:spAutoFit/>
+          </a:bodyPr>
+          <a:lstStyle/>
+          <a:p>
+            <a:pPr algn="l"/>
+            <a:r>
+              <a:rPr sz="1000" b="1" i="0">
+                <a:solidFill>
+                  <a:srgbClr val="6D594C"/>
+                </a:solidFill>
+                <a:latin typeface="Segoe UI"/>
+              </a:rPr>
+              <a:t>16</a:t>
+            </a:r>
+          </a:p>
+        </p:txBody>
+      </p:sp>
+    </p:spTree>
+  </p:cSld>
+  <p:clrMapOvr>
+    <a:masterClrMapping/>
+  </p:clrMapOvr>
+</p:sld>
+</file>
+
+<file path=ppt/slides/slide17.xml><?xml version="1.0" encoding="utf-8"?>
+<p:sld xmlns:a="http://schemas.openxmlformats.org/drawingml/2006/main" xmlns:p="http://schemas.openxmlformats.org/presentationml/2006/main" xmlns:r="http://schemas.openxmlformats.org/officeDocument/2006/relationships">
+  <p:cSld>
+    <p:spTree>
+      <p:nvGrpSpPr>
+        <p:cNvPr id="1" name=""/>
+        <p:cNvGrpSpPr/>
+        <p:nvPr/>
+      </p:nvGrpSpPr>
+      <p:grpSpPr/>
+      <p:sp>
+        <p:nvSpPr>
+          <p:cNvPr id="2" name="TextBox 1"/>
+          <p:cNvSpPr txBox="1"/>
+          <p:nvPr/>
+        </p:nvSpPr>
+        <p:spPr>
+          <a:xfrm>
+            <a:off x="457200" y="365760"/>
+            <a:ext cx="8412480" cy="457200"/>
+          </a:xfrm>
+          <a:prstGeom prst="rect">
+            <a:avLst/>
+          </a:prstGeom>
+          <a:noFill/>
+        </p:spPr>
+        <p:txBody>
+          <a:bodyPr wrap="square" lIns="0" rIns="0" tIns="0" bIns="0">
+            <a:spAutoFit/>
+          </a:bodyPr>
+          <a:lstStyle/>
+          <a:p>
+            <a:pPr algn="l"/>
+            <a:r>
+              <a:rPr sz="2200" b="1" i="0">
+                <a:solidFill>
+                  <a:srgbClr val="6D594C"/>
+                </a:solidFill>
+                <a:latin typeface="Segoe UI"/>
+              </a:rPr>
+              <a:t>Specification List — Findings vs IFC Rules</a:t>
+            </a:r>
+          </a:p>
+        </p:txBody>
+      </p:sp>
+      <p:sp>
+        <p:nvSpPr>
+          <p:cNvPr id="3" name="TextBox 2"/>
+          <p:cNvSpPr txBox="1"/>
+          <p:nvPr/>
+        </p:nvSpPr>
+        <p:spPr>
+          <a:xfrm>
+            <a:off x="457200" y="822960"/>
+            <a:ext cx="8412480" cy="411480"/>
+          </a:xfrm>
+          <a:prstGeom prst="rect">
+            <a:avLst/>
+          </a:prstGeom>
+          <a:noFill/>
+        </p:spPr>
+        <p:txBody>
+          <a:bodyPr wrap="square" lIns="0" rIns="0" tIns="0" bIns="0">
+            <a:spAutoFit/>
+          </a:bodyPr>
+          <a:lstStyle/>
+          <a:p>
+            <a:pPr algn="l"/>
+            <a:r>
+              <a:rPr sz="1300" b="0" i="0">
+                <a:solidFill>
+                  <a:srgbClr val="8C7464"/>
+                </a:solidFill>
+                <a:latin typeface="Segoe UI"/>
+              </a:rPr>
+              <a:t>Comprehensive discipline coverage; needs a stable, mapped, cross-referenced structure</a:t>
+            </a:r>
+          </a:p>
+        </p:txBody>
+      </p:sp>
+      <p:cxnSp>
+        <p:nvCxnSpPr>
+          <p:cNvPr id="4" name="Connector 3"/>
+          <p:cNvCxnSpPr/>
+          <p:nvPr/>
+        </p:nvCxnSpPr>
+        <p:spPr>
+          <a:xfrm>
+            <a:off x="457200" y="1298448"/>
+            <a:ext cx="8229600" cy="0"/>
+          </a:xfrm>
+          <a:prstGeom prst="bentConnector3">
+            <a:avLst/>
+          </a:prstGeom>
+          <a:ln w="9525">
+            <a:solidFill>
+              <a:srgbClr val="E5E5E5"/>
+            </a:solidFill>
+          </a:ln>
+        </p:spPr>
+        <p:style>
+          <a:lnRef idx="2">
+            <a:schemeClr val="accent1"/>
+          </a:lnRef>
+          <a:fillRef idx="0">
+            <a:schemeClr val="accent1"/>
+          </a:fillRef>
+          <a:effectRef idx="1">
+            <a:schemeClr val="accent1"/>
+          </a:effectRef>
+          <a:fontRef idx="minor">
+            <a:schemeClr val="tx1"/>
+          </a:fontRef>
+        </p:style>
+      </p:cxnSp>
+      <p:sp>
+        <p:nvSpPr>
+          <p:cNvPr id="5" name="Rectangle 4"/>
+          <p:cNvSpPr/>
+          <p:nvPr/>
+        </p:nvSpPr>
+        <p:spPr>
+          <a:xfrm>
+            <a:off x="411480" y="1481328"/>
+            <a:ext cx="4114800" cy="365760"/>
+          </a:xfrm>
+          <a:prstGeom prst="rect">
+            <a:avLst/>
+          </a:prstGeom>
+          <a:solidFill>
+            <a:srgbClr val="2E7D32"/>
+          </a:solidFill>
+          <a:ln>
+            <a:noFill/>
+          </a:ln>
+          <a:effectLst/>
+        </p:spPr>
+        <p:style>
+          <a:lnRef idx="1">
+            <a:schemeClr val="accent1"/>
+          </a:lnRef>
+          <a:fillRef idx="3">
+            <a:schemeClr val="accent1"/>
+          </a:fillRef>
+          <a:effectRef idx="2">
+            <a:schemeClr val="accent1"/>
+          </a:effectRef>
+          <a:fontRef idx="minor">
+            <a:schemeClr val="lt1"/>
+          </a:fontRef>
+        </p:style>
+        <p:txBody>
+          <a:bodyPr rtlCol="0" anchor="ctr"/>
+          <a:lstStyle/>
+          <a:p>
+            <a:pPr algn="ctr"/>
+          </a:p>
+        </p:txBody>
+      </p:sp>
+      <p:sp>
+        <p:nvSpPr>
+          <p:cNvPr id="6" name="TextBox 5"/>
+          <p:cNvSpPr txBox="1"/>
+          <p:nvPr/>
+        </p:nvSpPr>
+        <p:spPr>
+          <a:xfrm>
+            <a:off x="548640" y="1481328"/>
+            <a:ext cx="3840480" cy="365760"/>
+          </a:xfrm>
+          <a:prstGeom prst="rect">
+            <a:avLst/>
+          </a:prstGeom>
+          <a:noFill/>
+        </p:spPr>
+        <p:txBody>
+          <a:bodyPr wrap="square" lIns="0" rIns="0" tIns="0" bIns="0" anchor="ctr">
+            <a:spAutoFit/>
+          </a:bodyPr>
+          <a:lstStyle/>
+          <a:p>
+            <a:pPr algn="l"/>
+            <a:r>
+              <a:rPr sz="1250" b="1" i="0">
+                <a:solidFill>
+                  <a:srgbClr val="FFFFFF"/>
+                </a:solidFill>
+                <a:latin typeface="Segoe UI"/>
+              </a:rPr>
+              <a:t>Strengths</a:t>
+            </a:r>
+          </a:p>
+        </p:txBody>
+      </p:sp>
+      <p:sp>
+        <p:nvSpPr>
+          <p:cNvPr id="7" name="Rectangle 6"/>
+          <p:cNvSpPr/>
+          <p:nvPr/>
+        </p:nvSpPr>
+        <p:spPr>
+          <a:xfrm>
+            <a:off x="411480" y="1847088"/>
+            <a:ext cx="4114800" cy="4160520"/>
+          </a:xfrm>
+          <a:prstGeom prst="rect">
+            <a:avLst/>
+          </a:prstGeom>
+          <a:solidFill>
+            <a:srgbClr val="F4EFE9"/>
+          </a:solidFill>
+          <a:ln>
+            <a:noFill/>
+          </a:ln>
+          <a:effectLst/>
+        </p:spPr>
+        <p:style>
+          <a:lnRef idx="1">
+            <a:schemeClr val="accent1"/>
+          </a:lnRef>
+          <a:fillRef idx="3">
+            <a:schemeClr val="accent1"/>
+          </a:fillRef>
+          <a:effectRef idx="2">
+            <a:schemeClr val="accent1"/>
+          </a:effectRef>
+          <a:fontRef idx="minor">
+            <a:schemeClr val="lt1"/>
+          </a:fontRef>
+        </p:style>
+        <p:txBody>
+          <a:bodyPr rtlCol="0" anchor="ctr"/>
+          <a:lstStyle/>
+          <a:p>
+            <a:pPr algn="ctr"/>
+          </a:p>
+        </p:txBody>
+      </p:sp>
+      <p:sp>
+        <p:nvSpPr>
+          <p:cNvPr id="8" name="TextBox 7"/>
+          <p:cNvSpPr txBox="1"/>
+          <p:nvPr/>
+        </p:nvSpPr>
+        <p:spPr>
+          <a:xfrm>
+            <a:off x="576072" y="1984248"/>
+            <a:ext cx="3785615" cy="3931920"/>
+          </a:xfrm>
+          <a:prstGeom prst="rect">
+            <a:avLst/>
+          </a:prstGeom>
+          <a:noFill/>
+        </p:spPr>
+        <p:txBody>
+          <a:bodyPr wrap="square" lIns="0" rIns="0" tIns="0" bIns="0">
+            <a:spAutoFit/>
+          </a:bodyPr>
+          <a:lstStyle/>
+          <a:p>
+            <a:pPr algn="l">
+              <a:spcAft>
+                <a:spcPts val="700"/>
+              </a:spcAft>
+            </a:pPr>
+            <a:r>
+              <a:rPr sz="1000" b="1" i="0">
+                <a:solidFill>
+                  <a:srgbClr val="2E7D32"/>
+                </a:solidFill>
+                <a:latin typeface="Segoe UI"/>
+              </a:rPr>
+              <a:t>•  </a:t>
+            </a:r>
+            <a:r>
+              <a:rPr sz="950" b="0" i="0">
+                <a:solidFill>
+                  <a:srgbClr val="5A493F"/>
+                </a:solidFill>
+                <a:latin typeface="Segoe UI"/>
+              </a:rPr>
+              <a:t>119 chapters; strong airfield systems — Electrical E01–E38 (AGL, CCR, INS sign, CCTV, access control)</a:t>
+            </a:r>
+          </a:p>
+          <a:p>
+            <a:pPr algn="l">
+              <a:spcAft>
+                <a:spcPts val="700"/>
+              </a:spcAft>
+            </a:pPr>
+            <a:r>
+              <a:rPr sz="1000" b="1" i="0">
+                <a:solidFill>
+                  <a:srgbClr val="2E7D32"/>
+                </a:solidFill>
+                <a:latin typeface="Segoe UI"/>
+              </a:rPr>
+              <a:t>•  </a:t>
+            </a:r>
+            <a:r>
+              <a:rPr sz="950" b="0" i="0">
+                <a:solidFill>
+                  <a:srgbClr val="5A493F"/>
+                </a:solidFill>
+                <a:latin typeface="Segoe UI"/>
+              </a:rPr>
+              <a:t>Mechanical M01–M28 — fire hydrant, suppression, detection &amp; alarm, plumbing</a:t>
+            </a:r>
+          </a:p>
+          <a:p>
+            <a:pPr algn="l">
+              <a:spcAft>
+                <a:spcPts val="700"/>
+              </a:spcAft>
+            </a:pPr>
+            <a:r>
+              <a:rPr sz="1000" b="1" i="0">
+                <a:solidFill>
+                  <a:srgbClr val="2E7D32"/>
+                </a:solidFill>
+                <a:latin typeface="Segoe UI"/>
+              </a:rPr>
+              <a:t>•  </a:t>
+            </a:r>
+            <a:r>
+              <a:rPr sz="950" b="0" i="0">
+                <a:solidFill>
+                  <a:srgbClr val="5A493F"/>
+                </a:solidFill>
+                <a:latin typeface="Segoe UI"/>
+              </a:rPr>
+              <a:t>Civil &amp; Structural — earthworks, subgrade, sub-base, flexible &amp; rigid pavement, marking, drainage, fencing + gate</a:t>
+            </a:r>
+          </a:p>
+          <a:p>
+            <a:pPr algn="l">
+              <a:spcAft>
+                <a:spcPts val="700"/>
+              </a:spcAft>
+            </a:pPr>
+            <a:r>
+              <a:rPr sz="1000" b="1" i="0">
+                <a:solidFill>
+                  <a:srgbClr val="2E7D32"/>
+                </a:solidFill>
+                <a:latin typeface="Segoe UI"/>
+              </a:rPr>
+              <a:t>•  </a:t>
+            </a:r>
+            <a:r>
+              <a:rPr sz="950" b="0" i="0">
+                <a:solidFill>
+                  <a:srgbClr val="5A493F"/>
+                </a:solidFill>
+                <a:latin typeface="Segoe UI"/>
+              </a:rPr>
+              <a:t>Specialised System — CNS &amp; Meteorological Equipment, ALCMS, D&amp;B fire training &amp; security checkpoint</a:t>
+            </a:r>
+          </a:p>
+          <a:p>
+            <a:pPr algn="l">
+              <a:spcAft>
+                <a:spcPts val="700"/>
+              </a:spcAft>
+            </a:pPr>
+            <a:r>
+              <a:rPr sz="1000" b="1" i="0">
+                <a:solidFill>
+                  <a:srgbClr val="2E7D32"/>
+                </a:solidFill>
+                <a:latin typeface="Segoe UI"/>
+              </a:rPr>
+              <a:t>•  </a:t>
+            </a:r>
+            <a:r>
+              <a:rPr sz="950" b="0" i="0">
+                <a:solidFill>
+                  <a:srgbClr val="5A493F"/>
+                </a:solidFill>
+                <a:latin typeface="Segoe UI"/>
+              </a:rPr>
+              <a:t>Discipline coverage broadly complete for airfield + integrated building</a:t>
+            </a:r>
+          </a:p>
+        </p:txBody>
+      </p:sp>
+      <p:sp>
+        <p:nvSpPr>
+          <p:cNvPr id="9" name="Rectangle 8"/>
+          <p:cNvSpPr/>
+          <p:nvPr/>
+        </p:nvSpPr>
+        <p:spPr>
+          <a:xfrm>
+            <a:off x="4617720" y="1481328"/>
+            <a:ext cx="4114800" cy="365760"/>
+          </a:xfrm>
+          <a:prstGeom prst="rect">
+            <a:avLst/>
+          </a:prstGeom>
+          <a:solidFill>
+            <a:srgbClr val="A33D2E"/>
+          </a:solidFill>
+          <a:ln>
+            <a:noFill/>
+          </a:ln>
+          <a:effectLst/>
+        </p:spPr>
+        <p:style>
+          <a:lnRef idx="1">
+            <a:schemeClr val="accent1"/>
+          </a:lnRef>
+          <a:fillRef idx="3">
+            <a:schemeClr val="accent1"/>
+          </a:fillRef>
+          <a:effectRef idx="2">
+            <a:schemeClr val="accent1"/>
+          </a:effectRef>
+          <a:fontRef idx="minor">
+            <a:schemeClr val="lt1"/>
+          </a:fontRef>
+        </p:style>
+        <p:txBody>
+          <a:bodyPr rtlCol="0" anchor="ctr"/>
+          <a:lstStyle/>
+          <a:p>
+            <a:pPr algn="ctr"/>
+          </a:p>
+        </p:txBody>
+      </p:sp>
+      <p:sp>
+        <p:nvSpPr>
+          <p:cNvPr id="10" name="TextBox 9"/>
+          <p:cNvSpPr txBox="1"/>
+          <p:nvPr/>
+        </p:nvSpPr>
+        <p:spPr>
+          <a:xfrm>
+            <a:off x="4754880" y="1481328"/>
+            <a:ext cx="3840480" cy="365760"/>
+          </a:xfrm>
+          <a:prstGeom prst="rect">
+            <a:avLst/>
+          </a:prstGeom>
+          <a:noFill/>
+        </p:spPr>
+        <p:txBody>
+          <a:bodyPr wrap="square" lIns="0" rIns="0" tIns="0" bIns="0" anchor="ctr">
+            <a:spAutoFit/>
+          </a:bodyPr>
+          <a:lstStyle/>
+          <a:p>
+            <a:pPr algn="l"/>
+            <a:r>
+              <a:rPr sz="1250" b="1" i="0">
+                <a:solidFill>
+                  <a:srgbClr val="FFFFFF"/>
+                </a:solidFill>
+                <a:latin typeface="Segoe UI"/>
+              </a:rPr>
+              <a:t>Gaps vs IFC rules</a:t>
+            </a:r>
+          </a:p>
+        </p:txBody>
+      </p:sp>
+      <p:sp>
+        <p:nvSpPr>
+          <p:cNvPr id="11" name="Rectangle 10"/>
+          <p:cNvSpPr/>
+          <p:nvPr/>
+        </p:nvSpPr>
+        <p:spPr>
+          <a:xfrm>
+            <a:off x="4617720" y="1847088"/>
+            <a:ext cx="4114800" cy="4160520"/>
+          </a:xfrm>
+          <a:prstGeom prst="rect">
+            <a:avLst/>
+          </a:prstGeom>
+          <a:solidFill>
+            <a:srgbClr val="F4EFE9"/>
+          </a:solidFill>
+          <a:ln>
+            <a:noFill/>
+          </a:ln>
+          <a:effectLst/>
+        </p:spPr>
+        <p:style>
+          <a:lnRef idx="1">
+            <a:schemeClr val="accent1"/>
+          </a:lnRef>
+          <a:fillRef idx="3">
+            <a:schemeClr val="accent1"/>
+          </a:fillRef>
+          <a:effectRef idx="2">
+            <a:schemeClr val="accent1"/>
+          </a:effectRef>
+          <a:fontRef idx="minor">
+            <a:schemeClr val="lt1"/>
+          </a:fontRef>
+        </p:style>
+        <p:txBody>
+          <a:bodyPr rtlCol="0" anchor="ctr"/>
+          <a:lstStyle/>
+          <a:p>
+            <a:pPr algn="ctr"/>
+          </a:p>
+        </p:txBody>
+      </p:sp>
+      <p:sp>
+        <p:nvSpPr>
+          <p:cNvPr id="12" name="TextBox 11"/>
+          <p:cNvSpPr txBox="1"/>
+          <p:nvPr/>
+        </p:nvSpPr>
+        <p:spPr>
+          <a:xfrm>
+            <a:off x="4782312" y="1984248"/>
+            <a:ext cx="3785615" cy="3931920"/>
+          </a:xfrm>
+          <a:prstGeom prst="rect">
+            <a:avLst/>
+          </a:prstGeom>
+          <a:noFill/>
+        </p:spPr>
+        <p:txBody>
+          <a:bodyPr wrap="square" lIns="0" rIns="0" tIns="0" bIns="0">
+            <a:spAutoFit/>
+          </a:bodyPr>
+          <a:lstStyle/>
+          <a:p>
+            <a:pPr algn="l">
+              <a:spcAft>
+                <a:spcPts val="700"/>
+              </a:spcAft>
+            </a:pPr>
+            <a:r>
+              <a:rPr sz="1000" b="1" i="0">
+                <a:solidFill>
+                  <a:srgbClr val="A33D2E"/>
+                </a:solidFill>
+                <a:latin typeface="Segoe UI"/>
+              </a:rPr>
+              <a:t>•  </a:t>
+            </a:r>
+            <a:r>
+              <a:rPr sz="950" b="0" i="0">
+                <a:solidFill>
+                  <a:srgbClr val="5A493F"/>
+                </a:solidFill>
+                <a:latin typeface="Segoe UI"/>
+              </a:rPr>
+              <a:t>Numbers not unique — "Chapter 01: General" repeats; mixed Chapter 01 / 1 / E01 / M01</a:t>
+            </a:r>
+            <a:r>
+              <a:rPr sz="850" b="0" i="1">
+                <a:solidFill>
+                  <a:srgbClr val="8C7464"/>
+                </a:solidFill>
+                <a:latin typeface="Segoe UI"/>
+              </a:rPr>
+              <a:t>  → Spec coding / Slide 11</a:t>
+            </a:r>
+          </a:p>
+          <a:p>
+            <a:pPr algn="l">
+              <a:spcAft>
+                <a:spcPts val="700"/>
+              </a:spcAft>
+            </a:pPr>
+            <a:r>
+              <a:rPr sz="1000" b="1" i="0">
+                <a:solidFill>
+                  <a:srgbClr val="A33D2E"/>
+                </a:solidFill>
+                <a:latin typeface="Segoe UI"/>
+              </a:rPr>
+              <a:t>•  </a:t>
+            </a:r>
+            <a:r>
+              <a:rPr sz="950" b="0" i="0">
+                <a:solidFill>
+                  <a:srgbClr val="5A493F"/>
+                </a:solidFill>
+                <a:latin typeface="Segoe UI"/>
+              </a:rPr>
+              <a:t>Not mapped to CSI or 40-AF..48-OR airport divisions</a:t>
+            </a:r>
+            <a:r>
+              <a:rPr sz="850" b="0" i="1">
+                <a:solidFill>
+                  <a:srgbClr val="8C7464"/>
+                </a:solidFill>
+                <a:latin typeface="Segoe UI"/>
+              </a:rPr>
+              <a:t>  → Spec coding / Slide 11</a:t>
+            </a:r>
+          </a:p>
+          <a:p>
+            <a:pPr algn="l">
+              <a:spcAft>
+                <a:spcPts val="700"/>
+              </a:spcAft>
+            </a:pPr>
+            <a:r>
+              <a:rPr sz="1000" b="1" i="0">
+                <a:solidFill>
+                  <a:srgbClr val="A33D2E"/>
+                </a:solidFill>
+                <a:latin typeface="Segoe UI"/>
+              </a:rPr>
+              <a:t>•  </a:t>
+            </a:r>
+            <a:r>
+              <a:rPr sz="950" b="0" i="0">
+                <a:solidFill>
+                  <a:srgbClr val="5A493F"/>
+                </a:solidFill>
+                <a:latin typeface="Segoe UI"/>
+              </a:rPr>
+              <a:t>Fragmented "General" per discipline; no single Division 00/01 (procurement, doc control, BIM/CDE, QA/QC, HSE)</a:t>
+            </a:r>
+            <a:r>
+              <a:rPr sz="850" b="0" i="1">
+                <a:solidFill>
+                  <a:srgbClr val="8C7464"/>
+                </a:solidFill>
+                <a:latin typeface="Segoe UI"/>
+              </a:rPr>
+              <a:t>  → IFC-00 / Volume 6</a:t>
+            </a:r>
+          </a:p>
+          <a:p>
+            <a:pPr algn="l">
+              <a:spcAft>
+                <a:spcPts val="700"/>
+              </a:spcAft>
+            </a:pPr>
+            <a:r>
+              <a:rPr sz="1000" b="1" i="0">
+                <a:solidFill>
+                  <a:srgbClr val="A33D2E"/>
+                </a:solidFill>
+                <a:latin typeface="Segoe UI"/>
+              </a:rPr>
+              <a:t>•  </a:t>
+            </a:r>
+            <a:r>
+              <a:rPr sz="950" b="0" i="0">
+                <a:solidFill>
+                  <a:srgbClr val="5A493F"/>
+                </a:solidFill>
+                <a:latin typeface="Segoe UI"/>
+              </a:rPr>
+              <a:t>No overarching ORAT / aerodrome-certification / T&amp;C division</a:t>
+            </a:r>
+            <a:r>
+              <a:rPr sz="850" b="0" i="1">
+                <a:solidFill>
+                  <a:srgbClr val="8C7464"/>
+                </a:solidFill>
+                <a:latin typeface="Segoe UI"/>
+              </a:rPr>
+              <a:t>  → 48-OR / Slide 9</a:t>
+            </a:r>
+          </a:p>
+          <a:p>
+            <a:pPr algn="l">
+              <a:spcAft>
+                <a:spcPts val="700"/>
+              </a:spcAft>
+            </a:pPr>
+            <a:r>
+              <a:rPr sz="1000" b="1" i="0">
+                <a:solidFill>
+                  <a:srgbClr val="A33D2E"/>
+                </a:solidFill>
+                <a:latin typeface="Segoe UI"/>
+              </a:rPr>
+              <a:t>•  </a:t>
+            </a:r>
+            <a:r>
+              <a:rPr sz="950" b="0" i="0">
+                <a:solidFill>
+                  <a:srgbClr val="5A493F"/>
+                </a:solidFill>
+                <a:latin typeface="Segoe UI"/>
+              </a:rPr>
+              <a:t>No spec ↔ drawing ↔ BoQ cross-reference; ties to ~16 BoQ gaps</a:t>
+            </a:r>
+            <a:r>
+              <a:rPr sz="850" b="0" i="1">
+                <a:solidFill>
+                  <a:srgbClr val="8C7464"/>
+                </a:solidFill>
+                <a:latin typeface="Segoe UI"/>
+              </a:rPr>
+              <a:t>  → Register + Why now / Slide 4·8</a:t>
+            </a:r>
+          </a:p>
+        </p:txBody>
+      </p:sp>
+      <p:cxnSp>
+        <p:nvCxnSpPr>
+          <p:cNvPr id="13" name="Connector 12"/>
+          <p:cNvCxnSpPr/>
+          <p:nvPr/>
+        </p:nvCxnSpPr>
+        <p:spPr>
+          <a:xfrm>
+            <a:off x="365760" y="6537960"/>
+            <a:ext cx="6492240" cy="0"/>
+          </a:xfrm>
+          <a:prstGeom prst="bentConnector3">
+            <a:avLst/>
+          </a:prstGeom>
+          <a:ln w="9525">
+            <a:solidFill>
+              <a:srgbClr val="E5E5E5"/>
+            </a:solidFill>
+          </a:ln>
+        </p:spPr>
+        <p:style>
+          <a:lnRef idx="2">
+            <a:schemeClr val="accent1"/>
+          </a:lnRef>
+          <a:fillRef idx="0">
+            <a:schemeClr val="accent1"/>
+          </a:fillRef>
+          <a:effectRef idx="1">
+            <a:schemeClr val="accent1"/>
+          </a:effectRef>
+          <a:fontRef idx="minor">
+            <a:schemeClr val="tx1"/>
+          </a:fontRef>
+        </p:style>
+      </p:cxnSp>
+      <p:sp>
+        <p:nvSpPr>
+          <p:cNvPr id="14" name="TextBox 13"/>
+          <p:cNvSpPr txBox="1"/>
+          <p:nvPr/>
+        </p:nvSpPr>
+        <p:spPr>
+          <a:xfrm>
+            <a:off x="3657600" y="6565392"/>
+            <a:ext cx="2286000" cy="228600"/>
+          </a:xfrm>
+          <a:prstGeom prst="rect">
+            <a:avLst/>
+          </a:prstGeom>
+          <a:noFill/>
+        </p:spPr>
+        <p:txBody>
+          <a:bodyPr wrap="square" lIns="0" rIns="0" tIns="0" bIns="0">
+            <a:spAutoFit/>
+          </a:bodyPr>
+          <a:lstStyle/>
+          <a:p>
+            <a:pPr algn="ctr"/>
+            <a:r>
+              <a:rPr sz="800" b="0" i="0">
+                <a:solidFill>
+                  <a:srgbClr val="8C7464"/>
+                </a:solidFill>
+                <a:latin typeface="Segoe UI"/>
+              </a:rPr>
+              <a:t>STRICTLY CONFIDENTIAL</a:t>
+            </a:r>
+          </a:p>
+        </p:txBody>
+      </p:sp>
+      <p:cxnSp>
+        <p:nvCxnSpPr>
+          <p:cNvPr id="15" name="Connector 14"/>
+          <p:cNvCxnSpPr/>
+          <p:nvPr/>
+        </p:nvCxnSpPr>
+        <p:spPr>
+          <a:xfrm>
+            <a:off x="8503920" y="6565392"/>
+            <a:ext cx="0" cy="201167"/>
+          </a:xfrm>
+          <a:prstGeom prst="bentConnector3">
+            <a:avLst/>
+          </a:prstGeom>
+          <a:ln w="25400">
+            <a:solidFill>
+              <a:srgbClr val="6D594C"/>
+            </a:solidFill>
+          </a:ln>
+        </p:spPr>
+        <p:style>
+          <a:lnRef idx="2">
+            <a:schemeClr val="accent1"/>
+          </a:lnRef>
+          <a:fillRef idx="0">
+            <a:schemeClr val="accent1"/>
+          </a:fillRef>
+          <a:effectRef idx="1">
+            <a:schemeClr val="accent1"/>
+          </a:effectRef>
+          <a:fontRef idx="minor">
+            <a:schemeClr val="tx1"/>
+          </a:fontRef>
+        </p:style>
+      </p:cxnSp>
+      <p:sp>
+        <p:nvSpPr>
+          <p:cNvPr id="16" name="TextBox 15"/>
+          <p:cNvSpPr txBox="1"/>
+          <p:nvPr/>
+        </p:nvSpPr>
+        <p:spPr>
+          <a:xfrm>
+            <a:off x="8595360" y="6547104"/>
+            <a:ext cx="365760" cy="274320"/>
+          </a:xfrm>
+          <a:prstGeom prst="rect">
+            <a:avLst/>
+          </a:prstGeom>
+          <a:noFill/>
+        </p:spPr>
+        <p:txBody>
+          <a:bodyPr wrap="square" lIns="0" rIns="0" tIns="0" bIns="0">
+            <a:spAutoFit/>
+          </a:bodyPr>
+          <a:lstStyle/>
+          <a:p>
+            <a:pPr algn="l"/>
+            <a:r>
+              <a:rPr sz="1000" b="1" i="0">
+                <a:solidFill>
+                  <a:srgbClr val="6D594C"/>
+                </a:solidFill>
+                <a:latin typeface="Segoe UI"/>
+              </a:rPr>
+              <a:t>17</a:t>
+            </a:r>
+          </a:p>
+        </p:txBody>
+      </p:sp>
+    </p:spTree>
+  </p:cSld>
+  <p:clrMapOvr>
+    <a:masterClrMapping/>
+  </p:clrMapOvr>
+</p:sld>
+</file>
+
+<file path=ppt/slides/slide18.xml><?xml version="1.0" encoding="utf-8"?>
+<p:sld xmlns:a="http://schemas.openxmlformats.org/drawingml/2006/main" xmlns:p="http://schemas.openxmlformats.org/presentationml/2006/main" xmlns:r="http://schemas.openxmlformats.org/officeDocument/2006/relationships">
+  <p:cSld>
+    <p:spTree>
+      <p:nvGrpSpPr>
+        <p:cNvPr id="1" name=""/>
+        <p:cNvGrpSpPr/>
+        <p:nvPr/>
+      </p:nvGrpSpPr>
+      <p:grpSpPr/>
+      <p:sp>
+        <p:nvSpPr>
+          <p:cNvPr id="2" name="TextBox 1"/>
+          <p:cNvSpPr txBox="1"/>
+          <p:nvPr/>
+        </p:nvSpPr>
+        <p:spPr>
+          <a:xfrm>
+            <a:off x="457200" y="365760"/>
+            <a:ext cx="8412480" cy="457200"/>
+          </a:xfrm>
+          <a:prstGeom prst="rect">
+            <a:avLst/>
+          </a:prstGeom>
+          <a:noFill/>
+        </p:spPr>
+        <p:txBody>
+          <a:bodyPr wrap="square" lIns="0" rIns="0" tIns="0" bIns="0">
+            <a:spAutoFit/>
+          </a:bodyPr>
+          <a:lstStyle/>
+          <a:p>
+            <a:pPr algn="l"/>
+            <a:r>
+              <a:rPr sz="2200" b="1" i="0">
+                <a:solidFill>
+                  <a:srgbClr val="6D594C"/>
+                </a:solidFill>
+                <a:latin typeface="Segoe UI"/>
+              </a:rPr>
+              <a:t>Coverage vs Airfield Work-Area Matrix</a:t>
+            </a:r>
+          </a:p>
+        </p:txBody>
+      </p:sp>
+      <p:sp>
+        <p:nvSpPr>
+          <p:cNvPr id="3" name="TextBox 2"/>
+          <p:cNvSpPr txBox="1"/>
+          <p:nvPr/>
+        </p:nvSpPr>
+        <p:spPr>
+          <a:xfrm>
+            <a:off x="457200" y="822960"/>
+            <a:ext cx="8412480" cy="411480"/>
+          </a:xfrm>
+          <a:prstGeom prst="rect">
+            <a:avLst/>
+          </a:prstGeom>
+          <a:noFill/>
+        </p:spPr>
+        <p:txBody>
+          <a:bodyPr wrap="square" lIns="0" rIns="0" tIns="0" bIns="0">
+            <a:spAutoFit/>
+          </a:bodyPr>
+          <a:lstStyle/>
+          <a:p>
+            <a:pPr algn="l"/>
+            <a:r>
+              <a:rPr sz="1300" b="0" i="0">
+                <a:solidFill>
+                  <a:srgbClr val="8C7464"/>
+                </a:solidFill>
+                <a:latin typeface="Segoe UI"/>
+              </a:rPr>
+              <a:t>Design coverage is strong; the items to watch are NAVAIDS, MET and the NSC equipment split</a:t>
+            </a:r>
+          </a:p>
+        </p:txBody>
+      </p:sp>
+      <p:cxnSp>
+        <p:nvCxnSpPr>
+          <p:cNvPr id="4" name="Connector 3"/>
+          <p:cNvCxnSpPr/>
+          <p:nvPr/>
+        </p:nvCxnSpPr>
+        <p:spPr>
+          <a:xfrm>
+            <a:off x="457200" y="1298448"/>
+            <a:ext cx="8229600" cy="0"/>
+          </a:xfrm>
+          <a:prstGeom prst="bentConnector3">
+            <a:avLst/>
+          </a:prstGeom>
+          <a:ln w="9525">
+            <a:solidFill>
+              <a:srgbClr val="E5E5E5"/>
+            </a:solidFill>
+          </a:ln>
+        </p:spPr>
+        <p:style>
+          <a:lnRef idx="2">
+            <a:schemeClr val="accent1"/>
+          </a:lnRef>
+          <a:fillRef idx="0">
+            <a:schemeClr val="accent1"/>
+          </a:fillRef>
+          <a:effectRef idx="1">
+            <a:schemeClr val="accent1"/>
+          </a:effectRef>
+          <a:fontRef idx="minor">
+            <a:schemeClr val="tx1"/>
+          </a:fontRef>
+        </p:style>
+      </p:cxnSp>
+      <p:sp>
+        <p:nvSpPr>
+          <p:cNvPr id="5" name="Rectangle 4"/>
+          <p:cNvSpPr/>
+          <p:nvPr/>
+        </p:nvSpPr>
+        <p:spPr>
+          <a:xfrm>
+            <a:off x="365760" y="1481328"/>
+            <a:ext cx="2606040" cy="274320"/>
+          </a:xfrm>
+          <a:prstGeom prst="rect">
+            <a:avLst/>
+          </a:prstGeom>
+          <a:solidFill>
+            <a:srgbClr val="6D594C"/>
+          </a:solidFill>
+          <a:ln>
+            <a:noFill/>
+          </a:ln>
+          <a:effectLst/>
+        </p:spPr>
+        <p:style>
+          <a:lnRef idx="1">
+            <a:schemeClr val="accent1"/>
+          </a:lnRef>
+          <a:fillRef idx="3">
+            <a:schemeClr val="accent1"/>
+          </a:fillRef>
+          <a:effectRef idx="2">
+            <a:schemeClr val="accent1"/>
+          </a:effectRef>
+          <a:fontRef idx="minor">
+            <a:schemeClr val="lt1"/>
+          </a:fontRef>
+        </p:style>
+        <p:txBody>
+          <a:bodyPr rtlCol="0" anchor="ctr" wrap="square" lIns="50800" tIns="0" bIns="0"/>
+          <a:lstStyle/>
+          <a:p>
+            <a:pPr algn="l"/>
+            <a:r>
+              <a:rPr sz="850" b="1" i="0">
+                <a:solidFill>
+                  <a:srgbClr val="FFFFFF"/>
+                </a:solidFill>
+                <a:latin typeface="Segoe UI"/>
+              </a:rPr>
+              <a:t>Work Area / Zone</a:t>
+            </a:r>
+          </a:p>
+        </p:txBody>
+      </p:sp>
+      <p:sp>
+        <p:nvSpPr>
+          <p:cNvPr id="6" name="Rectangle 5"/>
+          <p:cNvSpPr/>
+          <p:nvPr/>
+        </p:nvSpPr>
+        <p:spPr>
+          <a:xfrm>
+            <a:off x="2971800" y="1481328"/>
+            <a:ext cx="640080" cy="274320"/>
+          </a:xfrm>
+          <a:prstGeom prst="rect">
+            <a:avLst/>
+          </a:prstGeom>
+          <a:solidFill>
+            <a:srgbClr val="6D594C"/>
+          </a:solidFill>
+          <a:ln>
+            <a:noFill/>
+          </a:ln>
+          <a:effectLst/>
+        </p:spPr>
+        <p:style>
+          <a:lnRef idx="1">
+            <a:schemeClr val="accent1"/>
+          </a:lnRef>
+          <a:fillRef idx="3">
+            <a:schemeClr val="accent1"/>
+          </a:fillRef>
+          <a:effectRef idx="2">
+            <a:schemeClr val="accent1"/>
+          </a:effectRef>
+          <a:fontRef idx="minor">
+            <a:schemeClr val="lt1"/>
+          </a:fontRef>
+        </p:style>
+        <p:txBody>
+          <a:bodyPr rtlCol="0" anchor="ctr" wrap="square" lIns="50800" tIns="0" bIns="0"/>
+          <a:lstStyle/>
+          <a:p>
+            <a:pPr algn="ctr"/>
+            <a:r>
+              <a:rPr sz="850" b="1" i="0">
+                <a:solidFill>
+                  <a:srgbClr val="FFFFFF"/>
+                </a:solidFill>
+                <a:latin typeface="Segoe UI"/>
+              </a:rPr>
+              <a:t>Dwg</a:t>
+            </a:r>
+          </a:p>
+        </p:txBody>
+      </p:sp>
+      <p:sp>
+        <p:nvSpPr>
+          <p:cNvPr id="7" name="Rectangle 6"/>
+          <p:cNvSpPr/>
+          <p:nvPr/>
+        </p:nvSpPr>
+        <p:spPr>
+          <a:xfrm>
+            <a:off x="3611880" y="1481328"/>
+            <a:ext cx="640080" cy="274320"/>
+          </a:xfrm>
+          <a:prstGeom prst="rect">
+            <a:avLst/>
+          </a:prstGeom>
+          <a:solidFill>
+            <a:srgbClr val="6D594C"/>
+          </a:solidFill>
+          <a:ln>
+            <a:noFill/>
+          </a:ln>
+          <a:effectLst/>
+        </p:spPr>
+        <p:style>
+          <a:lnRef idx="1">
+            <a:schemeClr val="accent1"/>
+          </a:lnRef>
+          <a:fillRef idx="3">
+            <a:schemeClr val="accent1"/>
+          </a:fillRef>
+          <a:effectRef idx="2">
+            <a:schemeClr val="accent1"/>
+          </a:effectRef>
+          <a:fontRef idx="minor">
+            <a:schemeClr val="lt1"/>
+          </a:fontRef>
+        </p:style>
+        <p:txBody>
+          <a:bodyPr rtlCol="0" anchor="ctr" wrap="square" lIns="50800" tIns="0" bIns="0"/>
+          <a:lstStyle/>
+          <a:p>
+            <a:pPr algn="ctr"/>
+            <a:r>
+              <a:rPr sz="850" b="1" i="0">
+                <a:solidFill>
+                  <a:srgbClr val="FFFFFF"/>
+                </a:solidFill>
+                <a:latin typeface="Segoe UI"/>
+              </a:rPr>
+              <a:t>Spec</a:t>
+            </a:r>
+          </a:p>
+        </p:txBody>
+      </p:sp>
+      <p:sp>
+        <p:nvSpPr>
+          <p:cNvPr id="8" name="Rectangle 7"/>
+          <p:cNvSpPr/>
+          <p:nvPr/>
+        </p:nvSpPr>
+        <p:spPr>
+          <a:xfrm>
+            <a:off x="4251960" y="1481328"/>
+            <a:ext cx="960120" cy="274320"/>
+          </a:xfrm>
+          <a:prstGeom prst="rect">
+            <a:avLst/>
+          </a:prstGeom>
+          <a:solidFill>
+            <a:srgbClr val="6D594C"/>
+          </a:solidFill>
+          <a:ln>
+            <a:noFill/>
+          </a:ln>
+          <a:effectLst/>
+        </p:spPr>
+        <p:style>
+          <a:lnRef idx="1">
+            <a:schemeClr val="accent1"/>
+          </a:lnRef>
+          <a:fillRef idx="3">
+            <a:schemeClr val="accent1"/>
+          </a:fillRef>
+          <a:effectRef idx="2">
+            <a:schemeClr val="accent1"/>
+          </a:effectRef>
+          <a:fontRef idx="minor">
+            <a:schemeClr val="lt1"/>
+          </a:fontRef>
+        </p:style>
+        <p:txBody>
+          <a:bodyPr rtlCol="0" anchor="ctr" wrap="square" lIns="50800" tIns="0" bIns="0"/>
+          <a:lstStyle/>
+          <a:p>
+            <a:pPr algn="ctr"/>
+            <a:r>
+              <a:rPr sz="850" b="1" i="0">
+                <a:solidFill>
+                  <a:srgbClr val="FFFFFF"/>
+                </a:solidFill>
+                <a:latin typeface="Segoe UI"/>
+              </a:rPr>
+              <a:t>Status</a:t>
+            </a:r>
+          </a:p>
+        </p:txBody>
+      </p:sp>
+      <p:sp>
+        <p:nvSpPr>
+          <p:cNvPr id="9" name="Rectangle 8"/>
+          <p:cNvSpPr/>
+          <p:nvPr/>
+        </p:nvSpPr>
+        <p:spPr>
+          <a:xfrm>
+            <a:off x="5212080" y="1481328"/>
+            <a:ext cx="3566160" cy="274320"/>
+          </a:xfrm>
+          <a:prstGeom prst="rect">
+            <a:avLst/>
+          </a:prstGeom>
+          <a:solidFill>
+            <a:srgbClr val="6D594C"/>
+          </a:solidFill>
+          <a:ln>
+            <a:noFill/>
+          </a:ln>
+          <a:effectLst/>
+        </p:spPr>
+        <p:style>
+          <a:lnRef idx="1">
+            <a:schemeClr val="accent1"/>
+          </a:lnRef>
+          <a:fillRef idx="3">
+            <a:schemeClr val="accent1"/>
+          </a:fillRef>
+          <a:effectRef idx="2">
+            <a:schemeClr val="accent1"/>
+          </a:effectRef>
+          <a:fontRef idx="minor">
+            <a:schemeClr val="lt1"/>
+          </a:fontRef>
+        </p:style>
+        <p:txBody>
+          <a:bodyPr rtlCol="0" anchor="ctr" wrap="square" lIns="50800" tIns="0" bIns="0"/>
+          <a:lstStyle/>
+          <a:p>
+            <a:pPr algn="l"/>
+            <a:r>
+              <a:rPr sz="850" b="1" i="0">
+                <a:solidFill>
+                  <a:srgbClr val="FFFFFF"/>
+                </a:solidFill>
+                <a:latin typeface="Segoe UI"/>
+              </a:rPr>
+              <a:t>Note</a:t>
+            </a:r>
+          </a:p>
+        </p:txBody>
+      </p:sp>
+      <p:sp>
+        <p:nvSpPr>
+          <p:cNvPr id="10" name="Rectangle 9"/>
+          <p:cNvSpPr/>
+          <p:nvPr/>
+        </p:nvSpPr>
+        <p:spPr>
+          <a:xfrm>
+            <a:off x="365760" y="1755648"/>
+            <a:ext cx="2606040" cy="411480"/>
+          </a:xfrm>
+          <a:prstGeom prst="rect">
+            <a:avLst/>
+          </a:prstGeom>
+          <a:solidFill>
+            <a:srgbClr val="F4EFE9"/>
+          </a:solidFill>
+          <a:ln>
+            <a:noFill/>
+          </a:ln>
+          <a:effectLst/>
+        </p:spPr>
+        <p:style>
+          <a:lnRef idx="1">
+            <a:schemeClr val="accent1"/>
+          </a:lnRef>
+          <a:fillRef idx="3">
+            <a:schemeClr val="accent1"/>
+          </a:fillRef>
+          <a:effectRef idx="2">
+            <a:schemeClr val="accent1"/>
+          </a:effectRef>
+          <a:fontRef idx="minor">
+            <a:schemeClr val="lt1"/>
+          </a:fontRef>
+        </p:style>
+        <p:txBody>
+          <a:bodyPr rtlCol="0" anchor="ctr" wrap="square" lIns="50800" rIns="38100" tIns="12700" bIns="12700"/>
+          <a:lstStyle/>
+          <a:p>
+            <a:pPr algn="l"/>
+            <a:r>
+              <a:rPr sz="780" b="1" i="0">
+                <a:solidFill>
+                  <a:srgbClr val="A33D2E"/>
+                </a:solidFill>
+                <a:latin typeface="Segoe UI"/>
+              </a:rPr>
+              <a:t>Runway / Taxiway / Apron — pavement &amp; geometry</a:t>
+            </a:r>
+          </a:p>
+        </p:txBody>
+      </p:sp>
+      <p:sp>
+        <p:nvSpPr>
+          <p:cNvPr id="11" name="Rectangle 10"/>
+          <p:cNvSpPr/>
+          <p:nvPr/>
+        </p:nvSpPr>
+        <p:spPr>
+          <a:xfrm>
+            <a:off x="2971800" y="1755648"/>
+            <a:ext cx="640080" cy="411480"/>
+          </a:xfrm>
+          <a:prstGeom prst="rect">
+            <a:avLst/>
+          </a:prstGeom>
+          <a:solidFill>
+            <a:srgbClr val="F4EFE9"/>
+          </a:solidFill>
+          <a:ln>
+            <a:noFill/>
+          </a:ln>
+          <a:effectLst/>
+        </p:spPr>
+        <p:style>
+          <a:lnRef idx="1">
+            <a:schemeClr val="accent1"/>
+          </a:lnRef>
+          <a:fillRef idx="3">
+            <a:schemeClr val="accent1"/>
+          </a:fillRef>
+          <a:effectRef idx="2">
+            <a:schemeClr val="accent1"/>
+          </a:effectRef>
+          <a:fontRef idx="minor">
+            <a:schemeClr val="lt1"/>
+          </a:fontRef>
+        </p:style>
+        <p:txBody>
+          <a:bodyPr rtlCol="0" anchor="ctr" wrap="square" lIns="50800" rIns="38100" tIns="12700" bIns="12700"/>
+          <a:lstStyle/>
+          <a:p>
+            <a:pPr algn="ctr"/>
+            <a:r>
+              <a:rPr sz="780" b="0" i="0">
+                <a:solidFill>
+                  <a:srgbClr val="5A493F"/>
+                </a:solidFill>
+                <a:latin typeface="Segoe UI"/>
+              </a:rPr>
+              <a:t>Yes</a:t>
+            </a:r>
+          </a:p>
+        </p:txBody>
+      </p:sp>
+      <p:sp>
+        <p:nvSpPr>
+          <p:cNvPr id="12" name="Rectangle 11"/>
+          <p:cNvSpPr/>
+          <p:nvPr/>
+        </p:nvSpPr>
+        <p:spPr>
+          <a:xfrm>
+            <a:off x="3611880" y="1755648"/>
+            <a:ext cx="640080" cy="411480"/>
+          </a:xfrm>
+          <a:prstGeom prst="rect">
+            <a:avLst/>
+          </a:prstGeom>
+          <a:solidFill>
+            <a:srgbClr val="F4EFE9"/>
+          </a:solidFill>
+          <a:ln>
+            <a:noFill/>
+          </a:ln>
+          <a:effectLst/>
+        </p:spPr>
+        <p:style>
+          <a:lnRef idx="1">
+            <a:schemeClr val="accent1"/>
+          </a:lnRef>
+          <a:fillRef idx="3">
+            <a:schemeClr val="accent1"/>
+          </a:fillRef>
+          <a:effectRef idx="2">
+            <a:schemeClr val="accent1"/>
+          </a:effectRef>
+          <a:fontRef idx="minor">
+            <a:schemeClr val="lt1"/>
+          </a:fontRef>
+        </p:style>
+        <p:txBody>
+          <a:bodyPr rtlCol="0" anchor="ctr" wrap="square" lIns="50800" rIns="38100" tIns="12700" bIns="12700"/>
+          <a:lstStyle/>
+          <a:p>
+            <a:pPr algn="ctr"/>
+            <a:r>
+              <a:rPr sz="780" b="0" i="0">
+                <a:solidFill>
+                  <a:srgbClr val="5A493F"/>
+                </a:solidFill>
+                <a:latin typeface="Segoe UI"/>
+              </a:rPr>
+              <a:t>Yes</a:t>
+            </a:r>
+          </a:p>
+        </p:txBody>
+      </p:sp>
+      <p:sp>
+        <p:nvSpPr>
+          <p:cNvPr id="13" name="Rectangle 12"/>
+          <p:cNvSpPr/>
+          <p:nvPr/>
+        </p:nvSpPr>
+        <p:spPr>
+          <a:xfrm>
+            <a:off x="4251960" y="1755648"/>
+            <a:ext cx="960120" cy="411480"/>
+          </a:xfrm>
+          <a:prstGeom prst="rect">
+            <a:avLst/>
+          </a:prstGeom>
+          <a:solidFill>
+            <a:srgbClr val="2E7D32"/>
+          </a:solidFill>
+          <a:ln>
+            <a:noFill/>
+          </a:ln>
+          <a:effectLst/>
+        </p:spPr>
+        <p:style>
+          <a:lnRef idx="1">
+            <a:schemeClr val="accent1"/>
+          </a:lnRef>
+          <a:fillRef idx="3">
+            <a:schemeClr val="accent1"/>
+          </a:fillRef>
+          <a:effectRef idx="2">
+            <a:schemeClr val="accent1"/>
+          </a:effectRef>
+          <a:fontRef idx="minor">
+            <a:schemeClr val="lt1"/>
+          </a:fontRef>
+        </p:style>
+        <p:txBody>
+          <a:bodyPr rtlCol="0" anchor="ctr" wrap="square" lIns="25400" rIns="25400" tIns="0" bIns="0"/>
+          <a:lstStyle/>
+          <a:p>
+            <a:pPr algn="ctr"/>
+            <a:r>
+              <a:rPr sz="800" b="1" i="0">
+                <a:solidFill>
+                  <a:srgbClr val="FFFFFF"/>
+                </a:solidFill>
+                <a:latin typeface="Segoe UI"/>
+              </a:rPr>
+              <a:t>Covered</a:t>
+            </a:r>
+          </a:p>
+        </p:txBody>
+      </p:sp>
+      <p:sp>
+        <p:nvSpPr>
+          <p:cNvPr id="14" name="Rectangle 13"/>
+          <p:cNvSpPr/>
+          <p:nvPr/>
+        </p:nvSpPr>
+        <p:spPr>
+          <a:xfrm>
+            <a:off x="5212080" y="1755648"/>
+            <a:ext cx="3566160" cy="411480"/>
+          </a:xfrm>
+          <a:prstGeom prst="rect">
+            <a:avLst/>
+          </a:prstGeom>
+          <a:solidFill>
+            <a:srgbClr val="F4EFE9"/>
+          </a:solidFill>
+          <a:ln>
+            <a:noFill/>
+          </a:ln>
+          <a:effectLst/>
+        </p:spPr>
+        <p:style>
+          <a:lnRef idx="1">
+            <a:schemeClr val="accent1"/>
+          </a:lnRef>
+          <a:fillRef idx="3">
+            <a:schemeClr val="accent1"/>
+          </a:fillRef>
+          <a:effectRef idx="2">
+            <a:schemeClr val="accent1"/>
+          </a:effectRef>
+          <a:fontRef idx="minor">
+            <a:schemeClr val="lt1"/>
+          </a:fontRef>
+        </p:style>
+        <p:txBody>
+          <a:bodyPr rtlCol="0" anchor="ctr" wrap="square" lIns="50800" rIns="38100" tIns="12700" bIns="12700"/>
+          <a:lstStyle/>
+          <a:p>
+            <a:pPr algn="l"/>
+            <a:r>
+              <a:rPr sz="780" b="0" i="0">
+                <a:solidFill>
+                  <a:srgbClr val="5A493F"/>
+                </a:solidFill>
+                <a:latin typeface="Segoe UI"/>
+              </a:rPr>
+              <a:t>Geometry, spot levels, pavement type &amp; profile, marking</a:t>
+            </a:r>
+          </a:p>
+        </p:txBody>
+      </p:sp>
+      <p:sp>
+        <p:nvSpPr>
+          <p:cNvPr id="15" name="Rectangle 14"/>
+          <p:cNvSpPr/>
+          <p:nvPr/>
+        </p:nvSpPr>
+        <p:spPr>
+          <a:xfrm>
+            <a:off x="365760" y="2167128"/>
+            <a:ext cx="2606040" cy="411480"/>
+          </a:xfrm>
+          <a:prstGeom prst="rect">
+            <a:avLst/>
+          </a:prstGeom>
+          <a:solidFill>
+            <a:srgbClr val="FFFFFF"/>
+          </a:solidFill>
+          <a:ln>
+            <a:noFill/>
+          </a:ln>
+          <a:effectLst/>
+        </p:spPr>
+        <p:style>
+          <a:lnRef idx="1">
+            <a:schemeClr val="accent1"/>
+          </a:lnRef>
+          <a:fillRef idx="3">
+            <a:schemeClr val="accent1"/>
+          </a:fillRef>
+          <a:effectRef idx="2">
+            <a:schemeClr val="accent1"/>
+          </a:effectRef>
+          <a:fontRef idx="minor">
+            <a:schemeClr val="lt1"/>
+          </a:fontRef>
+        </p:style>
+        <p:txBody>
+          <a:bodyPr rtlCol="0" anchor="ctr" wrap="square" lIns="50800" rIns="38100" tIns="12700" bIns="12700"/>
+          <a:lstStyle/>
+          <a:p>
+            <a:pPr algn="l"/>
+            <a:r>
+              <a:rPr sz="780" b="1" i="0">
+                <a:solidFill>
+                  <a:srgbClr val="A33D2E"/>
+                </a:solidFill>
+                <a:latin typeface="Segoe UI"/>
+              </a:rPr>
+              <a:t>Earthworks &amp; ground improvement</a:t>
+            </a:r>
+          </a:p>
+        </p:txBody>
+      </p:sp>
+      <p:sp>
+        <p:nvSpPr>
+          <p:cNvPr id="16" name="Rectangle 15"/>
+          <p:cNvSpPr/>
+          <p:nvPr/>
+        </p:nvSpPr>
+        <p:spPr>
+          <a:xfrm>
+            <a:off x="2971800" y="2167128"/>
+            <a:ext cx="640080" cy="411480"/>
+          </a:xfrm>
+          <a:prstGeom prst="rect">
+            <a:avLst/>
+          </a:prstGeom>
+          <a:solidFill>
+            <a:srgbClr val="FFFFFF"/>
+          </a:solidFill>
+          <a:ln>
+            <a:noFill/>
+          </a:ln>
+          <a:effectLst/>
+        </p:spPr>
+        <p:style>
+          <a:lnRef idx="1">
+            <a:schemeClr val="accent1"/>
+          </a:lnRef>
+          <a:fillRef idx="3">
+            <a:schemeClr val="accent1"/>
+          </a:fillRef>
+          <a:effectRef idx="2">
+            <a:schemeClr val="accent1"/>
+          </a:effectRef>
+          <a:fontRef idx="minor">
+            <a:schemeClr val="lt1"/>
+          </a:fontRef>
+        </p:style>
+        <p:txBody>
+          <a:bodyPr rtlCol="0" anchor="ctr" wrap="square" lIns="50800" rIns="38100" tIns="12700" bIns="12700"/>
+          <a:lstStyle/>
+          <a:p>
+            <a:pPr algn="ctr"/>
+            <a:r>
+              <a:rPr sz="780" b="0" i="0">
+                <a:solidFill>
+                  <a:srgbClr val="5A493F"/>
+                </a:solidFill>
+                <a:latin typeface="Segoe UI"/>
+              </a:rPr>
+              <a:t>Yes</a:t>
+            </a:r>
+          </a:p>
+        </p:txBody>
+      </p:sp>
+      <p:sp>
+        <p:nvSpPr>
+          <p:cNvPr id="17" name="Rectangle 16"/>
+          <p:cNvSpPr/>
+          <p:nvPr/>
+        </p:nvSpPr>
+        <p:spPr>
+          <a:xfrm>
+            <a:off x="3611880" y="2167128"/>
+            <a:ext cx="640080" cy="411480"/>
+          </a:xfrm>
+          <a:prstGeom prst="rect">
+            <a:avLst/>
+          </a:prstGeom>
+          <a:solidFill>
+            <a:srgbClr val="FFFFFF"/>
+          </a:solidFill>
+          <a:ln>
+            <a:noFill/>
+          </a:ln>
+          <a:effectLst/>
+        </p:spPr>
+        <p:style>
+          <a:lnRef idx="1">
+            <a:schemeClr val="accent1"/>
+          </a:lnRef>
+          <a:fillRef idx="3">
+            <a:schemeClr val="accent1"/>
+          </a:fillRef>
+          <a:effectRef idx="2">
+            <a:schemeClr val="accent1"/>
+          </a:effectRef>
+          <a:fontRef idx="minor">
+            <a:schemeClr val="lt1"/>
+          </a:fontRef>
+        </p:style>
+        <p:txBody>
+          <a:bodyPr rtlCol="0" anchor="ctr" wrap="square" lIns="50800" rIns="38100" tIns="12700" bIns="12700"/>
+          <a:lstStyle/>
+          <a:p>
+            <a:pPr algn="ctr"/>
+            <a:r>
+              <a:rPr sz="780" b="0" i="0">
+                <a:solidFill>
+                  <a:srgbClr val="5A493F"/>
+                </a:solidFill>
+                <a:latin typeface="Segoe UI"/>
+              </a:rPr>
+              <a:t>Yes</a:t>
+            </a:r>
+          </a:p>
+        </p:txBody>
+      </p:sp>
+      <p:sp>
+        <p:nvSpPr>
+          <p:cNvPr id="18" name="Rectangle 17"/>
+          <p:cNvSpPr/>
+          <p:nvPr/>
+        </p:nvSpPr>
+        <p:spPr>
+          <a:xfrm>
+            <a:off x="4251960" y="2167128"/>
+            <a:ext cx="960120" cy="411480"/>
+          </a:xfrm>
+          <a:prstGeom prst="rect">
+            <a:avLst/>
+          </a:prstGeom>
+          <a:solidFill>
+            <a:srgbClr val="2E7D32"/>
+          </a:solidFill>
+          <a:ln>
+            <a:noFill/>
+          </a:ln>
+          <a:effectLst/>
+        </p:spPr>
+        <p:style>
+          <a:lnRef idx="1">
+            <a:schemeClr val="accent1"/>
+          </a:lnRef>
+          <a:fillRef idx="3">
+            <a:schemeClr val="accent1"/>
+          </a:fillRef>
+          <a:effectRef idx="2">
+            <a:schemeClr val="accent1"/>
+          </a:effectRef>
+          <a:fontRef idx="minor">
+            <a:schemeClr val="lt1"/>
+          </a:fontRef>
+        </p:style>
+        <p:txBody>
+          <a:bodyPr rtlCol="0" anchor="ctr" wrap="square" lIns="25400" rIns="25400" tIns="0" bIns="0"/>
+          <a:lstStyle/>
+          <a:p>
+            <a:pPr algn="ctr"/>
+            <a:r>
+              <a:rPr sz="800" b="1" i="0">
+                <a:solidFill>
+                  <a:srgbClr val="FFFFFF"/>
+                </a:solidFill>
+                <a:latin typeface="Segoe UI"/>
+              </a:rPr>
+              <a:t>Covered</a:t>
+            </a:r>
+          </a:p>
+        </p:txBody>
+      </p:sp>
+      <p:sp>
+        <p:nvSpPr>
+          <p:cNvPr id="19" name="Rectangle 18"/>
+          <p:cNvSpPr/>
+          <p:nvPr/>
+        </p:nvSpPr>
+        <p:spPr>
+          <a:xfrm>
+            <a:off x="5212080" y="2167128"/>
+            <a:ext cx="3566160" cy="411480"/>
+          </a:xfrm>
+          <a:prstGeom prst="rect">
+            <a:avLst/>
+          </a:prstGeom>
+          <a:solidFill>
+            <a:srgbClr val="FFFFFF"/>
+          </a:solidFill>
+          <a:ln>
+            <a:noFill/>
+          </a:ln>
+          <a:effectLst/>
+        </p:spPr>
+        <p:style>
+          <a:lnRef idx="1">
+            <a:schemeClr val="accent1"/>
+          </a:lnRef>
+          <a:fillRef idx="3">
+            <a:schemeClr val="accent1"/>
+          </a:fillRef>
+          <a:effectRef idx="2">
+            <a:schemeClr val="accent1"/>
+          </a:effectRef>
+          <a:fontRef idx="minor">
+            <a:schemeClr val="lt1"/>
+          </a:fontRef>
+        </p:style>
+        <p:txBody>
+          <a:bodyPr rtlCol="0" anchor="ctr" wrap="square" lIns="50800" rIns="38100" tIns="12700" bIns="12700"/>
+          <a:lstStyle/>
+          <a:p>
+            <a:pPr algn="l"/>
+            <a:r>
+              <a:rPr sz="780" b="0" i="0">
+                <a:solidFill>
+                  <a:srgbClr val="5A493F"/>
+                </a:solidFill>
+                <a:latin typeface="Segoe UI"/>
+              </a:rPr>
+              <a:t>Grading plan; earthworks / subgrade specs</a:t>
+            </a:r>
+          </a:p>
+        </p:txBody>
+      </p:sp>
+      <p:sp>
+        <p:nvSpPr>
+          <p:cNvPr id="20" name="Rectangle 19"/>
+          <p:cNvSpPr/>
+          <p:nvPr/>
+        </p:nvSpPr>
+        <p:spPr>
+          <a:xfrm>
+            <a:off x="365760" y="2578608"/>
+            <a:ext cx="2606040" cy="411480"/>
+          </a:xfrm>
+          <a:prstGeom prst="rect">
+            <a:avLst/>
+          </a:prstGeom>
+          <a:solidFill>
+            <a:srgbClr val="F4EFE9"/>
+          </a:solidFill>
+          <a:ln>
+            <a:noFill/>
+          </a:ln>
+          <a:effectLst/>
+        </p:spPr>
+        <p:style>
+          <a:lnRef idx="1">
+            <a:schemeClr val="accent1"/>
+          </a:lnRef>
+          <a:fillRef idx="3">
+            <a:schemeClr val="accent1"/>
+          </a:fillRef>
+          <a:effectRef idx="2">
+            <a:schemeClr val="accent1"/>
+          </a:effectRef>
+          <a:fontRef idx="minor">
+            <a:schemeClr val="lt1"/>
+          </a:fontRef>
+        </p:style>
+        <p:txBody>
+          <a:bodyPr rtlCol="0" anchor="ctr" wrap="square" lIns="50800" rIns="38100" tIns="12700" bIns="12700"/>
+          <a:lstStyle/>
+          <a:p>
+            <a:pPr algn="l"/>
+            <a:r>
+              <a:rPr sz="780" b="1" i="0">
+                <a:solidFill>
+                  <a:srgbClr val="A33D2E"/>
+                </a:solidFill>
+                <a:latin typeface="Segoe UI"/>
+              </a:rPr>
+              <a:t>Drainage &amp; culverts / river-crossing</a:t>
+            </a:r>
+          </a:p>
+        </p:txBody>
+      </p:sp>
+      <p:sp>
+        <p:nvSpPr>
+          <p:cNvPr id="21" name="Rectangle 20"/>
+          <p:cNvSpPr/>
+          <p:nvPr/>
+        </p:nvSpPr>
+        <p:spPr>
+          <a:xfrm>
+            <a:off x="2971800" y="2578608"/>
+            <a:ext cx="640080" cy="411480"/>
+          </a:xfrm>
+          <a:prstGeom prst="rect">
+            <a:avLst/>
+          </a:prstGeom>
+          <a:solidFill>
+            <a:srgbClr val="F4EFE9"/>
+          </a:solidFill>
+          <a:ln>
+            <a:noFill/>
+          </a:ln>
+          <a:effectLst/>
+        </p:spPr>
+        <p:style>
+          <a:lnRef idx="1">
+            <a:schemeClr val="accent1"/>
+          </a:lnRef>
+          <a:fillRef idx="3">
+            <a:schemeClr val="accent1"/>
+          </a:fillRef>
+          <a:effectRef idx="2">
+            <a:schemeClr val="accent1"/>
+          </a:effectRef>
+          <a:fontRef idx="minor">
+            <a:schemeClr val="lt1"/>
+          </a:fontRef>
+        </p:style>
+        <p:txBody>
+          <a:bodyPr rtlCol="0" anchor="ctr" wrap="square" lIns="50800" rIns="38100" tIns="12700" bIns="12700"/>
+          <a:lstStyle/>
+          <a:p>
+            <a:pPr algn="ctr"/>
+            <a:r>
+              <a:rPr sz="780" b="0" i="0">
+                <a:solidFill>
+                  <a:srgbClr val="5A493F"/>
+                </a:solidFill>
+                <a:latin typeface="Segoe UI"/>
+              </a:rPr>
+              <a:t>Yes</a:t>
+            </a:r>
+          </a:p>
+        </p:txBody>
+      </p:sp>
+      <p:sp>
+        <p:nvSpPr>
+          <p:cNvPr id="22" name="Rectangle 21"/>
+          <p:cNvSpPr/>
+          <p:nvPr/>
+        </p:nvSpPr>
+        <p:spPr>
+          <a:xfrm>
+            <a:off x="3611880" y="2578608"/>
+            <a:ext cx="640080" cy="411480"/>
+          </a:xfrm>
+          <a:prstGeom prst="rect">
+            <a:avLst/>
+          </a:prstGeom>
+          <a:solidFill>
+            <a:srgbClr val="F4EFE9"/>
+          </a:solidFill>
+          <a:ln>
+            <a:noFill/>
+          </a:ln>
+          <a:effectLst/>
+        </p:spPr>
+        <p:style>
+          <a:lnRef idx="1">
+            <a:schemeClr val="accent1"/>
+          </a:lnRef>
+          <a:fillRef idx="3">
+            <a:schemeClr val="accent1"/>
+          </a:fillRef>
+          <a:effectRef idx="2">
+            <a:schemeClr val="accent1"/>
+          </a:effectRef>
+          <a:fontRef idx="minor">
+            <a:schemeClr val="lt1"/>
+          </a:fontRef>
+        </p:style>
+        <p:txBody>
+          <a:bodyPr rtlCol="0" anchor="ctr" wrap="square" lIns="50800" rIns="38100" tIns="12700" bIns="12700"/>
+          <a:lstStyle/>
+          <a:p>
+            <a:pPr algn="ctr"/>
+            <a:r>
+              <a:rPr sz="780" b="0" i="0">
+                <a:solidFill>
+                  <a:srgbClr val="5A493F"/>
+                </a:solidFill>
+                <a:latin typeface="Segoe UI"/>
+              </a:rPr>
+              <a:t>Yes</a:t>
+            </a:r>
+          </a:p>
+        </p:txBody>
+      </p:sp>
+      <p:sp>
+        <p:nvSpPr>
+          <p:cNvPr id="23" name="Rectangle 22"/>
+          <p:cNvSpPr/>
+          <p:nvPr/>
+        </p:nvSpPr>
+        <p:spPr>
+          <a:xfrm>
+            <a:off x="4251960" y="2578608"/>
+            <a:ext cx="960120" cy="411480"/>
+          </a:xfrm>
+          <a:prstGeom prst="rect">
+            <a:avLst/>
+          </a:prstGeom>
+          <a:solidFill>
+            <a:srgbClr val="2E7D32"/>
+          </a:solidFill>
+          <a:ln>
+            <a:noFill/>
+          </a:ln>
+          <a:effectLst/>
+        </p:spPr>
+        <p:style>
+          <a:lnRef idx="1">
+            <a:schemeClr val="accent1"/>
+          </a:lnRef>
+          <a:fillRef idx="3">
+            <a:schemeClr val="accent1"/>
+          </a:fillRef>
+          <a:effectRef idx="2">
+            <a:schemeClr val="accent1"/>
+          </a:effectRef>
+          <a:fontRef idx="minor">
+            <a:schemeClr val="lt1"/>
+          </a:fontRef>
+        </p:style>
+        <p:txBody>
+          <a:bodyPr rtlCol="0" anchor="ctr" wrap="square" lIns="25400" rIns="25400" tIns="0" bIns="0"/>
+          <a:lstStyle/>
+          <a:p>
+            <a:pPr algn="ctr"/>
+            <a:r>
+              <a:rPr sz="800" b="1" i="0">
+                <a:solidFill>
+                  <a:srgbClr val="FFFFFF"/>
+                </a:solidFill>
+                <a:latin typeface="Segoe UI"/>
+              </a:rPr>
+              <a:t>Covered</a:t>
+            </a:r>
+          </a:p>
+        </p:txBody>
+      </p:sp>
+      <p:sp>
+        <p:nvSpPr>
+          <p:cNvPr id="24" name="Rectangle 23"/>
+          <p:cNvSpPr/>
+          <p:nvPr/>
+        </p:nvSpPr>
+        <p:spPr>
+          <a:xfrm>
+            <a:off x="5212080" y="2578608"/>
+            <a:ext cx="3566160" cy="411480"/>
+          </a:xfrm>
+          <a:prstGeom prst="rect">
+            <a:avLst/>
+          </a:prstGeom>
+          <a:solidFill>
+            <a:srgbClr val="F4EFE9"/>
+          </a:solidFill>
+          <a:ln>
+            <a:noFill/>
+          </a:ln>
+          <a:effectLst/>
+        </p:spPr>
+        <p:style>
+          <a:lnRef idx="1">
+            <a:schemeClr val="accent1"/>
+          </a:lnRef>
+          <a:fillRef idx="3">
+            <a:schemeClr val="accent1"/>
+          </a:fillRef>
+          <a:effectRef idx="2">
+            <a:schemeClr val="accent1"/>
+          </a:effectRef>
+          <a:fontRef idx="minor">
+            <a:schemeClr val="lt1"/>
+          </a:fontRef>
+        </p:style>
+        <p:txBody>
+          <a:bodyPr rtlCol="0" anchor="ctr" wrap="square" lIns="50800" rIns="38100" tIns="12700" bIns="12700"/>
+          <a:lstStyle/>
+          <a:p>
+            <a:pPr algn="l"/>
+            <a:r>
+              <a:rPr sz="780" b="0" i="0">
+                <a:solidFill>
+                  <a:srgbClr val="5A493F"/>
+                </a:solidFill>
+                <a:latin typeface="Segoe UI"/>
+              </a:rPr>
+              <a:t>Drainage layouts; river-bank protection</a:t>
+            </a:r>
+          </a:p>
+        </p:txBody>
+      </p:sp>
+      <p:sp>
+        <p:nvSpPr>
+          <p:cNvPr id="25" name="Rectangle 24"/>
+          <p:cNvSpPr/>
+          <p:nvPr/>
+        </p:nvSpPr>
+        <p:spPr>
+          <a:xfrm>
+            <a:off x="365760" y="2990088"/>
+            <a:ext cx="2606040" cy="411480"/>
+          </a:xfrm>
+          <a:prstGeom prst="rect">
+            <a:avLst/>
+          </a:prstGeom>
+          <a:solidFill>
+            <a:srgbClr val="FFFFFF"/>
+          </a:solidFill>
+          <a:ln>
+            <a:noFill/>
+          </a:ln>
+          <a:effectLst/>
+        </p:spPr>
+        <p:style>
+          <a:lnRef idx="1">
+            <a:schemeClr val="accent1"/>
+          </a:lnRef>
+          <a:fillRef idx="3">
+            <a:schemeClr val="accent1"/>
+          </a:fillRef>
+          <a:effectRef idx="2">
+            <a:schemeClr val="accent1"/>
+          </a:effectRef>
+          <a:fontRef idx="minor">
+            <a:schemeClr val="lt1"/>
+          </a:fontRef>
+        </p:style>
+        <p:txBody>
+          <a:bodyPr rtlCol="0" anchor="ctr" wrap="square" lIns="50800" rIns="38100" tIns="12700" bIns="12700"/>
+          <a:lstStyle/>
+          <a:p>
+            <a:pPr algn="l"/>
+            <a:r>
+              <a:rPr sz="780" b="1" i="0">
+                <a:solidFill>
+                  <a:srgbClr val="A33D2E"/>
+                </a:solidFill>
+                <a:latin typeface="Segoe UI"/>
+              </a:rPr>
+              <a:t>AGL, ALCMS &amp; visual aids</a:t>
+            </a:r>
+          </a:p>
+        </p:txBody>
+      </p:sp>
+      <p:sp>
+        <p:nvSpPr>
+          <p:cNvPr id="26" name="Rectangle 25"/>
+          <p:cNvSpPr/>
+          <p:nvPr/>
+        </p:nvSpPr>
+        <p:spPr>
+          <a:xfrm>
+            <a:off x="2971800" y="2990088"/>
+            <a:ext cx="640080" cy="411480"/>
+          </a:xfrm>
+          <a:prstGeom prst="rect">
+            <a:avLst/>
+          </a:prstGeom>
+          <a:solidFill>
+            <a:srgbClr val="FFFFFF"/>
+          </a:solidFill>
+          <a:ln>
+            <a:noFill/>
+          </a:ln>
+          <a:effectLst/>
+        </p:spPr>
+        <p:style>
+          <a:lnRef idx="1">
+            <a:schemeClr val="accent1"/>
+          </a:lnRef>
+          <a:fillRef idx="3">
+            <a:schemeClr val="accent1"/>
+          </a:fillRef>
+          <a:effectRef idx="2">
+            <a:schemeClr val="accent1"/>
+          </a:effectRef>
+          <a:fontRef idx="minor">
+            <a:schemeClr val="lt1"/>
+          </a:fontRef>
+        </p:style>
+        <p:txBody>
+          <a:bodyPr rtlCol="0" anchor="ctr" wrap="square" lIns="50800" rIns="38100" tIns="12700" bIns="12700"/>
+          <a:lstStyle/>
+          <a:p>
+            <a:pPr algn="ctr"/>
+            <a:r>
+              <a:rPr sz="780" b="0" i="0">
+                <a:solidFill>
+                  <a:srgbClr val="5A493F"/>
+                </a:solidFill>
+                <a:latin typeface="Segoe UI"/>
+              </a:rPr>
+              <a:t>Yes</a:t>
+            </a:r>
+          </a:p>
+        </p:txBody>
+      </p:sp>
+      <p:sp>
+        <p:nvSpPr>
+          <p:cNvPr id="27" name="Rectangle 26"/>
+          <p:cNvSpPr/>
+          <p:nvPr/>
+        </p:nvSpPr>
+        <p:spPr>
+          <a:xfrm>
+            <a:off x="3611880" y="2990088"/>
+            <a:ext cx="640080" cy="411480"/>
+          </a:xfrm>
+          <a:prstGeom prst="rect">
+            <a:avLst/>
+          </a:prstGeom>
+          <a:solidFill>
+            <a:srgbClr val="FFFFFF"/>
+          </a:solidFill>
+          <a:ln>
+            <a:noFill/>
+          </a:ln>
+          <a:effectLst/>
+        </p:spPr>
+        <p:style>
+          <a:lnRef idx="1">
+            <a:schemeClr val="accent1"/>
+          </a:lnRef>
+          <a:fillRef idx="3">
+            <a:schemeClr val="accent1"/>
+          </a:fillRef>
+          <a:effectRef idx="2">
+            <a:schemeClr val="accent1"/>
+          </a:effectRef>
+          <a:fontRef idx="minor">
+            <a:schemeClr val="lt1"/>
+          </a:fontRef>
+        </p:style>
+        <p:txBody>
+          <a:bodyPr rtlCol="0" anchor="ctr" wrap="square" lIns="50800" rIns="38100" tIns="12700" bIns="12700"/>
+          <a:lstStyle/>
+          <a:p>
+            <a:pPr algn="ctr"/>
+            <a:r>
+              <a:rPr sz="780" b="0" i="0">
+                <a:solidFill>
+                  <a:srgbClr val="5A493F"/>
+                </a:solidFill>
+                <a:latin typeface="Segoe UI"/>
+              </a:rPr>
+              <a:t>Yes</a:t>
+            </a:r>
+          </a:p>
+        </p:txBody>
+      </p:sp>
+      <p:sp>
+        <p:nvSpPr>
+          <p:cNvPr id="28" name="Rectangle 27"/>
+          <p:cNvSpPr/>
+          <p:nvPr/>
+        </p:nvSpPr>
+        <p:spPr>
+          <a:xfrm>
+            <a:off x="4251960" y="2990088"/>
+            <a:ext cx="960120" cy="411480"/>
+          </a:xfrm>
+          <a:prstGeom prst="rect">
+            <a:avLst/>
+          </a:prstGeom>
+          <a:solidFill>
+            <a:srgbClr val="2E7D32"/>
+          </a:solidFill>
+          <a:ln>
+            <a:noFill/>
+          </a:ln>
+          <a:effectLst/>
+        </p:spPr>
+        <p:style>
+          <a:lnRef idx="1">
+            <a:schemeClr val="accent1"/>
+          </a:lnRef>
+          <a:fillRef idx="3">
+            <a:schemeClr val="accent1"/>
+          </a:fillRef>
+          <a:effectRef idx="2">
+            <a:schemeClr val="accent1"/>
+          </a:effectRef>
+          <a:fontRef idx="minor">
+            <a:schemeClr val="lt1"/>
+          </a:fontRef>
+        </p:style>
+        <p:txBody>
+          <a:bodyPr rtlCol="0" anchor="ctr" wrap="square" lIns="25400" rIns="25400" tIns="0" bIns="0"/>
+          <a:lstStyle/>
+          <a:p>
+            <a:pPr algn="ctr"/>
+            <a:r>
+              <a:rPr sz="800" b="1" i="0">
+                <a:solidFill>
+                  <a:srgbClr val="FFFFFF"/>
+                </a:solidFill>
+                <a:latin typeface="Segoe UI"/>
+              </a:rPr>
+              <a:t>Covered</a:t>
+            </a:r>
+          </a:p>
+        </p:txBody>
+      </p:sp>
+      <p:sp>
+        <p:nvSpPr>
+          <p:cNvPr id="29" name="Rectangle 28"/>
+          <p:cNvSpPr/>
+          <p:nvPr/>
+        </p:nvSpPr>
+        <p:spPr>
+          <a:xfrm>
+            <a:off x="5212080" y="2990088"/>
+            <a:ext cx="3566160" cy="411480"/>
+          </a:xfrm>
+          <a:prstGeom prst="rect">
+            <a:avLst/>
+          </a:prstGeom>
+          <a:solidFill>
+            <a:srgbClr val="FFFFFF"/>
+          </a:solidFill>
+          <a:ln>
+            <a:noFill/>
+          </a:ln>
+          <a:effectLst/>
+        </p:spPr>
+        <p:style>
+          <a:lnRef idx="1">
+            <a:schemeClr val="accent1"/>
+          </a:lnRef>
+          <a:fillRef idx="3">
+            <a:schemeClr val="accent1"/>
+          </a:fillRef>
+          <a:effectRef idx="2">
+            <a:schemeClr val="accent1"/>
+          </a:effectRef>
+          <a:fontRef idx="minor">
+            <a:schemeClr val="lt1"/>
+          </a:fontRef>
+        </p:style>
+        <p:txBody>
+          <a:bodyPr rtlCol="0" anchor="ctr" wrap="square" lIns="50800" rIns="38100" tIns="12700" bIns="12700"/>
+          <a:lstStyle/>
+          <a:p>
+            <a:pPr algn="l"/>
+            <a:r>
+              <a:rPr sz="780" b="0" i="0">
+                <a:solidFill>
+                  <a:srgbClr val="5A493F"/>
+                </a:solidFill>
+                <a:latin typeface="Segoe UI"/>
+              </a:rPr>
+              <a:t>Full AFL set; ALCMS spec</a:t>
+            </a:r>
+          </a:p>
+        </p:txBody>
+      </p:sp>
+      <p:sp>
+        <p:nvSpPr>
+          <p:cNvPr id="30" name="Rectangle 29"/>
+          <p:cNvSpPr/>
+          <p:nvPr/>
+        </p:nvSpPr>
+        <p:spPr>
+          <a:xfrm>
+            <a:off x="365760" y="3401568"/>
+            <a:ext cx="2606040" cy="411480"/>
+          </a:xfrm>
+          <a:prstGeom prst="rect">
+            <a:avLst/>
+          </a:prstGeom>
+          <a:solidFill>
+            <a:srgbClr val="F4EFE9"/>
+          </a:solidFill>
+          <a:ln>
+            <a:noFill/>
+          </a:ln>
+          <a:effectLst/>
+        </p:spPr>
+        <p:style>
+          <a:lnRef idx="1">
+            <a:schemeClr val="accent1"/>
+          </a:lnRef>
+          <a:fillRef idx="3">
+            <a:schemeClr val="accent1"/>
+          </a:fillRef>
+          <a:effectRef idx="2">
+            <a:schemeClr val="accent1"/>
+          </a:effectRef>
+          <a:fontRef idx="minor">
+            <a:schemeClr val="lt1"/>
+          </a:fontRef>
+        </p:style>
+        <p:txBody>
+          <a:bodyPr rtlCol="0" anchor="ctr" wrap="square" lIns="50800" rIns="38100" tIns="12700" bIns="12700"/>
+          <a:lstStyle/>
+          <a:p>
+            <a:pPr algn="l"/>
+            <a:r>
+              <a:rPr sz="780" b="1" i="0">
+                <a:solidFill>
+                  <a:srgbClr val="A33D2E"/>
+                </a:solidFill>
+                <a:latin typeface="Segoe UI"/>
+              </a:rPr>
+              <a:t>NAVAIDS / ANS (ILS, DME)</a:t>
+            </a:r>
+          </a:p>
+        </p:txBody>
+      </p:sp>
+      <p:sp>
+        <p:nvSpPr>
+          <p:cNvPr id="31" name="Rectangle 30"/>
+          <p:cNvSpPr/>
+          <p:nvPr/>
+        </p:nvSpPr>
+        <p:spPr>
+          <a:xfrm>
+            <a:off x="2971800" y="3401568"/>
+            <a:ext cx="640080" cy="411480"/>
+          </a:xfrm>
+          <a:prstGeom prst="rect">
+            <a:avLst/>
+          </a:prstGeom>
+          <a:solidFill>
+            <a:srgbClr val="F4EFE9"/>
+          </a:solidFill>
+          <a:ln>
+            <a:noFill/>
+          </a:ln>
+          <a:effectLst/>
+        </p:spPr>
+        <p:style>
+          <a:lnRef idx="1">
+            <a:schemeClr val="accent1"/>
+          </a:lnRef>
+          <a:fillRef idx="3">
+            <a:schemeClr val="accent1"/>
+          </a:fillRef>
+          <a:effectRef idx="2">
+            <a:schemeClr val="accent1"/>
+          </a:effectRef>
+          <a:fontRef idx="minor">
+            <a:schemeClr val="lt1"/>
+          </a:fontRef>
+        </p:style>
+        <p:txBody>
+          <a:bodyPr rtlCol="0" anchor="ctr" wrap="square" lIns="50800" rIns="38100" tIns="12700" bIns="12700"/>
+          <a:lstStyle/>
+          <a:p>
+            <a:pPr algn="ctr"/>
+            <a:r>
+              <a:rPr sz="780" b="0" i="0">
+                <a:solidFill>
+                  <a:srgbClr val="5A493F"/>
+                </a:solidFill>
+                <a:latin typeface="Segoe UI"/>
+              </a:rPr>
+              <a:t>Part</a:t>
+            </a:r>
+          </a:p>
+        </p:txBody>
+      </p:sp>
+      <p:sp>
+        <p:nvSpPr>
+          <p:cNvPr id="32" name="Rectangle 31"/>
+          <p:cNvSpPr/>
+          <p:nvPr/>
+        </p:nvSpPr>
+        <p:spPr>
+          <a:xfrm>
+            <a:off x="3611880" y="3401568"/>
+            <a:ext cx="640080" cy="411480"/>
+          </a:xfrm>
+          <a:prstGeom prst="rect">
+            <a:avLst/>
+          </a:prstGeom>
+          <a:solidFill>
+            <a:srgbClr val="F4EFE9"/>
+          </a:solidFill>
+          <a:ln>
+            <a:noFill/>
+          </a:ln>
+          <a:effectLst/>
+        </p:spPr>
+        <p:style>
+          <a:lnRef idx="1">
+            <a:schemeClr val="accent1"/>
+          </a:lnRef>
+          <a:fillRef idx="3">
+            <a:schemeClr val="accent1"/>
+          </a:fillRef>
+          <a:effectRef idx="2">
+            <a:schemeClr val="accent1"/>
+          </a:effectRef>
+          <a:fontRef idx="minor">
+            <a:schemeClr val="lt1"/>
+          </a:fontRef>
+        </p:style>
+        <p:txBody>
+          <a:bodyPr rtlCol="0" anchor="ctr" wrap="square" lIns="50800" rIns="38100" tIns="12700" bIns="12700"/>
+          <a:lstStyle/>
+          <a:p>
+            <a:pPr algn="ctr"/>
+            <a:r>
+              <a:rPr sz="780" b="0" i="0">
+                <a:solidFill>
+                  <a:srgbClr val="5A493F"/>
+                </a:solidFill>
+                <a:latin typeface="Segoe UI"/>
+              </a:rPr>
+              <a:t>Spec</a:t>
+            </a:r>
+          </a:p>
+        </p:txBody>
+      </p:sp>
+      <p:sp>
+        <p:nvSpPr>
+          <p:cNvPr id="33" name="Rectangle 32"/>
+          <p:cNvSpPr/>
+          <p:nvPr/>
+        </p:nvSpPr>
+        <p:spPr>
+          <a:xfrm>
+            <a:off x="4251960" y="3401568"/>
+            <a:ext cx="960120" cy="411480"/>
+          </a:xfrm>
+          <a:prstGeom prst="rect">
+            <a:avLst/>
+          </a:prstGeom>
+          <a:solidFill>
+            <a:srgbClr val="E68A00"/>
+          </a:solidFill>
+          <a:ln>
+            <a:noFill/>
+          </a:ln>
+          <a:effectLst/>
+        </p:spPr>
+        <p:style>
+          <a:lnRef idx="1">
+            <a:schemeClr val="accent1"/>
+          </a:lnRef>
+          <a:fillRef idx="3">
+            <a:schemeClr val="accent1"/>
+          </a:fillRef>
+          <a:effectRef idx="2">
+            <a:schemeClr val="accent1"/>
+          </a:effectRef>
+          <a:fontRef idx="minor">
+            <a:schemeClr val="lt1"/>
+          </a:fontRef>
+        </p:style>
+        <p:txBody>
+          <a:bodyPr rtlCol="0" anchor="ctr" wrap="square" lIns="25400" rIns="25400" tIns="0" bIns="0"/>
+          <a:lstStyle/>
+          <a:p>
+            <a:pPr algn="ctr"/>
+            <a:r>
+              <a:rPr sz="800" b="1" i="0">
+                <a:solidFill>
+                  <a:srgbClr val="FFFFFF"/>
+                </a:solidFill>
+                <a:latin typeface="Segoe UI"/>
+              </a:rPr>
+              <a:t>Verify</a:t>
+            </a:r>
+          </a:p>
+        </p:txBody>
+      </p:sp>
+      <p:sp>
+        <p:nvSpPr>
+          <p:cNvPr id="34" name="Rectangle 33"/>
+          <p:cNvSpPr/>
+          <p:nvPr/>
+        </p:nvSpPr>
+        <p:spPr>
+          <a:xfrm>
+            <a:off x="5212080" y="3401568"/>
+            <a:ext cx="3566160" cy="411480"/>
+          </a:xfrm>
+          <a:prstGeom prst="rect">
+            <a:avLst/>
+          </a:prstGeom>
+          <a:solidFill>
+            <a:srgbClr val="F4EFE9"/>
+          </a:solidFill>
+          <a:ln>
+            <a:noFill/>
+          </a:ln>
+          <a:effectLst/>
+        </p:spPr>
+        <p:style>
+          <a:lnRef idx="1">
+            <a:schemeClr val="accent1"/>
+          </a:lnRef>
+          <a:fillRef idx="3">
+            <a:schemeClr val="accent1"/>
+          </a:fillRef>
+          <a:effectRef idx="2">
+            <a:schemeClr val="accent1"/>
+          </a:effectRef>
+          <a:fontRef idx="minor">
+            <a:schemeClr val="lt1"/>
+          </a:fontRef>
+        </p:style>
+        <p:txBody>
+          <a:bodyPr rtlCol="0" anchor="ctr" wrap="square" lIns="50800" rIns="38100" tIns="12700" bIns="12700"/>
+          <a:lstStyle/>
+          <a:p>
+            <a:pPr algn="l"/>
+            <a:r>
+              <a:rPr sz="780" b="0" i="0">
+                <a:solidFill>
+                  <a:srgbClr val="5A493F"/>
+                </a:solidFill>
+                <a:latin typeface="Segoe UI"/>
+              </a:rPr>
+              <a:t>LLZ siting only; CNS as performance spec (NSC)</a:t>
+            </a:r>
+          </a:p>
+        </p:txBody>
+      </p:sp>
+      <p:sp>
+        <p:nvSpPr>
+          <p:cNvPr id="35" name="Rectangle 34"/>
+          <p:cNvSpPr/>
+          <p:nvPr/>
+        </p:nvSpPr>
+        <p:spPr>
+          <a:xfrm>
+            <a:off x="365760" y="3813048"/>
+            <a:ext cx="2606040" cy="411480"/>
+          </a:xfrm>
+          <a:prstGeom prst="rect">
+            <a:avLst/>
+          </a:prstGeom>
+          <a:solidFill>
+            <a:srgbClr val="FFFFFF"/>
+          </a:solidFill>
+          <a:ln>
+            <a:noFill/>
+          </a:ln>
+          <a:effectLst/>
+        </p:spPr>
+        <p:style>
+          <a:lnRef idx="1">
+            <a:schemeClr val="accent1"/>
+          </a:lnRef>
+          <a:fillRef idx="3">
+            <a:schemeClr val="accent1"/>
+          </a:fillRef>
+          <a:effectRef idx="2">
+            <a:schemeClr val="accent1"/>
+          </a:effectRef>
+          <a:fontRef idx="minor">
+            <a:schemeClr val="lt1"/>
+          </a:fontRef>
+        </p:style>
+        <p:txBody>
+          <a:bodyPr rtlCol="0" anchor="ctr" wrap="square" lIns="50800" rIns="38100" tIns="12700" bIns="12700"/>
+          <a:lstStyle/>
+          <a:p>
+            <a:pPr algn="l"/>
+            <a:r>
+              <a:rPr sz="780" b="1" i="0">
+                <a:solidFill>
+                  <a:srgbClr val="A33D2E"/>
+                </a:solidFill>
+                <a:latin typeface="Segoe UI"/>
+              </a:rPr>
+              <a:t>Meteorological (MET)</a:t>
+            </a:r>
+          </a:p>
+        </p:txBody>
+      </p:sp>
+      <p:sp>
+        <p:nvSpPr>
+          <p:cNvPr id="36" name="Rectangle 35"/>
+          <p:cNvSpPr/>
+          <p:nvPr/>
+        </p:nvSpPr>
+        <p:spPr>
+          <a:xfrm>
+            <a:off x="2971800" y="3813048"/>
+            <a:ext cx="640080" cy="411480"/>
+          </a:xfrm>
+          <a:prstGeom prst="rect">
+            <a:avLst/>
+          </a:prstGeom>
+          <a:solidFill>
+            <a:srgbClr val="FFFFFF"/>
+          </a:solidFill>
+          <a:ln>
+            <a:noFill/>
+          </a:ln>
+          <a:effectLst/>
+        </p:spPr>
+        <p:style>
+          <a:lnRef idx="1">
+            <a:schemeClr val="accent1"/>
+          </a:lnRef>
+          <a:fillRef idx="3">
+            <a:schemeClr val="accent1"/>
+          </a:fillRef>
+          <a:effectRef idx="2">
+            <a:schemeClr val="accent1"/>
+          </a:effectRef>
+          <a:fontRef idx="minor">
+            <a:schemeClr val="lt1"/>
+          </a:fontRef>
+        </p:style>
+        <p:txBody>
+          <a:bodyPr rtlCol="0" anchor="ctr" wrap="square" lIns="50800" rIns="38100" tIns="12700" bIns="12700"/>
+          <a:lstStyle/>
+          <a:p>
+            <a:pPr algn="ctr"/>
+            <a:r>
+              <a:rPr sz="780" b="0" i="0">
+                <a:solidFill>
+                  <a:srgbClr val="5A493F"/>
+                </a:solidFill>
+                <a:latin typeface="Segoe UI"/>
+              </a:rPr>
+              <a:t>Bldg</a:t>
+            </a:r>
+          </a:p>
+        </p:txBody>
+      </p:sp>
+      <p:sp>
+        <p:nvSpPr>
+          <p:cNvPr id="37" name="Rectangle 36"/>
+          <p:cNvSpPr/>
+          <p:nvPr/>
+        </p:nvSpPr>
+        <p:spPr>
+          <a:xfrm>
+            <a:off x="3611880" y="3813048"/>
+            <a:ext cx="640080" cy="411480"/>
+          </a:xfrm>
+          <a:prstGeom prst="rect">
+            <a:avLst/>
+          </a:prstGeom>
+          <a:solidFill>
+            <a:srgbClr val="FFFFFF"/>
+          </a:solidFill>
+          <a:ln>
+            <a:noFill/>
+          </a:ln>
+          <a:effectLst/>
+        </p:spPr>
+        <p:style>
+          <a:lnRef idx="1">
+            <a:schemeClr val="accent1"/>
+          </a:lnRef>
+          <a:fillRef idx="3">
+            <a:schemeClr val="accent1"/>
+          </a:fillRef>
+          <a:effectRef idx="2">
+            <a:schemeClr val="accent1"/>
+          </a:effectRef>
+          <a:fontRef idx="minor">
+            <a:schemeClr val="lt1"/>
+          </a:fontRef>
+        </p:style>
+        <p:txBody>
+          <a:bodyPr rtlCol="0" anchor="ctr" wrap="square" lIns="50800" rIns="38100" tIns="12700" bIns="12700"/>
+          <a:lstStyle/>
+          <a:p>
+            <a:pPr algn="ctr"/>
+            <a:r>
+              <a:rPr sz="780" b="0" i="0">
+                <a:solidFill>
+                  <a:srgbClr val="5A493F"/>
+                </a:solidFill>
+                <a:latin typeface="Segoe UI"/>
+              </a:rPr>
+              <a:t>Spec</a:t>
+            </a:r>
+          </a:p>
+        </p:txBody>
+      </p:sp>
+      <p:sp>
+        <p:nvSpPr>
+          <p:cNvPr id="38" name="Rectangle 37"/>
+          <p:cNvSpPr/>
+          <p:nvPr/>
+        </p:nvSpPr>
+        <p:spPr>
+          <a:xfrm>
+            <a:off x="4251960" y="3813048"/>
+            <a:ext cx="960120" cy="411480"/>
+          </a:xfrm>
+          <a:prstGeom prst="rect">
+            <a:avLst/>
+          </a:prstGeom>
+          <a:solidFill>
+            <a:srgbClr val="E68A00"/>
+          </a:solidFill>
+          <a:ln>
+            <a:noFill/>
+          </a:ln>
+          <a:effectLst/>
+        </p:spPr>
+        <p:style>
+          <a:lnRef idx="1">
+            <a:schemeClr val="accent1"/>
+          </a:lnRef>
+          <a:fillRef idx="3">
+            <a:schemeClr val="accent1"/>
+          </a:fillRef>
+          <a:effectRef idx="2">
+            <a:schemeClr val="accent1"/>
+          </a:effectRef>
+          <a:fontRef idx="minor">
+            <a:schemeClr val="lt1"/>
+          </a:fontRef>
+        </p:style>
+        <p:txBody>
+          <a:bodyPr rtlCol="0" anchor="ctr" wrap="square" lIns="25400" rIns="25400" tIns="0" bIns="0"/>
+          <a:lstStyle/>
+          <a:p>
+            <a:pPr algn="ctr"/>
+            <a:r>
+              <a:rPr sz="800" b="1" i="0">
+                <a:solidFill>
+                  <a:srgbClr val="FFFFFF"/>
+                </a:solidFill>
+                <a:latin typeface="Segoe UI"/>
+              </a:rPr>
+              <a:t>Verify</a:t>
+            </a:r>
+          </a:p>
+        </p:txBody>
+      </p:sp>
+      <p:sp>
+        <p:nvSpPr>
+          <p:cNvPr id="39" name="Rectangle 38"/>
+          <p:cNvSpPr/>
+          <p:nvPr/>
+        </p:nvSpPr>
+        <p:spPr>
+          <a:xfrm>
+            <a:off x="5212080" y="3813048"/>
+            <a:ext cx="3566160" cy="411480"/>
+          </a:xfrm>
+          <a:prstGeom prst="rect">
+            <a:avLst/>
+          </a:prstGeom>
+          <a:solidFill>
+            <a:srgbClr val="FFFFFF"/>
+          </a:solidFill>
+          <a:ln>
+            <a:noFill/>
+          </a:ln>
+          <a:effectLst/>
+        </p:spPr>
+        <p:style>
+          <a:lnRef idx="1">
+            <a:schemeClr val="accent1"/>
+          </a:lnRef>
+          <a:fillRef idx="3">
+            <a:schemeClr val="accent1"/>
+          </a:fillRef>
+          <a:effectRef idx="2">
+            <a:schemeClr val="accent1"/>
+          </a:effectRef>
+          <a:fontRef idx="minor">
+            <a:schemeClr val="lt1"/>
+          </a:fontRef>
+        </p:style>
+        <p:txBody>
+          <a:bodyPr rtlCol="0" anchor="ctr" wrap="square" lIns="50800" rIns="38100" tIns="12700" bIns="12700"/>
+          <a:lstStyle/>
+          <a:p>
+            <a:pPr algn="l"/>
+            <a:r>
+              <a:rPr sz="780" b="0" i="0">
+                <a:solidFill>
+                  <a:srgbClr val="5A493F"/>
+                </a:solidFill>
+                <a:latin typeface="Segoe UI"/>
+              </a:rPr>
+              <a:t>MET building in ANB; equipment via CNS/MET spec</a:t>
+            </a:r>
+          </a:p>
+        </p:txBody>
+      </p:sp>
+      <p:sp>
+        <p:nvSpPr>
+          <p:cNvPr id="40" name="Rectangle 39"/>
+          <p:cNvSpPr/>
+          <p:nvPr/>
+        </p:nvSpPr>
+        <p:spPr>
+          <a:xfrm>
+            <a:off x="365760" y="4224528"/>
+            <a:ext cx="2606040" cy="411480"/>
+          </a:xfrm>
+          <a:prstGeom prst="rect">
+            <a:avLst/>
+          </a:prstGeom>
+          <a:solidFill>
+            <a:srgbClr val="F4EFE9"/>
+          </a:solidFill>
+          <a:ln>
+            <a:noFill/>
+          </a:ln>
+          <a:effectLst/>
+        </p:spPr>
+        <p:style>
+          <a:lnRef idx="1">
+            <a:schemeClr val="accent1"/>
+          </a:lnRef>
+          <a:fillRef idx="3">
+            <a:schemeClr val="accent1"/>
+          </a:fillRef>
+          <a:effectRef idx="2">
+            <a:schemeClr val="accent1"/>
+          </a:effectRef>
+          <a:fontRef idx="minor">
+            <a:schemeClr val="lt1"/>
+          </a:fontRef>
+        </p:style>
+        <p:txBody>
+          <a:bodyPr rtlCol="0" anchor="ctr" wrap="square" lIns="50800" rIns="38100" tIns="12700" bIns="12700"/>
+          <a:lstStyle/>
+          <a:p>
+            <a:pPr algn="l"/>
+            <a:r>
+              <a:rPr sz="780" b="1" i="0">
+                <a:solidFill>
+                  <a:srgbClr val="A33D2E"/>
+                </a:solidFill>
+                <a:latin typeface="Segoe UI"/>
+              </a:rPr>
+              <a:t>Integrated Building (ATCT/ARFF/MET)</a:t>
+            </a:r>
+          </a:p>
+        </p:txBody>
+      </p:sp>
+      <p:sp>
+        <p:nvSpPr>
+          <p:cNvPr id="41" name="Rectangle 40"/>
+          <p:cNvSpPr/>
+          <p:nvPr/>
+        </p:nvSpPr>
+        <p:spPr>
+          <a:xfrm>
+            <a:off x="2971800" y="4224528"/>
+            <a:ext cx="640080" cy="411480"/>
+          </a:xfrm>
+          <a:prstGeom prst="rect">
+            <a:avLst/>
+          </a:prstGeom>
+          <a:solidFill>
+            <a:srgbClr val="F4EFE9"/>
+          </a:solidFill>
+          <a:ln>
+            <a:noFill/>
+          </a:ln>
+          <a:effectLst/>
+        </p:spPr>
+        <p:style>
+          <a:lnRef idx="1">
+            <a:schemeClr val="accent1"/>
+          </a:lnRef>
+          <a:fillRef idx="3">
+            <a:schemeClr val="accent1"/>
+          </a:fillRef>
+          <a:effectRef idx="2">
+            <a:schemeClr val="accent1"/>
+          </a:effectRef>
+          <a:fontRef idx="minor">
+            <a:schemeClr val="lt1"/>
+          </a:fontRef>
+        </p:style>
+        <p:txBody>
+          <a:bodyPr rtlCol="0" anchor="ctr" wrap="square" lIns="50800" rIns="38100" tIns="12700" bIns="12700"/>
+          <a:lstStyle/>
+          <a:p>
+            <a:pPr algn="ctr"/>
+            <a:r>
+              <a:rPr sz="780" b="0" i="0">
+                <a:solidFill>
+                  <a:srgbClr val="5A493F"/>
+                </a:solidFill>
+                <a:latin typeface="Segoe UI"/>
+              </a:rPr>
+              <a:t>Yes</a:t>
+            </a:r>
+          </a:p>
+        </p:txBody>
+      </p:sp>
+      <p:sp>
+        <p:nvSpPr>
+          <p:cNvPr id="42" name="Rectangle 41"/>
+          <p:cNvSpPr/>
+          <p:nvPr/>
+        </p:nvSpPr>
+        <p:spPr>
+          <a:xfrm>
+            <a:off x="3611880" y="4224528"/>
+            <a:ext cx="640080" cy="411480"/>
+          </a:xfrm>
+          <a:prstGeom prst="rect">
+            <a:avLst/>
+          </a:prstGeom>
+          <a:solidFill>
+            <a:srgbClr val="F4EFE9"/>
+          </a:solidFill>
+          <a:ln>
+            <a:noFill/>
+          </a:ln>
+          <a:effectLst/>
+        </p:spPr>
+        <p:style>
+          <a:lnRef idx="1">
+            <a:schemeClr val="accent1"/>
+          </a:lnRef>
+          <a:fillRef idx="3">
+            <a:schemeClr val="accent1"/>
+          </a:fillRef>
+          <a:effectRef idx="2">
+            <a:schemeClr val="accent1"/>
+          </a:effectRef>
+          <a:fontRef idx="minor">
+            <a:schemeClr val="lt1"/>
+          </a:fontRef>
+        </p:style>
+        <p:txBody>
+          <a:bodyPr rtlCol="0" anchor="ctr" wrap="square" lIns="50800" rIns="38100" tIns="12700" bIns="12700"/>
+          <a:lstStyle/>
+          <a:p>
+            <a:pPr algn="ctr"/>
+            <a:r>
+              <a:rPr sz="780" b="0" i="0">
+                <a:solidFill>
+                  <a:srgbClr val="5A493F"/>
+                </a:solidFill>
+                <a:latin typeface="Segoe UI"/>
+              </a:rPr>
+              <a:t>Yes</a:t>
+            </a:r>
+          </a:p>
+        </p:txBody>
+      </p:sp>
+      <p:sp>
+        <p:nvSpPr>
+          <p:cNvPr id="43" name="Rectangle 42"/>
+          <p:cNvSpPr/>
+          <p:nvPr/>
+        </p:nvSpPr>
+        <p:spPr>
+          <a:xfrm>
+            <a:off x="4251960" y="4224528"/>
+            <a:ext cx="960120" cy="411480"/>
+          </a:xfrm>
+          <a:prstGeom prst="rect">
+            <a:avLst/>
+          </a:prstGeom>
+          <a:solidFill>
+            <a:srgbClr val="2E7D32"/>
+          </a:solidFill>
+          <a:ln>
+            <a:noFill/>
+          </a:ln>
+          <a:effectLst/>
+        </p:spPr>
+        <p:style>
+          <a:lnRef idx="1">
+            <a:schemeClr val="accent1"/>
+          </a:lnRef>
+          <a:fillRef idx="3">
+            <a:schemeClr val="accent1"/>
+          </a:fillRef>
+          <a:effectRef idx="2">
+            <a:schemeClr val="accent1"/>
+          </a:effectRef>
+          <a:fontRef idx="minor">
+            <a:schemeClr val="lt1"/>
+          </a:fontRef>
+        </p:style>
+        <p:txBody>
+          <a:bodyPr rtlCol="0" anchor="ctr" wrap="square" lIns="25400" rIns="25400" tIns="0" bIns="0"/>
+          <a:lstStyle/>
+          <a:p>
+            <a:pPr algn="ctr"/>
+            <a:r>
+              <a:rPr sz="800" b="1" i="0">
+                <a:solidFill>
+                  <a:srgbClr val="FFFFFF"/>
+                </a:solidFill>
+                <a:latin typeface="Segoe UI"/>
+              </a:rPr>
+              <a:t>Covered</a:t>
+            </a:r>
+          </a:p>
+        </p:txBody>
+      </p:sp>
+      <p:sp>
+        <p:nvSpPr>
+          <p:cNvPr id="44" name="Rectangle 43"/>
+          <p:cNvSpPr/>
+          <p:nvPr/>
+        </p:nvSpPr>
+        <p:spPr>
+          <a:xfrm>
+            <a:off x="5212080" y="4224528"/>
+            <a:ext cx="3566160" cy="411480"/>
+          </a:xfrm>
+          <a:prstGeom prst="rect">
+            <a:avLst/>
+          </a:prstGeom>
+          <a:solidFill>
+            <a:srgbClr val="F4EFE9"/>
+          </a:solidFill>
+          <a:ln>
+            <a:noFill/>
+          </a:ln>
+          <a:effectLst/>
+        </p:spPr>
+        <p:style>
+          <a:lnRef idx="1">
+            <a:schemeClr val="accent1"/>
+          </a:lnRef>
+          <a:fillRef idx="3">
+            <a:schemeClr val="accent1"/>
+          </a:fillRef>
+          <a:effectRef idx="2">
+            <a:schemeClr val="accent1"/>
+          </a:effectRef>
+          <a:fontRef idx="minor">
+            <a:schemeClr val="lt1"/>
+          </a:fontRef>
+        </p:style>
+        <p:txBody>
+          <a:bodyPr rtlCol="0" anchor="ctr" wrap="square" lIns="50800" rIns="38100" tIns="12700" bIns="12700"/>
+          <a:lstStyle/>
+          <a:p>
+            <a:pPr algn="l"/>
+            <a:r>
+              <a:rPr sz="780" b="0" i="0">
+                <a:solidFill>
+                  <a:srgbClr val="5A493F"/>
+                </a:solidFill>
+                <a:latin typeface="Segoe UI"/>
+              </a:rPr>
+              <a:t>ANB Arch / C&amp;S / M&amp;E</a:t>
+            </a:r>
+          </a:p>
+        </p:txBody>
+      </p:sp>
+      <p:sp>
+        <p:nvSpPr>
+          <p:cNvPr id="45" name="Rectangle 44"/>
+          <p:cNvSpPr/>
+          <p:nvPr/>
+        </p:nvSpPr>
+        <p:spPr>
+          <a:xfrm>
+            <a:off x="365760" y="4636008"/>
+            <a:ext cx="2606040" cy="411480"/>
+          </a:xfrm>
+          <a:prstGeom prst="rect">
+            <a:avLst/>
+          </a:prstGeom>
+          <a:solidFill>
+            <a:srgbClr val="FFFFFF"/>
+          </a:solidFill>
+          <a:ln>
+            <a:noFill/>
+          </a:ln>
+          <a:effectLst/>
+        </p:spPr>
+        <p:style>
+          <a:lnRef idx="1">
+            <a:schemeClr val="accent1"/>
+          </a:lnRef>
+          <a:fillRef idx="3">
+            <a:schemeClr val="accent1"/>
+          </a:fillRef>
+          <a:effectRef idx="2">
+            <a:schemeClr val="accent1"/>
+          </a:effectRef>
+          <a:fontRef idx="minor">
+            <a:schemeClr val="lt1"/>
+          </a:fontRef>
+        </p:style>
+        <p:txBody>
+          <a:bodyPr rtlCol="0" anchor="ctr" wrap="square" lIns="50800" rIns="38100" tIns="12700" bIns="12700"/>
+          <a:lstStyle/>
+          <a:p>
+            <a:pPr algn="l"/>
+            <a:r>
+              <a:rPr sz="780" b="1" i="0">
+                <a:solidFill>
+                  <a:srgbClr val="A33D2E"/>
+                </a:solidFill>
+                <a:latin typeface="Segoe UI"/>
+              </a:rPr>
+              <a:t>Perimeter, security &amp; access</a:t>
+            </a:r>
+          </a:p>
+        </p:txBody>
+      </p:sp>
+      <p:sp>
+        <p:nvSpPr>
+          <p:cNvPr id="46" name="Rectangle 45"/>
+          <p:cNvSpPr/>
+          <p:nvPr/>
+        </p:nvSpPr>
+        <p:spPr>
+          <a:xfrm>
+            <a:off x="2971800" y="4636008"/>
+            <a:ext cx="640080" cy="411480"/>
+          </a:xfrm>
+          <a:prstGeom prst="rect">
+            <a:avLst/>
+          </a:prstGeom>
+          <a:solidFill>
+            <a:srgbClr val="FFFFFF"/>
+          </a:solidFill>
+          <a:ln>
+            <a:noFill/>
+          </a:ln>
+          <a:effectLst/>
+        </p:spPr>
+        <p:style>
+          <a:lnRef idx="1">
+            <a:schemeClr val="accent1"/>
+          </a:lnRef>
+          <a:fillRef idx="3">
+            <a:schemeClr val="accent1"/>
+          </a:fillRef>
+          <a:effectRef idx="2">
+            <a:schemeClr val="accent1"/>
+          </a:effectRef>
+          <a:fontRef idx="minor">
+            <a:schemeClr val="lt1"/>
+          </a:fontRef>
+        </p:style>
+        <p:txBody>
+          <a:bodyPr rtlCol="0" anchor="ctr" wrap="square" lIns="50800" rIns="38100" tIns="12700" bIns="12700"/>
+          <a:lstStyle/>
+          <a:p>
+            <a:pPr algn="ctr"/>
+            <a:r>
+              <a:rPr sz="780" b="0" i="0">
+                <a:solidFill>
+                  <a:srgbClr val="5A493F"/>
+                </a:solidFill>
+                <a:latin typeface="Segoe UI"/>
+              </a:rPr>
+              <a:t>Yes</a:t>
+            </a:r>
+          </a:p>
+        </p:txBody>
+      </p:sp>
+      <p:sp>
+        <p:nvSpPr>
+          <p:cNvPr id="47" name="Rectangle 46"/>
+          <p:cNvSpPr/>
+          <p:nvPr/>
+        </p:nvSpPr>
+        <p:spPr>
+          <a:xfrm>
+            <a:off x="3611880" y="4636008"/>
+            <a:ext cx="640080" cy="411480"/>
+          </a:xfrm>
+          <a:prstGeom prst="rect">
+            <a:avLst/>
+          </a:prstGeom>
+          <a:solidFill>
+            <a:srgbClr val="FFFFFF"/>
+          </a:solidFill>
+          <a:ln>
+            <a:noFill/>
+          </a:ln>
+          <a:effectLst/>
+        </p:spPr>
+        <p:style>
+          <a:lnRef idx="1">
+            <a:schemeClr val="accent1"/>
+          </a:lnRef>
+          <a:fillRef idx="3">
+            <a:schemeClr val="accent1"/>
+          </a:fillRef>
+          <a:effectRef idx="2">
+            <a:schemeClr val="accent1"/>
+          </a:effectRef>
+          <a:fontRef idx="minor">
+            <a:schemeClr val="lt1"/>
+          </a:fontRef>
+        </p:style>
+        <p:txBody>
+          <a:bodyPr rtlCol="0" anchor="ctr" wrap="square" lIns="50800" rIns="38100" tIns="12700" bIns="12700"/>
+          <a:lstStyle/>
+          <a:p>
+            <a:pPr algn="ctr"/>
+            <a:r>
+              <a:rPr sz="780" b="0" i="0">
+                <a:solidFill>
+                  <a:srgbClr val="5A493F"/>
+                </a:solidFill>
+                <a:latin typeface="Segoe UI"/>
+              </a:rPr>
+              <a:t>Yes</a:t>
+            </a:r>
+          </a:p>
+        </p:txBody>
+      </p:sp>
+      <p:sp>
+        <p:nvSpPr>
+          <p:cNvPr id="48" name="Rectangle 47"/>
+          <p:cNvSpPr/>
+          <p:nvPr/>
+        </p:nvSpPr>
+        <p:spPr>
+          <a:xfrm>
+            <a:off x="4251960" y="4636008"/>
+            <a:ext cx="960120" cy="411480"/>
+          </a:xfrm>
+          <a:prstGeom prst="rect">
+            <a:avLst/>
+          </a:prstGeom>
+          <a:solidFill>
+            <a:srgbClr val="2E7D32"/>
+          </a:solidFill>
+          <a:ln>
+            <a:noFill/>
+          </a:ln>
+          <a:effectLst/>
+        </p:spPr>
+        <p:style>
+          <a:lnRef idx="1">
+            <a:schemeClr val="accent1"/>
+          </a:lnRef>
+          <a:fillRef idx="3">
+            <a:schemeClr val="accent1"/>
+          </a:fillRef>
+          <a:effectRef idx="2">
+            <a:schemeClr val="accent1"/>
+          </a:effectRef>
+          <a:fontRef idx="minor">
+            <a:schemeClr val="lt1"/>
+          </a:fontRef>
+        </p:style>
+        <p:txBody>
+          <a:bodyPr rtlCol="0" anchor="ctr" wrap="square" lIns="25400" rIns="25400" tIns="0" bIns="0"/>
+          <a:lstStyle/>
+          <a:p>
+            <a:pPr algn="ctr"/>
+            <a:r>
+              <a:rPr sz="800" b="1" i="0">
+                <a:solidFill>
+                  <a:srgbClr val="FFFFFF"/>
+                </a:solidFill>
+                <a:latin typeface="Segoe UI"/>
+              </a:rPr>
+              <a:t>Covered</a:t>
+            </a:r>
+          </a:p>
+        </p:txBody>
+      </p:sp>
+      <p:sp>
+        <p:nvSpPr>
+          <p:cNvPr id="49" name="Rectangle 48"/>
+          <p:cNvSpPr/>
+          <p:nvPr/>
+        </p:nvSpPr>
+        <p:spPr>
+          <a:xfrm>
+            <a:off x="5212080" y="4636008"/>
+            <a:ext cx="3566160" cy="411480"/>
+          </a:xfrm>
+          <a:prstGeom prst="rect">
+            <a:avLst/>
+          </a:prstGeom>
+          <a:solidFill>
+            <a:srgbClr val="FFFFFF"/>
+          </a:solidFill>
+          <a:ln>
+            <a:noFill/>
+          </a:ln>
+          <a:effectLst/>
+        </p:spPr>
+        <p:style>
+          <a:lnRef idx="1">
+            <a:schemeClr val="accent1"/>
+          </a:lnRef>
+          <a:fillRef idx="3">
+            <a:schemeClr val="accent1"/>
+          </a:fillRef>
+          <a:effectRef idx="2">
+            <a:schemeClr val="accent1"/>
+          </a:effectRef>
+          <a:fontRef idx="minor">
+            <a:schemeClr val="lt1"/>
+          </a:fontRef>
+        </p:style>
+        <p:txBody>
+          <a:bodyPr rtlCol="0" anchor="ctr" wrap="square" lIns="50800" rIns="38100" tIns="12700" bIns="12700"/>
+          <a:lstStyle/>
+          <a:p>
+            <a:pPr algn="l"/>
+            <a:r>
+              <a:rPr sz="780" b="0" i="0">
+                <a:solidFill>
+                  <a:srgbClr val="5A493F"/>
+                </a:solidFill>
+                <a:latin typeface="Segoe UI"/>
+              </a:rPr>
+              <a:t>Security fence + lighting; access control</a:t>
+            </a:r>
+          </a:p>
+        </p:txBody>
+      </p:sp>
+      <p:sp>
+        <p:nvSpPr>
+          <p:cNvPr id="50" name="Rectangle 49"/>
+          <p:cNvSpPr/>
+          <p:nvPr/>
+        </p:nvSpPr>
+        <p:spPr>
+          <a:xfrm>
+            <a:off x="365760" y="5047488"/>
+            <a:ext cx="2606040" cy="411480"/>
+          </a:xfrm>
+          <a:prstGeom prst="rect">
+            <a:avLst/>
+          </a:prstGeom>
+          <a:solidFill>
+            <a:srgbClr val="F4EFE9"/>
+          </a:solidFill>
+          <a:ln>
+            <a:noFill/>
+          </a:ln>
+          <a:effectLst/>
+        </p:spPr>
+        <p:style>
+          <a:lnRef idx="1">
+            <a:schemeClr val="accent1"/>
+          </a:lnRef>
+          <a:fillRef idx="3">
+            <a:schemeClr val="accent1"/>
+          </a:fillRef>
+          <a:effectRef idx="2">
+            <a:schemeClr val="accent1"/>
+          </a:effectRef>
+          <a:fontRef idx="minor">
+            <a:schemeClr val="lt1"/>
+          </a:fontRef>
+        </p:style>
+        <p:txBody>
+          <a:bodyPr rtlCol="0" anchor="ctr" wrap="square" lIns="50800" rIns="38100" tIns="12700" bIns="12700"/>
+          <a:lstStyle/>
+          <a:p>
+            <a:pPr algn="l"/>
+            <a:r>
+              <a:rPr sz="780" b="1" i="0">
+                <a:solidFill>
+                  <a:srgbClr val="A33D2E"/>
+                </a:solidFill>
+                <a:latin typeface="Segoe UI"/>
+              </a:rPr>
+              <a:t>Airside roads, car park &amp; utilities</a:t>
+            </a:r>
+          </a:p>
+        </p:txBody>
+      </p:sp>
+      <p:sp>
+        <p:nvSpPr>
+          <p:cNvPr id="51" name="Rectangle 50"/>
+          <p:cNvSpPr/>
+          <p:nvPr/>
+        </p:nvSpPr>
+        <p:spPr>
+          <a:xfrm>
+            <a:off x="2971800" y="5047488"/>
+            <a:ext cx="640080" cy="411480"/>
+          </a:xfrm>
+          <a:prstGeom prst="rect">
+            <a:avLst/>
+          </a:prstGeom>
+          <a:solidFill>
+            <a:srgbClr val="F4EFE9"/>
+          </a:solidFill>
+          <a:ln>
+            <a:noFill/>
+          </a:ln>
+          <a:effectLst/>
+        </p:spPr>
+        <p:style>
+          <a:lnRef idx="1">
+            <a:schemeClr val="accent1"/>
+          </a:lnRef>
+          <a:fillRef idx="3">
+            <a:schemeClr val="accent1"/>
+          </a:fillRef>
+          <a:effectRef idx="2">
+            <a:schemeClr val="accent1"/>
+          </a:effectRef>
+          <a:fontRef idx="minor">
+            <a:schemeClr val="lt1"/>
+          </a:fontRef>
+        </p:style>
+        <p:txBody>
+          <a:bodyPr rtlCol="0" anchor="ctr" wrap="square" lIns="50800" rIns="38100" tIns="12700" bIns="12700"/>
+          <a:lstStyle/>
+          <a:p>
+            <a:pPr algn="ctr"/>
+            <a:r>
+              <a:rPr sz="780" b="0" i="0">
+                <a:solidFill>
+                  <a:srgbClr val="5A493F"/>
+                </a:solidFill>
+                <a:latin typeface="Segoe UI"/>
+              </a:rPr>
+              <a:t>Yes</a:t>
+            </a:r>
+          </a:p>
+        </p:txBody>
+      </p:sp>
+      <p:sp>
+        <p:nvSpPr>
+          <p:cNvPr id="52" name="Rectangle 51"/>
+          <p:cNvSpPr/>
+          <p:nvPr/>
+        </p:nvSpPr>
+        <p:spPr>
+          <a:xfrm>
+            <a:off x="3611880" y="5047488"/>
+            <a:ext cx="640080" cy="411480"/>
+          </a:xfrm>
+          <a:prstGeom prst="rect">
+            <a:avLst/>
+          </a:prstGeom>
+          <a:solidFill>
+            <a:srgbClr val="F4EFE9"/>
+          </a:solidFill>
+          <a:ln>
+            <a:noFill/>
+          </a:ln>
+          <a:effectLst/>
+        </p:spPr>
+        <p:style>
+          <a:lnRef idx="1">
+            <a:schemeClr val="accent1"/>
+          </a:lnRef>
+          <a:fillRef idx="3">
+            <a:schemeClr val="accent1"/>
+          </a:fillRef>
+          <a:effectRef idx="2">
+            <a:schemeClr val="accent1"/>
+          </a:effectRef>
+          <a:fontRef idx="minor">
+            <a:schemeClr val="lt1"/>
+          </a:fontRef>
+        </p:style>
+        <p:txBody>
+          <a:bodyPr rtlCol="0" anchor="ctr" wrap="square" lIns="50800" rIns="38100" tIns="12700" bIns="12700"/>
+          <a:lstStyle/>
+          <a:p>
+            <a:pPr algn="ctr"/>
+            <a:r>
+              <a:rPr sz="780" b="0" i="0">
+                <a:solidFill>
+                  <a:srgbClr val="5A493F"/>
+                </a:solidFill>
+                <a:latin typeface="Segoe UI"/>
+              </a:rPr>
+              <a:t>Yes</a:t>
+            </a:r>
+          </a:p>
+        </p:txBody>
+      </p:sp>
+      <p:sp>
+        <p:nvSpPr>
+          <p:cNvPr id="53" name="Rectangle 52"/>
+          <p:cNvSpPr/>
+          <p:nvPr/>
+        </p:nvSpPr>
+        <p:spPr>
+          <a:xfrm>
+            <a:off x="4251960" y="5047488"/>
+            <a:ext cx="960120" cy="411480"/>
+          </a:xfrm>
+          <a:prstGeom prst="rect">
+            <a:avLst/>
+          </a:prstGeom>
+          <a:solidFill>
+            <a:srgbClr val="2E7D32"/>
+          </a:solidFill>
+          <a:ln>
+            <a:noFill/>
+          </a:ln>
+          <a:effectLst/>
+        </p:spPr>
+        <p:style>
+          <a:lnRef idx="1">
+            <a:schemeClr val="accent1"/>
+          </a:lnRef>
+          <a:fillRef idx="3">
+            <a:schemeClr val="accent1"/>
+          </a:fillRef>
+          <a:effectRef idx="2">
+            <a:schemeClr val="accent1"/>
+          </a:effectRef>
+          <a:fontRef idx="minor">
+            <a:schemeClr val="lt1"/>
+          </a:fontRef>
+        </p:style>
+        <p:txBody>
+          <a:bodyPr rtlCol="0" anchor="ctr" wrap="square" lIns="25400" rIns="25400" tIns="0" bIns="0"/>
+          <a:lstStyle/>
+          <a:p>
+            <a:pPr algn="ctr"/>
+            <a:r>
+              <a:rPr sz="800" b="1" i="0">
+                <a:solidFill>
+                  <a:srgbClr val="FFFFFF"/>
+                </a:solidFill>
+                <a:latin typeface="Segoe UI"/>
+              </a:rPr>
+              <a:t>Covered</a:t>
+            </a:r>
+          </a:p>
+        </p:txBody>
+      </p:sp>
+      <p:sp>
+        <p:nvSpPr>
+          <p:cNvPr id="54" name="Rectangle 53"/>
+          <p:cNvSpPr/>
+          <p:nvPr/>
+        </p:nvSpPr>
+        <p:spPr>
+          <a:xfrm>
+            <a:off x="5212080" y="5047488"/>
+            <a:ext cx="3566160" cy="411480"/>
+          </a:xfrm>
+          <a:prstGeom prst="rect">
+            <a:avLst/>
+          </a:prstGeom>
+          <a:solidFill>
+            <a:srgbClr val="F4EFE9"/>
+          </a:solidFill>
+          <a:ln>
+            <a:noFill/>
+          </a:ln>
+          <a:effectLst/>
+        </p:spPr>
+        <p:style>
+          <a:lnRef idx="1">
+            <a:schemeClr val="accent1"/>
+          </a:lnRef>
+          <a:fillRef idx="3">
+            <a:schemeClr val="accent1"/>
+          </a:fillRef>
+          <a:effectRef idx="2">
+            <a:schemeClr val="accent1"/>
+          </a:effectRef>
+          <a:fontRef idx="minor">
+            <a:schemeClr val="lt1"/>
+          </a:fontRef>
+        </p:style>
+        <p:txBody>
+          <a:bodyPr rtlCol="0" anchor="ctr" wrap="square" lIns="50800" rIns="38100" tIns="12700" bIns="12700"/>
+          <a:lstStyle/>
+          <a:p>
+            <a:pPr algn="l"/>
+            <a:r>
+              <a:rPr sz="780" b="0" i="0">
+                <a:solidFill>
+                  <a:srgbClr val="5A493F"/>
+                </a:solidFill>
+                <a:latin typeface="Segoe UI"/>
+              </a:rPr>
+              <a:t>Perimeter road; sitewide utilities; fire hydrant</a:t>
+            </a:r>
+          </a:p>
+        </p:txBody>
+      </p:sp>
+      <p:sp>
+        <p:nvSpPr>
+          <p:cNvPr id="55" name="Rectangle 54"/>
+          <p:cNvSpPr/>
+          <p:nvPr/>
+        </p:nvSpPr>
+        <p:spPr>
+          <a:xfrm>
+            <a:off x="365760" y="5458968"/>
+            <a:ext cx="2606040" cy="411480"/>
+          </a:xfrm>
+          <a:prstGeom prst="rect">
+            <a:avLst/>
+          </a:prstGeom>
+          <a:solidFill>
+            <a:srgbClr val="FFFFFF"/>
+          </a:solidFill>
+          <a:ln>
+            <a:noFill/>
+          </a:ln>
+          <a:effectLst/>
+        </p:spPr>
+        <p:style>
+          <a:lnRef idx="1">
+            <a:schemeClr val="accent1"/>
+          </a:lnRef>
+          <a:fillRef idx="3">
+            <a:schemeClr val="accent1"/>
+          </a:fillRef>
+          <a:effectRef idx="2">
+            <a:schemeClr val="accent1"/>
+          </a:effectRef>
+          <a:fontRef idx="minor">
+            <a:schemeClr val="lt1"/>
+          </a:fontRef>
+        </p:style>
+        <p:txBody>
+          <a:bodyPr rtlCol="0" anchor="ctr" wrap="square" lIns="50800" rIns="38100" tIns="12700" bIns="12700"/>
+          <a:lstStyle/>
+          <a:p>
+            <a:pPr algn="l"/>
+            <a:r>
+              <a:rPr sz="780" b="1" i="0">
+                <a:solidFill>
+                  <a:srgbClr val="A33D2E"/>
+                </a:solidFill>
+                <a:latin typeface="Segoe UI"/>
+              </a:rPr>
+              <a:t>NSC / specialist equipment</a:t>
+            </a:r>
+          </a:p>
+        </p:txBody>
+      </p:sp>
+      <p:sp>
+        <p:nvSpPr>
+          <p:cNvPr id="56" name="Rectangle 55"/>
+          <p:cNvSpPr/>
+          <p:nvPr/>
+        </p:nvSpPr>
+        <p:spPr>
+          <a:xfrm>
+            <a:off x="2971800" y="5458968"/>
+            <a:ext cx="640080" cy="411480"/>
+          </a:xfrm>
+          <a:prstGeom prst="rect">
+            <a:avLst/>
+          </a:prstGeom>
+          <a:solidFill>
+            <a:srgbClr val="FFFFFF"/>
+          </a:solidFill>
+          <a:ln>
+            <a:noFill/>
+          </a:ln>
+          <a:effectLst/>
+        </p:spPr>
+        <p:style>
+          <a:lnRef idx="1">
+            <a:schemeClr val="accent1"/>
+          </a:lnRef>
+          <a:fillRef idx="3">
+            <a:schemeClr val="accent1"/>
+          </a:fillRef>
+          <a:effectRef idx="2">
+            <a:schemeClr val="accent1"/>
+          </a:effectRef>
+          <a:fontRef idx="minor">
+            <a:schemeClr val="lt1"/>
+          </a:fontRef>
+        </p:style>
+        <p:txBody>
+          <a:bodyPr rtlCol="0" anchor="ctr" wrap="square" lIns="50800" rIns="38100" tIns="12700" bIns="12700"/>
+          <a:lstStyle/>
+          <a:p>
+            <a:pPr algn="ctr"/>
+            <a:r>
+              <a:rPr sz="780" b="0" i="0">
+                <a:solidFill>
+                  <a:srgbClr val="5A493F"/>
+                </a:solidFill>
+                <a:latin typeface="Segoe UI"/>
+              </a:rPr>
+              <a:t>Spec</a:t>
+            </a:r>
+          </a:p>
+        </p:txBody>
+      </p:sp>
+      <p:sp>
+        <p:nvSpPr>
+          <p:cNvPr id="57" name="Rectangle 56"/>
+          <p:cNvSpPr/>
+          <p:nvPr/>
+        </p:nvSpPr>
+        <p:spPr>
+          <a:xfrm>
+            <a:off x="3611880" y="5458968"/>
+            <a:ext cx="640080" cy="411480"/>
+          </a:xfrm>
+          <a:prstGeom prst="rect">
+            <a:avLst/>
+          </a:prstGeom>
+          <a:solidFill>
+            <a:srgbClr val="FFFFFF"/>
+          </a:solidFill>
+          <a:ln>
+            <a:noFill/>
+          </a:ln>
+          <a:effectLst/>
+        </p:spPr>
+        <p:style>
+          <a:lnRef idx="1">
+            <a:schemeClr val="accent1"/>
+          </a:lnRef>
+          <a:fillRef idx="3">
+            <a:schemeClr val="accent1"/>
+          </a:fillRef>
+          <a:effectRef idx="2">
+            <a:schemeClr val="accent1"/>
+          </a:effectRef>
+          <a:fontRef idx="minor">
+            <a:schemeClr val="lt1"/>
+          </a:fontRef>
+        </p:style>
+        <p:txBody>
+          <a:bodyPr rtlCol="0" anchor="ctr" wrap="square" lIns="50800" rIns="38100" tIns="12700" bIns="12700"/>
+          <a:lstStyle/>
+          <a:p>
+            <a:pPr algn="ctr"/>
+            <a:r>
+              <a:rPr sz="780" b="0" i="0">
+                <a:solidFill>
+                  <a:srgbClr val="5A493F"/>
+                </a:solidFill>
+                <a:latin typeface="Segoe UI"/>
+              </a:rPr>
+              <a:t>Spec</a:t>
+            </a:r>
+          </a:p>
+        </p:txBody>
+      </p:sp>
+      <p:sp>
+        <p:nvSpPr>
+          <p:cNvPr id="58" name="Rectangle 57"/>
+          <p:cNvSpPr/>
+          <p:nvPr/>
+        </p:nvSpPr>
+        <p:spPr>
+          <a:xfrm>
+            <a:off x="4251960" y="5458968"/>
+            <a:ext cx="960120" cy="411480"/>
+          </a:xfrm>
+          <a:prstGeom prst="rect">
+            <a:avLst/>
+          </a:prstGeom>
+          <a:solidFill>
+            <a:srgbClr val="3E5C76"/>
+          </a:solidFill>
+          <a:ln>
+            <a:noFill/>
+          </a:ln>
+          <a:effectLst/>
+        </p:spPr>
+        <p:style>
+          <a:lnRef idx="1">
+            <a:schemeClr val="accent1"/>
+          </a:lnRef>
+          <a:fillRef idx="3">
+            <a:schemeClr val="accent1"/>
+          </a:fillRef>
+          <a:effectRef idx="2">
+            <a:schemeClr val="accent1"/>
+          </a:effectRef>
+          <a:fontRef idx="minor">
+            <a:schemeClr val="lt1"/>
+          </a:fontRef>
+        </p:style>
+        <p:txBody>
+          <a:bodyPr rtlCol="0" anchor="ctr" wrap="square" lIns="25400" rIns="25400" tIns="0" bIns="0"/>
+          <a:lstStyle/>
+          <a:p>
+            <a:pPr algn="ctr"/>
+            <a:r>
+              <a:rPr sz="800" b="1" i="0">
+                <a:solidFill>
+                  <a:srgbClr val="FFFFFF"/>
+                </a:solidFill>
+                <a:latin typeface="Segoe UI"/>
+              </a:rPr>
+              <a:t>Confirm</a:t>
+            </a:r>
+          </a:p>
+        </p:txBody>
+      </p:sp>
+      <p:sp>
+        <p:nvSpPr>
+          <p:cNvPr id="59" name="Rectangle 58"/>
+          <p:cNvSpPr/>
+          <p:nvPr/>
+        </p:nvSpPr>
+        <p:spPr>
+          <a:xfrm>
+            <a:off x="5212080" y="5458968"/>
+            <a:ext cx="3566160" cy="411480"/>
+          </a:xfrm>
+          <a:prstGeom prst="rect">
+            <a:avLst/>
+          </a:prstGeom>
+          <a:solidFill>
+            <a:srgbClr val="FFFFFF"/>
+          </a:solidFill>
+          <a:ln>
+            <a:noFill/>
+          </a:ln>
+          <a:effectLst/>
+        </p:spPr>
+        <p:style>
+          <a:lnRef idx="1">
+            <a:schemeClr val="accent1"/>
+          </a:lnRef>
+          <a:fillRef idx="3">
+            <a:schemeClr val="accent1"/>
+          </a:fillRef>
+          <a:effectRef idx="2">
+            <a:schemeClr val="accent1"/>
+          </a:effectRef>
+          <a:fontRef idx="minor">
+            <a:schemeClr val="lt1"/>
+          </a:fontRef>
+        </p:style>
+        <p:txBody>
+          <a:bodyPr rtlCol="0" anchor="ctr" wrap="square" lIns="50800" rIns="38100" tIns="12700" bIns="12700"/>
+          <a:lstStyle/>
+          <a:p>
+            <a:pPr algn="l"/>
+            <a:r>
+              <a:rPr sz="780" b="0" i="0">
+                <a:solidFill>
+                  <a:srgbClr val="5A493F"/>
+                </a:solidFill>
+                <a:latin typeface="Segoe UI"/>
+              </a:rPr>
+              <a:t>Mark NSC · FAT/SAT/T&amp;C · BCAA compatibility · BoQ</a:t>
+            </a:r>
+          </a:p>
+        </p:txBody>
+      </p:sp>
+      <p:cxnSp>
+        <p:nvCxnSpPr>
+          <p:cNvPr id="60" name="Connector 59"/>
+          <p:cNvCxnSpPr/>
+          <p:nvPr/>
+        </p:nvCxnSpPr>
+        <p:spPr>
+          <a:xfrm>
+            <a:off x="365760" y="6537960"/>
+            <a:ext cx="6492240" cy="0"/>
+          </a:xfrm>
+          <a:prstGeom prst="bentConnector3">
+            <a:avLst/>
+          </a:prstGeom>
+          <a:ln w="9525">
+            <a:solidFill>
+              <a:srgbClr val="E5E5E5"/>
+            </a:solidFill>
+          </a:ln>
+        </p:spPr>
+        <p:style>
+          <a:lnRef idx="2">
+            <a:schemeClr val="accent1"/>
+          </a:lnRef>
+          <a:fillRef idx="0">
+            <a:schemeClr val="accent1"/>
+          </a:fillRef>
+          <a:effectRef idx="1">
+            <a:schemeClr val="accent1"/>
+          </a:effectRef>
+          <a:fontRef idx="minor">
+            <a:schemeClr val="tx1"/>
+          </a:fontRef>
+        </p:style>
+      </p:cxnSp>
+      <p:sp>
+        <p:nvSpPr>
+          <p:cNvPr id="61" name="TextBox 60"/>
+          <p:cNvSpPr txBox="1"/>
+          <p:nvPr/>
+        </p:nvSpPr>
+        <p:spPr>
+          <a:xfrm>
+            <a:off x="3657600" y="6565392"/>
+            <a:ext cx="2286000" cy="228600"/>
+          </a:xfrm>
+          <a:prstGeom prst="rect">
+            <a:avLst/>
+          </a:prstGeom>
+          <a:noFill/>
+        </p:spPr>
+        <p:txBody>
+          <a:bodyPr wrap="square" lIns="0" rIns="0" tIns="0" bIns="0">
+            <a:spAutoFit/>
+          </a:bodyPr>
+          <a:lstStyle/>
+          <a:p>
+            <a:pPr algn="ctr"/>
+            <a:r>
+              <a:rPr sz="800" b="0" i="0">
+                <a:solidFill>
+                  <a:srgbClr val="8C7464"/>
+                </a:solidFill>
+                <a:latin typeface="Segoe UI"/>
+              </a:rPr>
+              <a:t>STRICTLY CONFIDENTIAL</a:t>
+            </a:r>
+          </a:p>
+        </p:txBody>
+      </p:sp>
+      <p:cxnSp>
+        <p:nvCxnSpPr>
+          <p:cNvPr id="62" name="Connector 61"/>
+          <p:cNvCxnSpPr/>
+          <p:nvPr/>
+        </p:nvCxnSpPr>
+        <p:spPr>
+          <a:xfrm>
+            <a:off x="8503920" y="6565392"/>
+            <a:ext cx="0" cy="201167"/>
+          </a:xfrm>
+          <a:prstGeom prst="bentConnector3">
+            <a:avLst/>
+          </a:prstGeom>
+          <a:ln w="25400">
+            <a:solidFill>
+              <a:srgbClr val="6D594C"/>
+            </a:solidFill>
+          </a:ln>
+        </p:spPr>
+        <p:style>
+          <a:lnRef idx="2">
+            <a:schemeClr val="accent1"/>
+          </a:lnRef>
+          <a:fillRef idx="0">
+            <a:schemeClr val="accent1"/>
+          </a:fillRef>
+          <a:effectRef idx="1">
+            <a:schemeClr val="accent1"/>
+          </a:effectRef>
+          <a:fontRef idx="minor">
+            <a:schemeClr val="tx1"/>
+          </a:fontRef>
+        </p:style>
+      </p:cxnSp>
+      <p:sp>
+        <p:nvSpPr>
+          <p:cNvPr id="63" name="TextBox 62"/>
+          <p:cNvSpPr txBox="1"/>
+          <p:nvPr/>
+        </p:nvSpPr>
+        <p:spPr>
+          <a:xfrm>
+            <a:off x="8595360" y="6547104"/>
+            <a:ext cx="365760" cy="274320"/>
+          </a:xfrm>
+          <a:prstGeom prst="rect">
+            <a:avLst/>
+          </a:prstGeom>
+          <a:noFill/>
+        </p:spPr>
+        <p:txBody>
+          <a:bodyPr wrap="square" lIns="0" rIns="0" tIns="0" bIns="0">
+            <a:spAutoFit/>
+          </a:bodyPr>
+          <a:lstStyle/>
+          <a:p>
+            <a:pPr algn="l"/>
+            <a:r>
+              <a:rPr sz="1000" b="1" i="0">
+                <a:solidFill>
+                  <a:srgbClr val="6D594C"/>
+                </a:solidFill>
+                <a:latin typeface="Segoe UI"/>
+              </a:rPr>
+              <a:t>18</a:t>
+            </a:r>
+          </a:p>
+        </p:txBody>
+      </p:sp>
+    </p:spTree>
+  </p:cSld>
+  <p:clrMapOvr>
+    <a:masterClrMapping/>
+  </p:clrMapOvr>
+</p:sld>
+</file>
+
+<file path=ppt/slides/slide19.xml><?xml version="1.0" encoding="utf-8"?>
+<p:sld xmlns:a="http://schemas.openxmlformats.org/drawingml/2006/main" xmlns:p="http://schemas.openxmlformats.org/presentationml/2006/main" xmlns:r="http://schemas.openxmlformats.org/officeDocument/2006/relationships">
+  <p:cSld>
+    <p:spTree>
+      <p:nvGrpSpPr>
+        <p:cNvPr id="1" name=""/>
+        <p:cNvGrpSpPr/>
+        <p:nvPr/>
+      </p:nvGrpSpPr>
+      <p:grpSpPr/>
+      <p:sp>
+        <p:nvSpPr>
+          <p:cNvPr id="2" name="TextBox 1"/>
+          <p:cNvSpPr txBox="1"/>
+          <p:nvPr/>
+        </p:nvSpPr>
+        <p:spPr>
+          <a:xfrm>
+            <a:off x="457200" y="365760"/>
+            <a:ext cx="8412480" cy="457200"/>
+          </a:xfrm>
+          <a:prstGeom prst="rect">
+            <a:avLst/>
+          </a:prstGeom>
+          <a:noFill/>
+        </p:spPr>
+        <p:txBody>
+          <a:bodyPr wrap="square" lIns="0" rIns="0" tIns="0" bIns="0">
+            <a:spAutoFit/>
+          </a:bodyPr>
+          <a:lstStyle/>
+          <a:p>
+            <a:pPr algn="l"/>
+            <a:r>
+              <a:rPr sz="2200" b="1" i="0">
+                <a:solidFill>
+                  <a:srgbClr val="6D594C"/>
+                </a:solidFill>
+                <a:latin typeface="Segoe UI"/>
+              </a:rPr>
+              <a:t>Actions to Make It IFC-Ready</a:t>
+            </a:r>
+          </a:p>
+        </p:txBody>
+      </p:sp>
+      <p:sp>
+        <p:nvSpPr>
+          <p:cNvPr id="3" name="TextBox 2"/>
+          <p:cNvSpPr txBox="1"/>
+          <p:nvPr/>
+        </p:nvSpPr>
+        <p:spPr>
+          <a:xfrm>
+            <a:off x="457200" y="822960"/>
+            <a:ext cx="8412480" cy="411480"/>
+          </a:xfrm>
+          <a:prstGeom prst="rect">
+            <a:avLst/>
+          </a:prstGeom>
+          <a:noFill/>
+        </p:spPr>
+        <p:txBody>
+          <a:bodyPr wrap="square" lIns="0" rIns="0" tIns="0" bIns="0">
+            <a:spAutoFit/>
+          </a:bodyPr>
+          <a:lstStyle/>
+          <a:p>
+            <a:pPr algn="l"/>
+            <a:r>
+              <a:rPr sz="1300" b="0" i="0">
+                <a:solidFill>
+                  <a:srgbClr val="8C7464"/>
+                </a:solidFill>
+                <a:latin typeface="Segoe UI"/>
+              </a:rPr>
+              <a:t>Five moves, in order — convert the Tender transmittals into a controlled IFC baseline</a:t>
+            </a:r>
+          </a:p>
+        </p:txBody>
+      </p:sp>
+      <p:cxnSp>
+        <p:nvCxnSpPr>
+          <p:cNvPr id="4" name="Connector 3"/>
+          <p:cNvCxnSpPr/>
+          <p:nvPr/>
+        </p:nvCxnSpPr>
+        <p:spPr>
+          <a:xfrm>
+            <a:off x="457200" y="1298448"/>
+            <a:ext cx="8229600" cy="0"/>
+          </a:xfrm>
+          <a:prstGeom prst="bentConnector3">
+            <a:avLst/>
+          </a:prstGeom>
+          <a:ln w="9525">
+            <a:solidFill>
+              <a:srgbClr val="E5E5E5"/>
+            </a:solidFill>
+          </a:ln>
+        </p:spPr>
+        <p:style>
+          <a:lnRef idx="2">
+            <a:schemeClr val="accent1"/>
+          </a:lnRef>
+          <a:fillRef idx="0">
+            <a:schemeClr val="accent1"/>
+          </a:fillRef>
+          <a:effectRef idx="1">
+            <a:schemeClr val="accent1"/>
+          </a:effectRef>
+          <a:fontRef idx="minor">
+            <a:schemeClr val="tx1"/>
+          </a:fontRef>
+        </p:style>
+      </p:cxnSp>
+      <p:sp>
+        <p:nvSpPr>
+          <p:cNvPr id="5" name="Rectangle 4"/>
+          <p:cNvSpPr/>
+          <p:nvPr/>
+        </p:nvSpPr>
+        <p:spPr>
+          <a:xfrm>
+            <a:off x="411480" y="1554480"/>
+            <a:ext cx="8275320" cy="731520"/>
+          </a:xfrm>
+          <a:prstGeom prst="rect">
+            <a:avLst/>
+          </a:prstGeom>
+          <a:solidFill>
+            <a:srgbClr val="F4EFE9"/>
+          </a:solidFill>
+          <a:ln>
+            <a:noFill/>
+          </a:ln>
+          <a:effectLst/>
+        </p:spPr>
+        <p:style>
+          <a:lnRef idx="1">
+            <a:schemeClr val="accent1"/>
+          </a:lnRef>
+          <a:fillRef idx="3">
+            <a:schemeClr val="accent1"/>
+          </a:fillRef>
+          <a:effectRef idx="2">
+            <a:schemeClr val="accent1"/>
+          </a:effectRef>
+          <a:fontRef idx="minor">
+            <a:schemeClr val="lt1"/>
+          </a:fontRef>
+        </p:style>
+        <p:txBody>
+          <a:bodyPr rtlCol="0" anchor="ctr"/>
+          <a:lstStyle/>
+          <a:p>
+            <a:pPr algn="ctr"/>
+          </a:p>
+        </p:txBody>
+      </p:sp>
+      <p:sp>
+        <p:nvSpPr>
+          <p:cNvPr id="6" name="TextBox 5"/>
+          <p:cNvSpPr txBox="1"/>
+          <p:nvPr/>
+        </p:nvSpPr>
+        <p:spPr>
+          <a:xfrm>
+            <a:off x="502920" y="1554480"/>
+            <a:ext cx="713232" cy="731520"/>
+          </a:xfrm>
+          <a:prstGeom prst="rect">
+            <a:avLst/>
+          </a:prstGeom>
+          <a:noFill/>
+        </p:spPr>
+        <p:txBody>
+          <a:bodyPr wrap="square" lIns="0" rIns="0" tIns="0" bIns="0" anchor="ctr">
+            <a:spAutoFit/>
+          </a:bodyPr>
+          <a:lstStyle/>
+          <a:p>
+            <a:pPr algn="ctr"/>
+            <a:r>
+              <a:rPr sz="2200" b="1" i="0">
+                <a:solidFill>
+                  <a:srgbClr val="A33D2E"/>
+                </a:solidFill>
+                <a:latin typeface="Segoe UI"/>
+              </a:rPr>
+              <a:t>P1</a:t>
+            </a:r>
+          </a:p>
+        </p:txBody>
+      </p:sp>
+      <p:sp>
+        <p:nvSpPr>
+          <p:cNvPr id="7" name="TextBox 6"/>
+          <p:cNvSpPr txBox="1"/>
+          <p:nvPr/>
+        </p:nvSpPr>
+        <p:spPr>
+          <a:xfrm>
+            <a:off x="1325880" y="1627632"/>
+            <a:ext cx="5074920" cy="320040"/>
+          </a:xfrm>
+          <a:prstGeom prst="rect">
+            <a:avLst/>
+          </a:prstGeom>
+          <a:noFill/>
+        </p:spPr>
+        <p:txBody>
+          <a:bodyPr wrap="square" lIns="0" rIns="0" tIns="0" bIns="0">
+            <a:spAutoFit/>
+          </a:bodyPr>
+          <a:lstStyle/>
+          <a:p>
+            <a:pPr algn="l"/>
+            <a:r>
+              <a:rPr sz="1250" b="1" i="0">
+                <a:solidFill>
+                  <a:srgbClr val="6D594C"/>
+                </a:solidFill>
+                <a:latin typeface="Segoe UI"/>
+              </a:rPr>
+              <a:t>Consolidate into one master register (V0)</a:t>
+            </a:r>
+          </a:p>
+        </p:txBody>
+      </p:sp>
+      <p:sp>
+        <p:nvSpPr>
+          <p:cNvPr id="8" name="TextBox 7"/>
+          <p:cNvSpPr txBox="1"/>
+          <p:nvPr/>
+        </p:nvSpPr>
+        <p:spPr>
+          <a:xfrm>
+            <a:off x="1325880" y="1938528"/>
+            <a:ext cx="5074920" cy="365760"/>
+          </a:xfrm>
+          <a:prstGeom prst="rect">
+            <a:avLst/>
+          </a:prstGeom>
+          <a:noFill/>
+        </p:spPr>
+        <p:txBody>
+          <a:bodyPr wrap="square" lIns="0" rIns="0" tIns="0" bIns="0">
+            <a:spAutoFit/>
+          </a:bodyPr>
+          <a:lstStyle/>
+          <a:p>
+            <a:pPr algn="l"/>
+            <a:r>
+              <a:rPr sz="850" b="0" i="0">
+                <a:solidFill>
+                  <a:srgbClr val="5A493F"/>
+                </a:solidFill>
+                <a:latin typeface="Segoe UI"/>
+              </a:rPr>
+              <a:t>All 765 drawings + 119 spec chapters as one row-per-document register, owned by APMT.</a:t>
+            </a:r>
+          </a:p>
+        </p:txBody>
+      </p:sp>
+      <p:sp>
+        <p:nvSpPr>
+          <p:cNvPr id="9" name="TextBox 8"/>
+          <p:cNvSpPr txBox="1"/>
+          <p:nvPr/>
+        </p:nvSpPr>
+        <p:spPr>
+          <a:xfrm>
+            <a:off x="6537960" y="1645920"/>
+            <a:ext cx="2057400" cy="320040"/>
+          </a:xfrm>
+          <a:prstGeom prst="rect">
+            <a:avLst/>
+          </a:prstGeom>
+          <a:noFill/>
+        </p:spPr>
+        <p:txBody>
+          <a:bodyPr wrap="square" lIns="0" rIns="0" tIns="0" bIns="0" anchor="ctr">
+            <a:spAutoFit/>
+          </a:bodyPr>
+          <a:lstStyle/>
+          <a:p>
+            <a:pPr algn="l"/>
+            <a:r>
+              <a:rPr sz="950" b="1" i="0">
+                <a:solidFill>
+                  <a:srgbClr val="3E5C76"/>
+                </a:solidFill>
+                <a:latin typeface="Segoe UI"/>
+              </a:rPr>
+              <a:t>APMT / PMO</a:t>
+            </a:r>
+          </a:p>
+        </p:txBody>
+      </p:sp>
+      <p:sp>
+        <p:nvSpPr>
+          <p:cNvPr id="10" name="TextBox 9"/>
+          <p:cNvSpPr txBox="1"/>
+          <p:nvPr/>
+        </p:nvSpPr>
+        <p:spPr>
+          <a:xfrm>
+            <a:off x="6537960" y="1965960"/>
+            <a:ext cx="2057400" cy="274320"/>
+          </a:xfrm>
+          <a:prstGeom prst="rect">
+            <a:avLst/>
+          </a:prstGeom>
+          <a:noFill/>
+        </p:spPr>
+        <p:txBody>
+          <a:bodyPr wrap="square" lIns="0" rIns="0" tIns="0" bIns="0" anchor="ctr">
+            <a:spAutoFit/>
+          </a:bodyPr>
+          <a:lstStyle/>
+          <a:p>
+            <a:pPr algn="l"/>
+            <a:r>
+              <a:rPr sz="900" b="0" i="0">
+                <a:solidFill>
+                  <a:srgbClr val="8C7464"/>
+                </a:solidFill>
+                <a:latin typeface="Segoe UI"/>
+              </a:rPr>
+              <a:t>ref Slide 7·8</a:t>
+            </a:r>
+          </a:p>
+        </p:txBody>
+      </p:sp>
+      <p:sp>
+        <p:nvSpPr>
+          <p:cNvPr id="11" name="Rectangle 10"/>
+          <p:cNvSpPr/>
+          <p:nvPr/>
+        </p:nvSpPr>
+        <p:spPr>
+          <a:xfrm>
+            <a:off x="411480" y="2395728"/>
+            <a:ext cx="8275320" cy="731520"/>
+          </a:xfrm>
+          <a:prstGeom prst="rect">
+            <a:avLst/>
+          </a:prstGeom>
+          <a:solidFill>
+            <a:srgbClr val="FFFFFF"/>
+          </a:solidFill>
+          <a:ln>
+            <a:noFill/>
+          </a:ln>
+          <a:effectLst/>
+        </p:spPr>
+        <p:style>
+          <a:lnRef idx="1">
+            <a:schemeClr val="accent1"/>
+          </a:lnRef>
+          <a:fillRef idx="3">
+            <a:schemeClr val="accent1"/>
+          </a:fillRef>
+          <a:effectRef idx="2">
+            <a:schemeClr val="accent1"/>
+          </a:effectRef>
+          <a:fontRef idx="minor">
+            <a:schemeClr val="lt1"/>
+          </a:fontRef>
+        </p:style>
+        <p:txBody>
+          <a:bodyPr rtlCol="0" anchor="ctr"/>
+          <a:lstStyle/>
+          <a:p>
+            <a:pPr algn="ctr"/>
+          </a:p>
+        </p:txBody>
+      </p:sp>
+      <p:sp>
+        <p:nvSpPr>
+          <p:cNvPr id="12" name="TextBox 11"/>
+          <p:cNvSpPr txBox="1"/>
+          <p:nvPr/>
+        </p:nvSpPr>
+        <p:spPr>
+          <a:xfrm>
+            <a:off x="502920" y="2395728"/>
+            <a:ext cx="713232" cy="731520"/>
+          </a:xfrm>
+          <a:prstGeom prst="rect">
+            <a:avLst/>
+          </a:prstGeom>
+          <a:noFill/>
+        </p:spPr>
+        <p:txBody>
+          <a:bodyPr wrap="square" lIns="0" rIns="0" tIns="0" bIns="0" anchor="ctr">
+            <a:spAutoFit/>
+          </a:bodyPr>
+          <a:lstStyle/>
+          <a:p>
+            <a:pPr algn="ctr"/>
+            <a:r>
+              <a:rPr sz="2200" b="1" i="0">
+                <a:solidFill>
+                  <a:srgbClr val="A33D2E"/>
+                </a:solidFill>
+                <a:latin typeface="Segoe UI"/>
+              </a:rPr>
+              <a:t>P2</a:t>
+            </a:r>
+          </a:p>
+        </p:txBody>
+      </p:sp>
+      <p:sp>
+        <p:nvSpPr>
+          <p:cNvPr id="13" name="TextBox 12"/>
+          <p:cNvSpPr txBox="1"/>
+          <p:nvPr/>
+        </p:nvSpPr>
+        <p:spPr>
+          <a:xfrm>
+            <a:off x="1325880" y="2468880"/>
+            <a:ext cx="5074920" cy="320040"/>
+          </a:xfrm>
+          <a:prstGeom prst="rect">
+            <a:avLst/>
+          </a:prstGeom>
+          <a:noFill/>
+        </p:spPr>
+        <p:txBody>
+          <a:bodyPr wrap="square" lIns="0" rIns="0" tIns="0" bIns="0">
+            <a:spAutoFit/>
+          </a:bodyPr>
+          <a:lstStyle/>
+          <a:p>
+            <a:pPr algn="l"/>
+            <a:r>
+              <a:rPr sz="1250" b="1" i="0">
+                <a:solidFill>
+                  <a:srgbClr val="6D594C"/>
+                </a:solidFill>
+                <a:latin typeface="Segoe UI"/>
+              </a:rPr>
+              <a:t>Freeze revision &amp; add status</a:t>
+            </a:r>
+          </a:p>
+        </p:txBody>
+      </p:sp>
+      <p:sp>
+        <p:nvSpPr>
+          <p:cNvPr id="14" name="TextBox 13"/>
+          <p:cNvSpPr txBox="1"/>
+          <p:nvPr/>
+        </p:nvSpPr>
+        <p:spPr>
+          <a:xfrm>
+            <a:off x="1325880" y="2779776"/>
+            <a:ext cx="5074920" cy="365760"/>
+          </a:xfrm>
+          <a:prstGeom prst="rect">
+            <a:avLst/>
+          </a:prstGeom>
+          <a:noFill/>
+        </p:spPr>
+        <p:txBody>
+          <a:bodyPr wrap="square" lIns="0" rIns="0" tIns="0" bIns="0">
+            <a:spAutoFit/>
+          </a:bodyPr>
+          <a:lstStyle/>
+          <a:p>
+            <a:pPr algn="l"/>
+            <a:r>
+              <a:rPr sz="850" b="0" i="0">
+                <a:solidFill>
+                  <a:srgbClr val="5A493F"/>
+                </a:solidFill>
+                <a:latin typeface="Segoe UI"/>
+              </a:rPr>
+              <a:t>Tag each document IFC / For Tender / Superseded; add IFC baseline date; replace blank/"-".</a:t>
+            </a:r>
+          </a:p>
+        </p:txBody>
+      </p:sp>
+      <p:sp>
+        <p:nvSpPr>
+          <p:cNvPr id="15" name="TextBox 14"/>
+          <p:cNvSpPr txBox="1"/>
+          <p:nvPr/>
+        </p:nvSpPr>
+        <p:spPr>
+          <a:xfrm>
+            <a:off x="6537960" y="2487168"/>
+            <a:ext cx="2057400" cy="320040"/>
+          </a:xfrm>
+          <a:prstGeom prst="rect">
+            <a:avLst/>
+          </a:prstGeom>
+          <a:noFill/>
+        </p:spPr>
+        <p:txBody>
+          <a:bodyPr wrap="square" lIns="0" rIns="0" tIns="0" bIns="0" anchor="ctr">
+            <a:spAutoFit/>
+          </a:bodyPr>
+          <a:lstStyle/>
+          <a:p>
+            <a:pPr algn="l"/>
+            <a:r>
+              <a:rPr sz="950" b="1" i="0">
+                <a:solidFill>
+                  <a:srgbClr val="3E5C76"/>
+                </a:solidFill>
+                <a:latin typeface="Segoe UI"/>
+              </a:rPr>
+              <a:t>APMT + designers</a:t>
+            </a:r>
+          </a:p>
+        </p:txBody>
+      </p:sp>
+      <p:sp>
+        <p:nvSpPr>
+          <p:cNvPr id="16" name="TextBox 15"/>
+          <p:cNvSpPr txBox="1"/>
+          <p:nvPr/>
+        </p:nvSpPr>
+        <p:spPr>
+          <a:xfrm>
+            <a:off x="6537960" y="2807208"/>
+            <a:ext cx="2057400" cy="274320"/>
+          </a:xfrm>
+          <a:prstGeom prst="rect">
+            <a:avLst/>
+          </a:prstGeom>
+          <a:noFill/>
+        </p:spPr>
+        <p:txBody>
+          <a:bodyPr wrap="square" lIns="0" rIns="0" tIns="0" bIns="0" anchor="ctr">
+            <a:spAutoFit/>
+          </a:bodyPr>
+          <a:lstStyle/>
+          <a:p>
+            <a:pPr algn="l"/>
+            <a:r>
+              <a:rPr sz="900" b="0" i="0">
+                <a:solidFill>
+                  <a:srgbClr val="8C7464"/>
+                </a:solidFill>
+                <a:latin typeface="Segoe UI"/>
+              </a:rPr>
+              <a:t>ref Slide 8·12</a:t>
+            </a:r>
+          </a:p>
+        </p:txBody>
+      </p:sp>
+      <p:sp>
+        <p:nvSpPr>
+          <p:cNvPr id="17" name="Rectangle 16"/>
+          <p:cNvSpPr/>
+          <p:nvPr/>
+        </p:nvSpPr>
+        <p:spPr>
+          <a:xfrm>
+            <a:off x="411480" y="3236976"/>
+            <a:ext cx="8275320" cy="731520"/>
+          </a:xfrm>
+          <a:prstGeom prst="rect">
+            <a:avLst/>
+          </a:prstGeom>
+          <a:solidFill>
+            <a:srgbClr val="F4EFE9"/>
+          </a:solidFill>
+          <a:ln>
+            <a:noFill/>
+          </a:ln>
+          <a:effectLst/>
+        </p:spPr>
+        <p:style>
+          <a:lnRef idx="1">
+            <a:schemeClr val="accent1"/>
+          </a:lnRef>
+          <a:fillRef idx="3">
+            <a:schemeClr val="accent1"/>
+          </a:fillRef>
+          <a:effectRef idx="2">
+            <a:schemeClr val="accent1"/>
+          </a:effectRef>
+          <a:fontRef idx="minor">
+            <a:schemeClr val="lt1"/>
+          </a:fontRef>
+        </p:style>
+        <p:txBody>
+          <a:bodyPr rtlCol="0" anchor="ctr"/>
+          <a:lstStyle/>
+          <a:p>
+            <a:pPr algn="ctr"/>
+          </a:p>
+        </p:txBody>
+      </p:sp>
+      <p:sp>
+        <p:nvSpPr>
+          <p:cNvPr id="18" name="TextBox 17"/>
+          <p:cNvSpPr txBox="1"/>
+          <p:nvPr/>
+        </p:nvSpPr>
+        <p:spPr>
+          <a:xfrm>
+            <a:off x="502920" y="3236976"/>
+            <a:ext cx="713232" cy="731520"/>
+          </a:xfrm>
+          <a:prstGeom prst="rect">
+            <a:avLst/>
+          </a:prstGeom>
+          <a:noFill/>
+        </p:spPr>
+        <p:txBody>
+          <a:bodyPr wrap="square" lIns="0" rIns="0" tIns="0" bIns="0" anchor="ctr">
+            <a:spAutoFit/>
+          </a:bodyPr>
+          <a:lstStyle/>
+          <a:p>
+            <a:pPr algn="ctr"/>
+            <a:r>
+              <a:rPr sz="2200" b="1" i="0">
+                <a:solidFill>
+                  <a:srgbClr val="A33D2E"/>
+                </a:solidFill>
+                <a:latin typeface="Segoe UI"/>
+              </a:rPr>
+              <a:t>P3</a:t>
+            </a:r>
+          </a:p>
+        </p:txBody>
+      </p:sp>
+      <p:sp>
+        <p:nvSpPr>
+          <p:cNvPr id="19" name="TextBox 18"/>
+          <p:cNvSpPr txBox="1"/>
+          <p:nvPr/>
+        </p:nvSpPr>
+        <p:spPr>
+          <a:xfrm>
+            <a:off x="1325880" y="3310128"/>
+            <a:ext cx="5074920" cy="320040"/>
+          </a:xfrm>
+          <a:prstGeom prst="rect">
+            <a:avLst/>
+          </a:prstGeom>
+          <a:noFill/>
+        </p:spPr>
+        <p:txBody>
+          <a:bodyPr wrap="square" lIns="0" rIns="0" tIns="0" bIns="0">
+            <a:spAutoFit/>
+          </a:bodyPr>
+          <a:lstStyle/>
+          <a:p>
+            <a:pPr algn="l"/>
+            <a:r>
+              <a:rPr sz="1250" b="1" i="0">
+                <a:solidFill>
+                  <a:srgbClr val="6D594C"/>
+                </a:solidFill>
+                <a:latin typeface="Segoe UI"/>
+              </a:rPr>
+              <a:t>Harmonise the numbering</a:t>
+            </a:r>
+          </a:p>
+        </p:txBody>
+      </p:sp>
+      <p:sp>
+        <p:nvSpPr>
+          <p:cNvPr id="20" name="TextBox 19"/>
+          <p:cNvSpPr txBox="1"/>
+          <p:nvPr/>
+        </p:nvSpPr>
+        <p:spPr>
+          <a:xfrm>
+            <a:off x="1325880" y="3621024"/>
+            <a:ext cx="5074920" cy="365760"/>
+          </a:xfrm>
+          <a:prstGeom prst="rect">
+            <a:avLst/>
+          </a:prstGeom>
+          <a:noFill/>
+        </p:spPr>
+        <p:txBody>
+          <a:bodyPr wrap="square" lIns="0" rIns="0" tIns="0" bIns="0">
+            <a:spAutoFit/>
+          </a:bodyPr>
+          <a:lstStyle/>
+          <a:p>
+            <a:pPr algn="l"/>
+            <a:r>
+              <a:rPr sz="850" b="0" i="0">
+                <a:solidFill>
+                  <a:srgbClr val="5A493F"/>
+                </a:solidFill>
+                <a:latin typeface="Segoe UI"/>
+              </a:rPr>
+              <a:t>One scheme GLU-P01-[Asset]-[Disc]-[Type]-[Seq]; fix AV/UTL, separators, digits; clear all "---/XX".</a:t>
+            </a:r>
+          </a:p>
+        </p:txBody>
+      </p:sp>
+      <p:sp>
+        <p:nvSpPr>
+          <p:cNvPr id="21" name="TextBox 20"/>
+          <p:cNvSpPr txBox="1"/>
+          <p:nvPr/>
+        </p:nvSpPr>
+        <p:spPr>
+          <a:xfrm>
+            <a:off x="6537960" y="3328416"/>
+            <a:ext cx="2057400" cy="320040"/>
+          </a:xfrm>
+          <a:prstGeom prst="rect">
+            <a:avLst/>
+          </a:prstGeom>
+          <a:noFill/>
+        </p:spPr>
+        <p:txBody>
+          <a:bodyPr wrap="square" lIns="0" rIns="0" tIns="0" bIns="0" anchor="ctr">
+            <a:spAutoFit/>
+          </a:bodyPr>
+          <a:lstStyle/>
+          <a:p>
+            <a:pPr algn="l"/>
+            <a:r>
+              <a:rPr sz="950" b="1" i="0">
+                <a:solidFill>
+                  <a:srgbClr val="3E5C76"/>
+                </a:solidFill>
+                <a:latin typeface="Segoe UI"/>
+              </a:rPr>
+              <a:t>CAPE + APMT</a:t>
+            </a:r>
+          </a:p>
+        </p:txBody>
+      </p:sp>
+      <p:sp>
+        <p:nvSpPr>
+          <p:cNvPr id="22" name="TextBox 21"/>
+          <p:cNvSpPr txBox="1"/>
+          <p:nvPr/>
+        </p:nvSpPr>
+        <p:spPr>
+          <a:xfrm>
+            <a:off x="6537960" y="3648456"/>
+            <a:ext cx="2057400" cy="274320"/>
+          </a:xfrm>
+          <a:prstGeom prst="rect">
+            <a:avLst/>
+          </a:prstGeom>
+          <a:noFill/>
+        </p:spPr>
+        <p:txBody>
+          <a:bodyPr wrap="square" lIns="0" rIns="0" tIns="0" bIns="0" anchor="ctr">
+            <a:spAutoFit/>
+          </a:bodyPr>
+          <a:lstStyle/>
+          <a:p>
+            <a:pPr algn="l"/>
+            <a:r>
+              <a:rPr sz="900" b="0" i="0">
+                <a:solidFill>
+                  <a:srgbClr val="8C7464"/>
+                </a:solidFill>
+                <a:latin typeface="Segoe UI"/>
+              </a:rPr>
+              <a:t>ref Slide 10</a:t>
+            </a:r>
+          </a:p>
+        </p:txBody>
+      </p:sp>
+      <p:sp>
+        <p:nvSpPr>
+          <p:cNvPr id="23" name="Rectangle 22"/>
+          <p:cNvSpPr/>
+          <p:nvPr/>
+        </p:nvSpPr>
+        <p:spPr>
+          <a:xfrm>
+            <a:off x="411480" y="4078224"/>
+            <a:ext cx="8275320" cy="731520"/>
+          </a:xfrm>
+          <a:prstGeom prst="rect">
+            <a:avLst/>
+          </a:prstGeom>
+          <a:solidFill>
+            <a:srgbClr val="FFFFFF"/>
+          </a:solidFill>
+          <a:ln>
+            <a:noFill/>
+          </a:ln>
+          <a:effectLst/>
+        </p:spPr>
+        <p:style>
+          <a:lnRef idx="1">
+            <a:schemeClr val="accent1"/>
+          </a:lnRef>
+          <a:fillRef idx="3">
+            <a:schemeClr val="accent1"/>
+          </a:fillRef>
+          <a:effectRef idx="2">
+            <a:schemeClr val="accent1"/>
+          </a:effectRef>
+          <a:fontRef idx="minor">
+            <a:schemeClr val="lt1"/>
+          </a:fontRef>
+        </p:style>
+        <p:txBody>
+          <a:bodyPr rtlCol="0" anchor="ctr"/>
+          <a:lstStyle/>
+          <a:p>
+            <a:pPr algn="ctr"/>
+          </a:p>
+        </p:txBody>
+      </p:sp>
+      <p:sp>
+        <p:nvSpPr>
+          <p:cNvPr id="24" name="TextBox 23"/>
+          <p:cNvSpPr txBox="1"/>
+          <p:nvPr/>
+        </p:nvSpPr>
+        <p:spPr>
+          <a:xfrm>
+            <a:off x="502920" y="4078224"/>
+            <a:ext cx="713232" cy="731520"/>
+          </a:xfrm>
+          <a:prstGeom prst="rect">
+            <a:avLst/>
+          </a:prstGeom>
+          <a:noFill/>
+        </p:spPr>
+        <p:txBody>
+          <a:bodyPr wrap="square" lIns="0" rIns="0" tIns="0" bIns="0" anchor="ctr">
+            <a:spAutoFit/>
+          </a:bodyPr>
+          <a:lstStyle/>
+          <a:p>
+            <a:pPr algn="ctr"/>
+            <a:r>
+              <a:rPr sz="2200" b="1" i="0">
+                <a:solidFill>
+                  <a:srgbClr val="A33D2E"/>
+                </a:solidFill>
+                <a:latin typeface="Segoe UI"/>
+              </a:rPr>
+              <a:t>P4</a:t>
+            </a:r>
+          </a:p>
+        </p:txBody>
+      </p:sp>
+      <p:sp>
+        <p:nvSpPr>
+          <p:cNvPr id="25" name="TextBox 24"/>
+          <p:cNvSpPr txBox="1"/>
+          <p:nvPr/>
+        </p:nvSpPr>
+        <p:spPr>
+          <a:xfrm>
+            <a:off x="1325880" y="4151376"/>
+            <a:ext cx="5074920" cy="320040"/>
+          </a:xfrm>
+          <a:prstGeom prst="rect">
+            <a:avLst/>
+          </a:prstGeom>
+          <a:noFill/>
+        </p:spPr>
+        <p:txBody>
+          <a:bodyPr wrap="square" lIns="0" rIns="0" tIns="0" bIns="0">
+            <a:spAutoFit/>
+          </a:bodyPr>
+          <a:lstStyle/>
+          <a:p>
+            <a:pPr algn="l"/>
+            <a:r>
+              <a:rPr sz="1250" b="1" i="0">
+                <a:solidFill>
+                  <a:srgbClr val="6D594C"/>
+                </a:solidFill>
+                <a:latin typeface="Segoe UI"/>
+              </a:rPr>
+              <a:t>Add control &amp; cross-reference fields</a:t>
+            </a:r>
+          </a:p>
+        </p:txBody>
+      </p:sp>
+      <p:sp>
+        <p:nvSpPr>
+          <p:cNvPr id="26" name="TextBox 25"/>
+          <p:cNvSpPr txBox="1"/>
+          <p:nvPr/>
+        </p:nvSpPr>
+        <p:spPr>
+          <a:xfrm>
+            <a:off x="1325880" y="4462272"/>
+            <a:ext cx="5074920" cy="365760"/>
+          </a:xfrm>
+          <a:prstGeom prst="rect">
+            <a:avLst/>
+          </a:prstGeom>
+          <a:noFill/>
+        </p:spPr>
+        <p:txBody>
+          <a:bodyPr wrap="square" lIns="0" rIns="0" tIns="0" bIns="0">
+            <a:spAutoFit/>
+          </a:bodyPr>
+          <a:lstStyle/>
+          <a:p>
+            <a:pPr algn="l"/>
+            <a:r>
+              <a:rPr sz="850" b="0" i="0">
+                <a:solidFill>
+                  <a:srgbClr val="5A493F"/>
+                </a:solidFill>
+                <a:latin typeface="Segoe UI"/>
+              </a:rPr>
+              <a:t>Asset/zone, discipline, type, related spec/BoQ/model, dependencies, contractual status (CDP/NSC/PS), checker.</a:t>
+            </a:r>
+          </a:p>
+        </p:txBody>
+      </p:sp>
+      <p:sp>
+        <p:nvSpPr>
+          <p:cNvPr id="27" name="TextBox 26"/>
+          <p:cNvSpPr txBox="1"/>
+          <p:nvPr/>
+        </p:nvSpPr>
+        <p:spPr>
+          <a:xfrm>
+            <a:off x="6537960" y="4169663"/>
+            <a:ext cx="2057400" cy="320040"/>
+          </a:xfrm>
+          <a:prstGeom prst="rect">
+            <a:avLst/>
+          </a:prstGeom>
+          <a:noFill/>
+        </p:spPr>
+        <p:txBody>
+          <a:bodyPr wrap="square" lIns="0" rIns="0" tIns="0" bIns="0" anchor="ctr">
+            <a:spAutoFit/>
+          </a:bodyPr>
+          <a:lstStyle/>
+          <a:p>
+            <a:pPr algn="l"/>
+            <a:r>
+              <a:rPr sz="950" b="1" i="0">
+                <a:solidFill>
+                  <a:srgbClr val="3E5C76"/>
+                </a:solidFill>
+                <a:latin typeface="Segoe UI"/>
+              </a:rPr>
+              <a:t>APMT</a:t>
+            </a:r>
+          </a:p>
+        </p:txBody>
+      </p:sp>
+      <p:sp>
+        <p:nvSpPr>
+          <p:cNvPr id="28" name="TextBox 27"/>
+          <p:cNvSpPr txBox="1"/>
+          <p:nvPr/>
+        </p:nvSpPr>
+        <p:spPr>
+          <a:xfrm>
+            <a:off x="6537960" y="4489704"/>
+            <a:ext cx="2057400" cy="274320"/>
+          </a:xfrm>
+          <a:prstGeom prst="rect">
+            <a:avLst/>
+          </a:prstGeom>
+          <a:noFill/>
+        </p:spPr>
+        <p:txBody>
+          <a:bodyPr wrap="square" lIns="0" rIns="0" tIns="0" bIns="0" anchor="ctr">
+            <a:spAutoFit/>
+          </a:bodyPr>
+          <a:lstStyle/>
+          <a:p>
+            <a:pPr algn="l"/>
+            <a:r>
+              <a:rPr sz="900" b="0" i="0">
+                <a:solidFill>
+                  <a:srgbClr val="8C7464"/>
+                </a:solidFill>
+                <a:latin typeface="Segoe UI"/>
+              </a:rPr>
+              <a:t>ref Slide 8</a:t>
+            </a:r>
+          </a:p>
+        </p:txBody>
+      </p:sp>
+      <p:sp>
+        <p:nvSpPr>
+          <p:cNvPr id="29" name="Rectangle 28"/>
+          <p:cNvSpPr/>
+          <p:nvPr/>
+        </p:nvSpPr>
+        <p:spPr>
+          <a:xfrm>
+            <a:off x="411480" y="4919472"/>
+            <a:ext cx="8275320" cy="731520"/>
+          </a:xfrm>
+          <a:prstGeom prst="rect">
+            <a:avLst/>
+          </a:prstGeom>
+          <a:solidFill>
+            <a:srgbClr val="F4EFE9"/>
+          </a:solidFill>
+          <a:ln>
+            <a:noFill/>
+          </a:ln>
+          <a:effectLst/>
+        </p:spPr>
+        <p:style>
+          <a:lnRef idx="1">
+            <a:schemeClr val="accent1"/>
+          </a:lnRef>
+          <a:fillRef idx="3">
+            <a:schemeClr val="accent1"/>
+          </a:fillRef>
+          <a:effectRef idx="2">
+            <a:schemeClr val="accent1"/>
+          </a:effectRef>
+          <a:fontRef idx="minor">
+            <a:schemeClr val="lt1"/>
+          </a:fontRef>
+        </p:style>
+        <p:txBody>
+          <a:bodyPr rtlCol="0" anchor="ctr"/>
+          <a:lstStyle/>
+          <a:p>
+            <a:pPr algn="ctr"/>
+          </a:p>
+        </p:txBody>
+      </p:sp>
+      <p:sp>
+        <p:nvSpPr>
+          <p:cNvPr id="30" name="TextBox 29"/>
+          <p:cNvSpPr txBox="1"/>
+          <p:nvPr/>
+        </p:nvSpPr>
+        <p:spPr>
+          <a:xfrm>
+            <a:off x="502920" y="4919472"/>
+            <a:ext cx="713232" cy="731520"/>
+          </a:xfrm>
+          <a:prstGeom prst="rect">
+            <a:avLst/>
+          </a:prstGeom>
+          <a:noFill/>
+        </p:spPr>
+        <p:txBody>
+          <a:bodyPr wrap="square" lIns="0" rIns="0" tIns="0" bIns="0" anchor="ctr">
+            <a:spAutoFit/>
+          </a:bodyPr>
+          <a:lstStyle/>
+          <a:p>
+            <a:pPr algn="ctr"/>
+            <a:r>
+              <a:rPr sz="2200" b="1" i="0">
+                <a:solidFill>
+                  <a:srgbClr val="A33D2E"/>
+                </a:solidFill>
+                <a:latin typeface="Segoe UI"/>
+              </a:rPr>
+              <a:t>P5</a:t>
+            </a:r>
+          </a:p>
+        </p:txBody>
+      </p:sp>
+      <p:sp>
+        <p:nvSpPr>
+          <p:cNvPr id="31" name="TextBox 30"/>
+          <p:cNvSpPr txBox="1"/>
+          <p:nvPr/>
+        </p:nvSpPr>
+        <p:spPr>
+          <a:xfrm>
+            <a:off x="1325880" y="4992624"/>
+            <a:ext cx="5074920" cy="320040"/>
+          </a:xfrm>
+          <a:prstGeom prst="rect">
+            <a:avLst/>
+          </a:prstGeom>
+          <a:noFill/>
+        </p:spPr>
+        <p:txBody>
+          <a:bodyPr wrap="square" lIns="0" rIns="0" tIns="0" bIns="0">
+            <a:spAutoFit/>
+          </a:bodyPr>
+          <a:lstStyle/>
+          <a:p>
+            <a:pPr algn="l"/>
+            <a:r>
+              <a:rPr sz="1250" b="1" i="0">
+                <a:solidFill>
+                  <a:srgbClr val="6D594C"/>
+                </a:solidFill>
+                <a:latin typeface="Segoe UI"/>
+              </a:rPr>
+              <a:t>Map specs to CSI + 40-AF..48-OR &amp; link BoQ</a:t>
+            </a:r>
+          </a:p>
+        </p:txBody>
+      </p:sp>
+      <p:sp>
+        <p:nvSpPr>
+          <p:cNvPr id="32" name="TextBox 31"/>
+          <p:cNvSpPr txBox="1"/>
+          <p:nvPr/>
+        </p:nvSpPr>
+        <p:spPr>
+          <a:xfrm>
+            <a:off x="1325880" y="5303520"/>
+            <a:ext cx="5074920" cy="365760"/>
+          </a:xfrm>
+          <a:prstGeom prst="rect">
+            <a:avLst/>
+          </a:prstGeom>
+          <a:noFill/>
+        </p:spPr>
+        <p:txBody>
+          <a:bodyPr wrap="square" lIns="0" rIns="0" tIns="0" bIns="0">
+            <a:spAutoFit/>
+          </a:bodyPr>
+          <a:lstStyle/>
+          <a:p>
+            <a:pPr algn="l"/>
+            <a:r>
+              <a:rPr sz="850" b="0" i="0">
+                <a:solidFill>
+                  <a:srgbClr val="5A493F"/>
+                </a:solidFill>
+                <a:latin typeface="Segoe UI"/>
+              </a:rPr>
+              <a:t>Single Division 00/01; add ORAT/48-OR; cross-link spec–drawing–BoQ; close the ~16 BoQ gaps.</a:t>
+            </a:r>
+          </a:p>
+        </p:txBody>
+      </p:sp>
+      <p:sp>
+        <p:nvSpPr>
+          <p:cNvPr id="33" name="TextBox 32"/>
+          <p:cNvSpPr txBox="1"/>
+          <p:nvPr/>
+        </p:nvSpPr>
+        <p:spPr>
+          <a:xfrm>
+            <a:off x="6537960" y="5010912"/>
+            <a:ext cx="2057400" cy="320040"/>
+          </a:xfrm>
+          <a:prstGeom prst="rect">
+            <a:avLst/>
+          </a:prstGeom>
+          <a:noFill/>
+        </p:spPr>
+        <p:txBody>
+          <a:bodyPr wrap="square" lIns="0" rIns="0" tIns="0" bIns="0" anchor="ctr">
+            <a:spAutoFit/>
+          </a:bodyPr>
+          <a:lstStyle/>
+          <a:p>
+            <a:pPr algn="l"/>
+            <a:r>
+              <a:rPr sz="950" b="1" i="0">
+                <a:solidFill>
+                  <a:srgbClr val="3E5C76"/>
+                </a:solidFill>
+                <a:latin typeface="Segoe UI"/>
+              </a:rPr>
+              <a:t>CAPE / QS</a:t>
+            </a:r>
+          </a:p>
+        </p:txBody>
+      </p:sp>
+      <p:sp>
+        <p:nvSpPr>
+          <p:cNvPr id="34" name="TextBox 33"/>
+          <p:cNvSpPr txBox="1"/>
+          <p:nvPr/>
+        </p:nvSpPr>
+        <p:spPr>
+          <a:xfrm>
+            <a:off x="6537960" y="5330952"/>
+            <a:ext cx="2057400" cy="274320"/>
+          </a:xfrm>
+          <a:prstGeom prst="rect">
+            <a:avLst/>
+          </a:prstGeom>
+          <a:noFill/>
+        </p:spPr>
+        <p:txBody>
+          <a:bodyPr wrap="square" lIns="0" rIns="0" tIns="0" bIns="0" anchor="ctr">
+            <a:spAutoFit/>
+          </a:bodyPr>
+          <a:lstStyle/>
+          <a:p>
+            <a:pPr algn="l"/>
+            <a:r>
+              <a:rPr sz="900" b="0" i="0">
+                <a:solidFill>
+                  <a:srgbClr val="8C7464"/>
+                </a:solidFill>
+                <a:latin typeface="Segoe UI"/>
+              </a:rPr>
+              <a:t>ref Slide 11</a:t>
+            </a:r>
+          </a:p>
+        </p:txBody>
+      </p:sp>
+      <p:cxnSp>
+        <p:nvCxnSpPr>
+          <p:cNvPr id="35" name="Connector 34"/>
+          <p:cNvCxnSpPr/>
+          <p:nvPr/>
+        </p:nvCxnSpPr>
+        <p:spPr>
+          <a:xfrm>
+            <a:off x="365760" y="6537960"/>
+            <a:ext cx="6492240" cy="0"/>
+          </a:xfrm>
+          <a:prstGeom prst="bentConnector3">
+            <a:avLst/>
+          </a:prstGeom>
+          <a:ln w="9525">
+            <a:solidFill>
+              <a:srgbClr val="E5E5E5"/>
+            </a:solidFill>
+          </a:ln>
+        </p:spPr>
+        <p:style>
+          <a:lnRef idx="2">
+            <a:schemeClr val="accent1"/>
+          </a:lnRef>
+          <a:fillRef idx="0">
+            <a:schemeClr val="accent1"/>
+          </a:fillRef>
+          <a:effectRef idx="1">
+            <a:schemeClr val="accent1"/>
+          </a:effectRef>
+          <a:fontRef idx="minor">
+            <a:schemeClr val="tx1"/>
+          </a:fontRef>
+        </p:style>
+      </p:cxnSp>
+      <p:sp>
+        <p:nvSpPr>
+          <p:cNvPr id="36" name="TextBox 35"/>
+          <p:cNvSpPr txBox="1"/>
+          <p:nvPr/>
+        </p:nvSpPr>
+        <p:spPr>
+          <a:xfrm>
+            <a:off x="3657600" y="6565392"/>
+            <a:ext cx="2286000" cy="228600"/>
+          </a:xfrm>
+          <a:prstGeom prst="rect">
+            <a:avLst/>
+          </a:prstGeom>
+          <a:noFill/>
+        </p:spPr>
+        <p:txBody>
+          <a:bodyPr wrap="square" lIns="0" rIns="0" tIns="0" bIns="0">
+            <a:spAutoFit/>
+          </a:bodyPr>
+          <a:lstStyle/>
+          <a:p>
+            <a:pPr algn="ctr"/>
+            <a:r>
+              <a:rPr sz="800" b="0" i="0">
+                <a:solidFill>
+                  <a:srgbClr val="8C7464"/>
+                </a:solidFill>
+                <a:latin typeface="Segoe UI"/>
+              </a:rPr>
+              <a:t>STRICTLY CONFIDENTIAL</a:t>
+            </a:r>
+          </a:p>
+        </p:txBody>
+      </p:sp>
+      <p:cxnSp>
+        <p:nvCxnSpPr>
+          <p:cNvPr id="37" name="Connector 36"/>
+          <p:cNvCxnSpPr/>
+          <p:nvPr/>
+        </p:nvCxnSpPr>
+        <p:spPr>
+          <a:xfrm>
+            <a:off x="8503920" y="6565392"/>
+            <a:ext cx="0" cy="201167"/>
+          </a:xfrm>
+          <a:prstGeom prst="bentConnector3">
+            <a:avLst/>
+          </a:prstGeom>
+          <a:ln w="25400">
+            <a:solidFill>
+              <a:srgbClr val="6D594C"/>
+            </a:solidFill>
+          </a:ln>
+        </p:spPr>
+        <p:style>
+          <a:lnRef idx="2">
+            <a:schemeClr val="accent1"/>
+          </a:lnRef>
+          <a:fillRef idx="0">
+            <a:schemeClr val="accent1"/>
+          </a:fillRef>
+          <a:effectRef idx="1">
+            <a:schemeClr val="accent1"/>
+          </a:effectRef>
+          <a:fontRef idx="minor">
+            <a:schemeClr val="tx1"/>
+          </a:fontRef>
+        </p:style>
+      </p:cxnSp>
+      <p:sp>
+        <p:nvSpPr>
+          <p:cNvPr id="38" name="TextBox 37"/>
+          <p:cNvSpPr txBox="1"/>
+          <p:nvPr/>
+        </p:nvSpPr>
+        <p:spPr>
+          <a:xfrm>
+            <a:off x="8595360" y="6547104"/>
+            <a:ext cx="365760" cy="274320"/>
+          </a:xfrm>
+          <a:prstGeom prst="rect">
+            <a:avLst/>
+          </a:prstGeom>
+          <a:noFill/>
+        </p:spPr>
+        <p:txBody>
+          <a:bodyPr wrap="square" lIns="0" rIns="0" tIns="0" bIns="0">
+            <a:spAutoFit/>
+          </a:bodyPr>
+          <a:lstStyle/>
+          <a:p>
+            <a:pPr algn="l"/>
+            <a:r>
+              <a:rPr sz="1000" b="1" i="0">
+                <a:solidFill>
+                  <a:srgbClr val="6D594C"/>
+                </a:solidFill>
+                <a:latin typeface="Segoe UI"/>
+              </a:rPr>
+              <a:t>19</a:t>
             </a:r>
           </a:p>
         </p:txBody>
